--- a/Final Presentation/XERO_Application_Presentation_Team 3.pptx
+++ b/Final Presentation/XERO_Application_Presentation_Team 3.pptx
@@ -1229,7 +1229,7 @@
   <p:cSld>
     <p:spTree>
       <p:nvGrpSpPr>
-        <p:cNvPr id="206" name="Shape 206"/>
+        <p:cNvPr id="207" name="Shape 207"/>
         <p:cNvGrpSpPr/>
         <p:nvPr/>
       </p:nvGrpSpPr>
@@ -1243,7 +1243,7 @@
       </p:grpSpPr>
       <p:sp>
         <p:nvSpPr>
-          <p:cNvPr id="207" name="Google Shape;207;g3919914d717_0_1355:notes"/>
+          <p:cNvPr id="208" name="Google Shape;208;g3919914d717_0_1355:notes"/>
           <p:cNvSpPr/>
           <p:nvPr>
             <p:ph idx="2" type="sldImg"/>
@@ -1278,7 +1278,7 @@
       </p:sp>
       <p:sp>
         <p:nvSpPr>
-          <p:cNvPr id="208" name="Google Shape;208;g3919914d717_0_1355:notes"/>
+          <p:cNvPr id="209" name="Google Shape;209;g3919914d717_0_1355:notes"/>
           <p:cNvSpPr txBox="1"/>
           <p:nvPr>
             <p:ph idx="1" type="body"/>
@@ -15463,6 +15463,34 @@
           </a:ln>
         </p:spPr>
       </p:pic>
+      <p:pic>
+        <p:nvPicPr>
+          <p:cNvPr id="206" name="Google Shape;206;p27"/>
+          <p:cNvPicPr preferRelativeResize="0"/>
+          <p:nvPr/>
+        </p:nvPicPr>
+        <p:blipFill>
+          <a:blip r:embed="rId7">
+            <a:alphaModFix/>
+          </a:blip>
+          <a:stretch>
+            <a:fillRect/>
+          </a:stretch>
+        </p:blipFill>
+        <p:spPr>
+          <a:xfrm>
+            <a:off x="6416100" y="1982225"/>
+            <a:ext cx="2205350" cy="652225"/>
+          </a:xfrm>
+          <a:prstGeom prst="rect">
+            <a:avLst/>
+          </a:prstGeom>
+          <a:noFill/>
+          <a:ln>
+            <a:noFill/>
+          </a:ln>
+        </p:spPr>
+      </p:pic>
     </p:spTree>
   </p:cSld>
   <p:clrMapOvr>
@@ -15476,7 +15504,7 @@
   <p:cSld>
     <p:spTree>
       <p:nvGrpSpPr>
-        <p:cNvPr id="209" name="Shape 209"/>
+        <p:cNvPr id="210" name="Shape 210"/>
         <p:cNvGrpSpPr/>
         <p:nvPr/>
       </p:nvGrpSpPr>
@@ -15490,7 +15518,7 @@
       </p:grpSpPr>
       <p:sp>
         <p:nvSpPr>
-          <p:cNvPr id="210" name="Google Shape;210;p28"/>
+          <p:cNvPr id="211" name="Google Shape;211;p28"/>
           <p:cNvSpPr txBox="1"/>
           <p:nvPr>
             <p:ph type="title"/>
@@ -16843,6 +16871,285 @@
 </file>
 
 <file path=ppt/theme/theme1.xml><?xml version="1.0" encoding="utf-8"?>
+<a:theme xmlns:a="http://schemas.openxmlformats.org/drawingml/2006/main" xmlns:r="http://schemas.openxmlformats.org/officeDocument/2006/relationships">
+  <a:themeElements>
+    <a:clrScheme name="Default">
+      <a:dk1>
+        <a:srgbClr val="000000"/>
+      </a:dk1>
+      <a:lt1>
+        <a:srgbClr val="FFFFFF"/>
+      </a:lt1>
+      <a:dk2>
+        <a:srgbClr val="158158"/>
+      </a:dk2>
+      <a:lt2>
+        <a:srgbClr val="F3F3F3"/>
+      </a:lt2>
+      <a:accent1>
+        <a:srgbClr val="058DC7"/>
+      </a:accent1>
+      <a:accent2>
+        <a:srgbClr val="50B432"/>
+      </a:accent2>
+      <a:accent3>
+        <a:srgbClr val="ED561B"/>
+      </a:accent3>
+      <a:accent4>
+        <a:srgbClr val="EDEF00"/>
+      </a:accent4>
+      <a:accent5>
+        <a:srgbClr val="24CBE5"/>
+      </a:accent5>
+      <a:accent6>
+        <a:srgbClr val="64E572"/>
+      </a:accent6>
+      <a:hlink>
+        <a:srgbClr val="2200CC"/>
+      </a:hlink>
+      <a:folHlink>
+        <a:srgbClr val="551A8B"/>
+      </a:folHlink>
+    </a:clrScheme>
+    <a:fontScheme name="Office">
+      <a:majorFont>
+        <a:latin typeface="Arial"/>
+        <a:ea typeface=""/>
+        <a:cs typeface=""/>
+        <a:font script="Jpan" typeface="ＭＳ Ｐゴシック"/>
+        <a:font script="Hang" typeface="맑은 고딕"/>
+        <a:font script="Hans" typeface="宋体"/>
+        <a:font script="Hant" typeface="新細明體"/>
+        <a:font script="Arab" typeface="Times New Roman"/>
+        <a:font script="Hebr" typeface="Times New Roman"/>
+        <a:font script="Thai" typeface="Angsana New"/>
+        <a:font script="Ethi" typeface="Nyala"/>
+        <a:font script="Beng" typeface="Vrinda"/>
+        <a:font script="Gujr" typeface="Shruti"/>
+        <a:font script="Khmr" typeface="MoolBoran"/>
+        <a:font script="Knda" typeface="Tunga"/>
+        <a:font script="Guru" typeface="Raavi"/>
+        <a:font script="Cans" typeface="Euphemia"/>
+        <a:font script="Cher" typeface="Plantagenet Cherokee"/>
+        <a:font script="Yiii" typeface="Microsoft Yi Baiti"/>
+        <a:font script="Tibt" typeface="Microsoft Himalaya"/>
+        <a:font script="Thaa" typeface="MV Boli"/>
+        <a:font script="Deva" typeface="Mangal"/>
+        <a:font script="Telu" typeface="Gautami"/>
+        <a:font script="Taml" typeface="Latha"/>
+        <a:font script="Syrc" typeface="Estrangelo Edessa"/>
+        <a:font script="Orya" typeface="Kalinga"/>
+        <a:font script="Mlym" typeface="Kartika"/>
+        <a:font script="Laoo" typeface="DokChampa"/>
+        <a:font script="Sinh" typeface="Iskoola Pota"/>
+        <a:font script="Mong" typeface="Mongolian Baiti"/>
+        <a:font script="Viet" typeface="Times New Roman"/>
+        <a:font script="Uigh" typeface="Microsoft Uighur"/>
+        <a:font script="Geor" typeface="Sylfaen"/>
+      </a:majorFont>
+      <a:minorFont>
+        <a:latin typeface="Arial"/>
+        <a:ea typeface=""/>
+        <a:cs typeface=""/>
+        <a:font script="Jpan" typeface="ＭＳ Ｐゴシック"/>
+        <a:font script="Hang" typeface="맑은 고딕"/>
+        <a:font script="Hans" typeface="宋体"/>
+        <a:font script="Hant" typeface="新細明體"/>
+        <a:font script="Arab" typeface="Arial"/>
+        <a:font script="Hebr" typeface="Arial"/>
+        <a:font script="Thai" typeface="Cordia New"/>
+        <a:font script="Ethi" typeface="Nyala"/>
+        <a:font script="Beng" typeface="Vrinda"/>
+        <a:font script="Gujr" typeface="Shruti"/>
+        <a:font script="Khmr" typeface="DaunPenh"/>
+        <a:font script="Knda" typeface="Tunga"/>
+        <a:font script="Guru" typeface="Raavi"/>
+        <a:font script="Cans" typeface="Euphemia"/>
+        <a:font script="Cher" typeface="Plantagenet Cherokee"/>
+        <a:font script="Yiii" typeface="Microsoft Yi Baiti"/>
+        <a:font script="Tibt" typeface="Microsoft Himalaya"/>
+        <a:font script="Thaa" typeface="MV Boli"/>
+        <a:font script="Deva" typeface="Mangal"/>
+        <a:font script="Telu" typeface="Gautami"/>
+        <a:font script="Taml" typeface="Latha"/>
+        <a:font script="Syrc" typeface="Estrangelo Edessa"/>
+        <a:font script="Orya" typeface="Kalinga"/>
+        <a:font script="Mlym" typeface="Kartika"/>
+        <a:font script="Laoo" typeface="DokChampa"/>
+        <a:font script="Sinh" typeface="Iskoola Pota"/>
+        <a:font script="Mong" typeface="Mongolian Baiti"/>
+        <a:font script="Viet" typeface="Arial"/>
+        <a:font script="Uigh" typeface="Microsoft Uighur"/>
+        <a:font script="Geor" typeface="Sylfaen"/>
+      </a:minorFont>
+    </a:fontScheme>
+    <a:fmtScheme name="Office">
+      <a:fillStyleLst>
+        <a:solidFill>
+          <a:schemeClr val="phClr"/>
+        </a:solidFill>
+        <a:gradFill rotWithShape="1">
+          <a:gsLst>
+            <a:gs pos="0">
+              <a:schemeClr val="phClr">
+                <a:tint val="50000"/>
+                <a:satMod val="300000"/>
+              </a:schemeClr>
+            </a:gs>
+            <a:gs pos="35000">
+              <a:schemeClr val="phClr">
+                <a:tint val="37000"/>
+                <a:satMod val="300000"/>
+              </a:schemeClr>
+            </a:gs>
+            <a:gs pos="100000">
+              <a:schemeClr val="phClr">
+                <a:tint val="15000"/>
+                <a:satMod val="350000"/>
+              </a:schemeClr>
+            </a:gs>
+          </a:gsLst>
+          <a:lin ang="16200000" scaled="1"/>
+        </a:gradFill>
+        <a:gradFill rotWithShape="1">
+          <a:gsLst>
+            <a:gs pos="0">
+              <a:schemeClr val="phClr">
+                <a:tint val="100000"/>
+                <a:shade val="100000"/>
+                <a:satMod val="130000"/>
+              </a:schemeClr>
+            </a:gs>
+            <a:gs pos="100000">
+              <a:schemeClr val="phClr">
+                <a:tint val="50000"/>
+                <a:shade val="100000"/>
+                <a:satMod val="350000"/>
+              </a:schemeClr>
+            </a:gs>
+          </a:gsLst>
+          <a:lin ang="16200000" scaled="0"/>
+        </a:gradFill>
+      </a:fillStyleLst>
+      <a:lnStyleLst>
+        <a:ln w="9525" cap="flat" cmpd="sng" algn="ctr">
+          <a:solidFill>
+            <a:schemeClr val="phClr">
+              <a:shade val="95000"/>
+              <a:satMod val="105000"/>
+            </a:schemeClr>
+          </a:solidFill>
+          <a:prstDash val="solid"/>
+        </a:ln>
+        <a:ln w="25400" cap="flat" cmpd="sng" algn="ctr">
+          <a:solidFill>
+            <a:schemeClr val="phClr"/>
+          </a:solidFill>
+          <a:prstDash val="solid"/>
+        </a:ln>
+        <a:ln w="38100" cap="flat" cmpd="sng" algn="ctr">
+          <a:solidFill>
+            <a:schemeClr val="phClr"/>
+          </a:solidFill>
+          <a:prstDash val="solid"/>
+        </a:ln>
+      </a:lnStyleLst>
+      <a:effectStyleLst>
+        <a:effectStyle>
+          <a:effectLst>
+            <a:outerShdw blurRad="40000" dist="20000" dir="5400000" rotWithShape="0">
+              <a:srgbClr val="000000">
+                <a:alpha val="38000"/>
+              </a:srgbClr>
+            </a:outerShdw>
+          </a:effectLst>
+        </a:effectStyle>
+        <a:effectStyle>
+          <a:effectLst>
+            <a:outerShdw blurRad="40000" dist="23000" dir="5400000" rotWithShape="0">
+              <a:srgbClr val="000000">
+                <a:alpha val="35000"/>
+              </a:srgbClr>
+            </a:outerShdw>
+          </a:effectLst>
+        </a:effectStyle>
+        <a:effectStyle>
+          <a:effectLst>
+            <a:outerShdw blurRad="40000" dist="23000" dir="5400000" rotWithShape="0">
+              <a:srgbClr val="000000">
+                <a:alpha val="35000"/>
+              </a:srgbClr>
+            </a:outerShdw>
+          </a:effectLst>
+          <a:scene3d>
+            <a:camera prst="orthographicFront">
+              <a:rot lat="0" lon="0" rev="0"/>
+            </a:camera>
+            <a:lightRig rig="threePt" dir="t">
+              <a:rot lat="0" lon="0" rev="1200000"/>
+            </a:lightRig>
+          </a:scene3d>
+          <a:sp3d>
+            <a:bevelT w="63500" h="25400"/>
+          </a:sp3d>
+        </a:effectStyle>
+      </a:effectStyleLst>
+      <a:bgFillStyleLst>
+        <a:solidFill>
+          <a:schemeClr val="phClr"/>
+        </a:solidFill>
+        <a:gradFill rotWithShape="1">
+          <a:gsLst>
+            <a:gs pos="0">
+              <a:schemeClr val="phClr">
+                <a:tint val="40000"/>
+                <a:satMod val="350000"/>
+              </a:schemeClr>
+            </a:gs>
+            <a:gs pos="40000">
+              <a:schemeClr val="phClr">
+                <a:tint val="45000"/>
+                <a:shade val="99000"/>
+                <a:satMod val="350000"/>
+              </a:schemeClr>
+            </a:gs>
+            <a:gs pos="100000">
+              <a:schemeClr val="phClr">
+                <a:shade val="20000"/>
+                <a:satMod val="255000"/>
+              </a:schemeClr>
+            </a:gs>
+          </a:gsLst>
+          <a:path path="circle">
+            <a:fillToRect l="50000" t="-80000" r="50000" b="180000"/>
+          </a:path>
+        </a:gradFill>
+        <a:gradFill rotWithShape="1">
+          <a:gsLst>
+            <a:gs pos="0">
+              <a:schemeClr val="phClr">
+                <a:tint val="80000"/>
+                <a:satMod val="300000"/>
+              </a:schemeClr>
+            </a:gs>
+            <a:gs pos="100000">
+              <a:schemeClr val="phClr">
+                <a:shade val="30000"/>
+                <a:satMod val="200000"/>
+              </a:schemeClr>
+            </a:gs>
+          </a:gsLst>
+          <a:path path="circle">
+            <a:fillToRect l="50000" t="50000" r="50000" b="50000"/>
+          </a:path>
+        </a:gradFill>
+      </a:bgFillStyleLst>
+    </a:fmtScheme>
+  </a:themeElements>
+</a:theme>
+</file>
+
+<file path=ppt/theme/theme2.xml><?xml version="1.0" encoding="utf-8"?>
 <a:theme xmlns:a="http://schemas.openxmlformats.org/drawingml/2006/main" xmlns:r="http://schemas.openxmlformats.org/officeDocument/2006/relationships" name="Paradigm">
   <a:themeElements>
     <a:clrScheme name="Paradigm">
@@ -17119,283 +17426,4 @@
     </a:fmtScheme>
   </a:themeElements>
 </a:theme>
-</file>
-
-<file path=ppt/theme/theme2.xml><?xml version="1.0" encoding="utf-8"?>
-<a:theme xmlns:a="http://schemas.openxmlformats.org/drawingml/2006/main" xmlns:r="http://schemas.openxmlformats.org/officeDocument/2006/relationships">
-  <a:themeElements>
-    <a:clrScheme name="Default">
-      <a:dk1>
-        <a:srgbClr val="000000"/>
-      </a:dk1>
-      <a:lt1>
-        <a:srgbClr val="FFFFFF"/>
-      </a:lt1>
-      <a:dk2>
-        <a:srgbClr val="158158"/>
-      </a:dk2>
-      <a:lt2>
-        <a:srgbClr val="F3F3F3"/>
-      </a:lt2>
-      <a:accent1>
-        <a:srgbClr val="058DC7"/>
-      </a:accent1>
-      <a:accent2>
-        <a:srgbClr val="50B432"/>
-      </a:accent2>
-      <a:accent3>
-        <a:srgbClr val="ED561B"/>
-      </a:accent3>
-      <a:accent4>
-        <a:srgbClr val="EDEF00"/>
-      </a:accent4>
-      <a:accent5>
-        <a:srgbClr val="24CBE5"/>
-      </a:accent5>
-      <a:accent6>
-        <a:srgbClr val="64E572"/>
-      </a:accent6>
-      <a:hlink>
-        <a:srgbClr val="2200CC"/>
-      </a:hlink>
-      <a:folHlink>
-        <a:srgbClr val="551A8B"/>
-      </a:folHlink>
-    </a:clrScheme>
-    <a:fontScheme name="Office">
-      <a:majorFont>
-        <a:latin typeface="Arial"/>
-        <a:ea typeface=""/>
-        <a:cs typeface=""/>
-        <a:font script="Jpan" typeface="ＭＳ Ｐゴシック"/>
-        <a:font script="Hang" typeface="맑은 고딕"/>
-        <a:font script="Hans" typeface="宋体"/>
-        <a:font script="Hant" typeface="新細明體"/>
-        <a:font script="Arab" typeface="Times New Roman"/>
-        <a:font script="Hebr" typeface="Times New Roman"/>
-        <a:font script="Thai" typeface="Angsana New"/>
-        <a:font script="Ethi" typeface="Nyala"/>
-        <a:font script="Beng" typeface="Vrinda"/>
-        <a:font script="Gujr" typeface="Shruti"/>
-        <a:font script="Khmr" typeface="MoolBoran"/>
-        <a:font script="Knda" typeface="Tunga"/>
-        <a:font script="Guru" typeface="Raavi"/>
-        <a:font script="Cans" typeface="Euphemia"/>
-        <a:font script="Cher" typeface="Plantagenet Cherokee"/>
-        <a:font script="Yiii" typeface="Microsoft Yi Baiti"/>
-        <a:font script="Tibt" typeface="Microsoft Himalaya"/>
-        <a:font script="Thaa" typeface="MV Boli"/>
-        <a:font script="Deva" typeface="Mangal"/>
-        <a:font script="Telu" typeface="Gautami"/>
-        <a:font script="Taml" typeface="Latha"/>
-        <a:font script="Syrc" typeface="Estrangelo Edessa"/>
-        <a:font script="Orya" typeface="Kalinga"/>
-        <a:font script="Mlym" typeface="Kartika"/>
-        <a:font script="Laoo" typeface="DokChampa"/>
-        <a:font script="Sinh" typeface="Iskoola Pota"/>
-        <a:font script="Mong" typeface="Mongolian Baiti"/>
-        <a:font script="Viet" typeface="Times New Roman"/>
-        <a:font script="Uigh" typeface="Microsoft Uighur"/>
-        <a:font script="Geor" typeface="Sylfaen"/>
-      </a:majorFont>
-      <a:minorFont>
-        <a:latin typeface="Arial"/>
-        <a:ea typeface=""/>
-        <a:cs typeface=""/>
-        <a:font script="Jpan" typeface="ＭＳ Ｐゴシック"/>
-        <a:font script="Hang" typeface="맑은 고딕"/>
-        <a:font script="Hans" typeface="宋体"/>
-        <a:font script="Hant" typeface="新細明體"/>
-        <a:font script="Arab" typeface="Arial"/>
-        <a:font script="Hebr" typeface="Arial"/>
-        <a:font script="Thai" typeface="Cordia New"/>
-        <a:font script="Ethi" typeface="Nyala"/>
-        <a:font script="Beng" typeface="Vrinda"/>
-        <a:font script="Gujr" typeface="Shruti"/>
-        <a:font script="Khmr" typeface="DaunPenh"/>
-        <a:font script="Knda" typeface="Tunga"/>
-        <a:font script="Guru" typeface="Raavi"/>
-        <a:font script="Cans" typeface="Euphemia"/>
-        <a:font script="Cher" typeface="Plantagenet Cherokee"/>
-        <a:font script="Yiii" typeface="Microsoft Yi Baiti"/>
-        <a:font script="Tibt" typeface="Microsoft Himalaya"/>
-        <a:font script="Thaa" typeface="MV Boli"/>
-        <a:font script="Deva" typeface="Mangal"/>
-        <a:font script="Telu" typeface="Gautami"/>
-        <a:font script="Taml" typeface="Latha"/>
-        <a:font script="Syrc" typeface="Estrangelo Edessa"/>
-        <a:font script="Orya" typeface="Kalinga"/>
-        <a:font script="Mlym" typeface="Kartika"/>
-        <a:font script="Laoo" typeface="DokChampa"/>
-        <a:font script="Sinh" typeface="Iskoola Pota"/>
-        <a:font script="Mong" typeface="Mongolian Baiti"/>
-        <a:font script="Viet" typeface="Arial"/>
-        <a:font script="Uigh" typeface="Microsoft Uighur"/>
-        <a:font script="Geor" typeface="Sylfaen"/>
-      </a:minorFont>
-    </a:fontScheme>
-    <a:fmtScheme name="Office">
-      <a:fillStyleLst>
-        <a:solidFill>
-          <a:schemeClr val="phClr"/>
-        </a:solidFill>
-        <a:gradFill rotWithShape="1">
-          <a:gsLst>
-            <a:gs pos="0">
-              <a:schemeClr val="phClr">
-                <a:tint val="50000"/>
-                <a:satMod val="300000"/>
-              </a:schemeClr>
-            </a:gs>
-            <a:gs pos="35000">
-              <a:schemeClr val="phClr">
-                <a:tint val="37000"/>
-                <a:satMod val="300000"/>
-              </a:schemeClr>
-            </a:gs>
-            <a:gs pos="100000">
-              <a:schemeClr val="phClr">
-                <a:tint val="15000"/>
-                <a:satMod val="350000"/>
-              </a:schemeClr>
-            </a:gs>
-          </a:gsLst>
-          <a:lin ang="16200000" scaled="1"/>
-        </a:gradFill>
-        <a:gradFill rotWithShape="1">
-          <a:gsLst>
-            <a:gs pos="0">
-              <a:schemeClr val="phClr">
-                <a:tint val="100000"/>
-                <a:shade val="100000"/>
-                <a:satMod val="130000"/>
-              </a:schemeClr>
-            </a:gs>
-            <a:gs pos="100000">
-              <a:schemeClr val="phClr">
-                <a:tint val="50000"/>
-                <a:shade val="100000"/>
-                <a:satMod val="350000"/>
-              </a:schemeClr>
-            </a:gs>
-          </a:gsLst>
-          <a:lin ang="16200000" scaled="0"/>
-        </a:gradFill>
-      </a:fillStyleLst>
-      <a:lnStyleLst>
-        <a:ln w="9525" cap="flat" cmpd="sng" algn="ctr">
-          <a:solidFill>
-            <a:schemeClr val="phClr">
-              <a:shade val="95000"/>
-              <a:satMod val="105000"/>
-            </a:schemeClr>
-          </a:solidFill>
-          <a:prstDash val="solid"/>
-        </a:ln>
-        <a:ln w="25400" cap="flat" cmpd="sng" algn="ctr">
-          <a:solidFill>
-            <a:schemeClr val="phClr"/>
-          </a:solidFill>
-          <a:prstDash val="solid"/>
-        </a:ln>
-        <a:ln w="38100" cap="flat" cmpd="sng" algn="ctr">
-          <a:solidFill>
-            <a:schemeClr val="phClr"/>
-          </a:solidFill>
-          <a:prstDash val="solid"/>
-        </a:ln>
-      </a:lnStyleLst>
-      <a:effectStyleLst>
-        <a:effectStyle>
-          <a:effectLst>
-            <a:outerShdw blurRad="40000" dist="20000" dir="5400000" rotWithShape="0">
-              <a:srgbClr val="000000">
-                <a:alpha val="38000"/>
-              </a:srgbClr>
-            </a:outerShdw>
-          </a:effectLst>
-        </a:effectStyle>
-        <a:effectStyle>
-          <a:effectLst>
-            <a:outerShdw blurRad="40000" dist="23000" dir="5400000" rotWithShape="0">
-              <a:srgbClr val="000000">
-                <a:alpha val="35000"/>
-              </a:srgbClr>
-            </a:outerShdw>
-          </a:effectLst>
-        </a:effectStyle>
-        <a:effectStyle>
-          <a:effectLst>
-            <a:outerShdw blurRad="40000" dist="23000" dir="5400000" rotWithShape="0">
-              <a:srgbClr val="000000">
-                <a:alpha val="35000"/>
-              </a:srgbClr>
-            </a:outerShdw>
-          </a:effectLst>
-          <a:scene3d>
-            <a:camera prst="orthographicFront">
-              <a:rot lat="0" lon="0" rev="0"/>
-            </a:camera>
-            <a:lightRig rig="threePt" dir="t">
-              <a:rot lat="0" lon="0" rev="1200000"/>
-            </a:lightRig>
-          </a:scene3d>
-          <a:sp3d>
-            <a:bevelT w="63500" h="25400"/>
-          </a:sp3d>
-        </a:effectStyle>
-      </a:effectStyleLst>
-      <a:bgFillStyleLst>
-        <a:solidFill>
-          <a:schemeClr val="phClr"/>
-        </a:solidFill>
-        <a:gradFill rotWithShape="1">
-          <a:gsLst>
-            <a:gs pos="0">
-              <a:schemeClr val="phClr">
-                <a:tint val="40000"/>
-                <a:satMod val="350000"/>
-              </a:schemeClr>
-            </a:gs>
-            <a:gs pos="40000">
-              <a:schemeClr val="phClr">
-                <a:tint val="45000"/>
-                <a:shade val="99000"/>
-                <a:satMod val="350000"/>
-              </a:schemeClr>
-            </a:gs>
-            <a:gs pos="100000">
-              <a:schemeClr val="phClr">
-                <a:shade val="20000"/>
-                <a:satMod val="255000"/>
-              </a:schemeClr>
-            </a:gs>
-          </a:gsLst>
-          <a:path path="circle">
-            <a:fillToRect l="50000" t="-80000" r="50000" b="180000"/>
-          </a:path>
-        </a:gradFill>
-        <a:gradFill rotWithShape="1">
-          <a:gsLst>
-            <a:gs pos="0">
-              <a:schemeClr val="phClr">
-                <a:tint val="80000"/>
-                <a:satMod val="300000"/>
-              </a:schemeClr>
-            </a:gs>
-            <a:gs pos="100000">
-              <a:schemeClr val="phClr">
-                <a:shade val="30000"/>
-                <a:satMod val="200000"/>
-              </a:schemeClr>
-            </a:gs>
-          </a:gsLst>
-          <a:path path="circle">
-            <a:fillToRect l="50000" t="50000" r="50000" b="50000"/>
-          </a:path>
-        </a:gradFill>
-      </a:bgFillStyleLst>
-    </a:fmtScheme>
-  </a:themeElements>
-</a:theme>
 </file>
--- a/Final Presentation/XERO_Application_Presentation_Team 3.pptx
+++ b/Final Presentation/XERO_Application_Presentation_Team 3.pptx
@@ -1,62 +1,62 @@
 
 <file path=ppt/presentation.xml><?xml version="1.0" encoding="utf-8"?>
-<p:presentation xmlns:a="http://schemas.openxmlformats.org/drawingml/2006/main" xmlns:r="http://schemas.openxmlformats.org/officeDocument/2006/relationships" xmlns:mc="http://schemas.openxmlformats.org/markup-compatibility/2006" xmlns:mv="urn:schemas-microsoft-com:mac:vml" xmlns:p="http://schemas.openxmlformats.org/presentationml/2006/main" xmlns:c="http://schemas.openxmlformats.org/drawingml/2006/chart" xmlns:dgm="http://schemas.openxmlformats.org/drawingml/2006/diagram" xmlns:o="urn:schemas-microsoft-com:office:office" xmlns:v="urn:schemas-microsoft-com:vml" xmlns:pvml="urn:schemas-microsoft-com:office:powerpoint" xmlns:com="http://schemas.openxmlformats.org/drawingml/2006/compatibility" xmlns:p14="http://schemas.microsoft.com/office/powerpoint/2010/main" xmlns:p15="http://schemas.microsoft.com/office/powerpoint/2012/main" xmlns:ahyp="http://schemas.microsoft.com/office/drawing/2018/hyperlinkcolor" autoCompressPictures="0" embedTrueTypeFonts="1" strictFirstAndLastChars="0" saveSubsetFonts="1">
+<p:presentation xmlns:a="http://schemas.openxmlformats.org/drawingml/2006/main" xmlns:r="http://schemas.openxmlformats.org/officeDocument/2006/relationships" xmlns:p="http://schemas.openxmlformats.org/presentationml/2006/main" strictFirstAndLastChars="0" embedTrueTypeFonts="1" saveSubsetFonts="1" autoCompressPictures="0">
   <p:sldMasterIdLst>
-    <p:sldMasterId id="2147483661" r:id="rId4"/>
+    <p:sldMasterId id="2147483661" r:id="rId1"/>
   </p:sldMasterIdLst>
   <p:notesMasterIdLst>
-    <p:notesMasterId r:id="rId5"/>
+    <p:notesMasterId r:id="rId16"/>
   </p:notesMasterIdLst>
   <p:sldIdLst>
-    <p:sldId id="256" r:id="rId6"/>
-    <p:sldId id="257" r:id="rId7"/>
-    <p:sldId id="258" r:id="rId8"/>
-    <p:sldId id="259" r:id="rId9"/>
-    <p:sldId id="260" r:id="rId10"/>
-    <p:sldId id="261" r:id="rId11"/>
-    <p:sldId id="262" r:id="rId12"/>
-    <p:sldId id="263" r:id="rId13"/>
-    <p:sldId id="264" r:id="rId14"/>
-    <p:sldId id="265" r:id="rId15"/>
-    <p:sldId id="266" r:id="rId16"/>
-    <p:sldId id="267" r:id="rId17"/>
-    <p:sldId id="268" r:id="rId18"/>
-    <p:sldId id="269" r:id="rId19"/>
+    <p:sldId id="256" r:id="rId2"/>
+    <p:sldId id="257" r:id="rId3"/>
+    <p:sldId id="258" r:id="rId4"/>
+    <p:sldId id="259" r:id="rId5"/>
+    <p:sldId id="260" r:id="rId6"/>
+    <p:sldId id="261" r:id="rId7"/>
+    <p:sldId id="262" r:id="rId8"/>
+    <p:sldId id="263" r:id="rId9"/>
+    <p:sldId id="264" r:id="rId10"/>
+    <p:sldId id="265" r:id="rId11"/>
+    <p:sldId id="266" r:id="rId12"/>
+    <p:sldId id="267" r:id="rId13"/>
+    <p:sldId id="268" r:id="rId14"/>
+    <p:sldId id="269" r:id="rId15"/>
   </p:sldIdLst>
-  <p:sldSz cy="5143500" cx="9144000"/>
+  <p:sldSz cx="9144000" cy="5143500" type="screen16x9"/>
   <p:notesSz cx="6858000" cy="9144000"/>
   <p:embeddedFontLst>
     <p:embeddedFont>
-      <p:font typeface="Roboto"/>
-      <p:regular r:id="rId20"/>
-      <p:bold r:id="rId21"/>
-      <p:italic r:id="rId22"/>
-      <p:boldItalic r:id="rId23"/>
+      <p:font typeface="Merriweather" panose="00000500000000000000" pitchFamily="2" charset="0"/>
+      <p:regular r:id="rId17"/>
+      <p:bold r:id="rId18"/>
+      <p:italic r:id="rId19"/>
+      <p:boldItalic r:id="rId20"/>
     </p:embeddedFont>
     <p:embeddedFont>
-      <p:font typeface="Urbanist Medium"/>
-      <p:regular r:id="rId24"/>
-      <p:bold r:id="rId25"/>
-      <p:italic r:id="rId26"/>
-      <p:boldItalic r:id="rId27"/>
+      <p:font typeface="Roboto" panose="02000000000000000000" pitchFamily="2" charset="0"/>
+      <p:regular r:id="rId21"/>
+      <p:bold r:id="rId22"/>
+      <p:italic r:id="rId23"/>
+      <p:boldItalic r:id="rId24"/>
     </p:embeddedFont>
     <p:embeddedFont>
-      <p:font typeface="Urbanist"/>
-      <p:regular r:id="rId28"/>
-      <p:bold r:id="rId29"/>
-      <p:italic r:id="rId30"/>
-      <p:boldItalic r:id="rId31"/>
+      <p:font typeface="Urbanist" panose="020B0604020202020204" charset="0"/>
+      <p:regular r:id="rId25"/>
+      <p:bold r:id="rId26"/>
+      <p:italic r:id="rId27"/>
+      <p:boldItalic r:id="rId28"/>
     </p:embeddedFont>
     <p:embeddedFont>
-      <p:font typeface="Merriweather"/>
-      <p:regular r:id="rId32"/>
-      <p:bold r:id="rId33"/>
-      <p:italic r:id="rId34"/>
-      <p:boldItalic r:id="rId35"/>
+      <p:font typeface="Urbanist Medium" panose="020B0604020202020204" charset="0"/>
+      <p:regular r:id="rId29"/>
+      <p:bold r:id="rId30"/>
+      <p:italic r:id="rId31"/>
+      <p:boldItalic r:id="rId32"/>
     </p:embeddedFont>
   </p:embeddedFontLst>
   <p:defaultTextStyle>
-    <a:defPPr lvl="0" marR="0" rtl="0" algn="l">
+    <a:defPPr marR="0" lvl="0" algn="l" rtl="0">
       <a:lnSpc>
         <a:spcPct val="100000"/>
       </a:lnSpc>
@@ -67,7 +67,7 @@
         <a:spcPts val="0"/>
       </a:spcAft>
     </a:defPPr>
-    <a:lvl1pPr lvl="0" marR="0" rtl="0" algn="l">
+    <a:lvl1pPr marR="0" lvl="0" algn="l" rtl="0">
       <a:lnSpc>
         <a:spcPct val="100000"/>
       </a:lnSpc>
@@ -81,7 +81,7 @@
         <a:srgbClr val="000000"/>
       </a:buClr>
       <a:buFont typeface="Arial"/>
-      <a:defRPr b="0" i="0" sz="1400" u="none" cap="none" strike="noStrike">
+      <a:defRPr sz="1400" b="0" i="0" u="none" strike="noStrike" cap="none">
         <a:solidFill>
           <a:srgbClr val="000000"/>
         </a:solidFill>
@@ -91,7 +91,7 @@
         <a:sym typeface="Arial"/>
       </a:defRPr>
     </a:lvl1pPr>
-    <a:lvl2pPr lvl="1" marR="0" rtl="0" algn="l">
+    <a:lvl2pPr marR="0" lvl="1" algn="l" rtl="0">
       <a:lnSpc>
         <a:spcPct val="100000"/>
       </a:lnSpc>
@@ -105,7 +105,7 @@
         <a:srgbClr val="000000"/>
       </a:buClr>
       <a:buFont typeface="Arial"/>
-      <a:defRPr b="0" i="0" sz="1400" u="none" cap="none" strike="noStrike">
+      <a:defRPr sz="1400" b="0" i="0" u="none" strike="noStrike" cap="none">
         <a:solidFill>
           <a:srgbClr val="000000"/>
         </a:solidFill>
@@ -115,7 +115,7 @@
         <a:sym typeface="Arial"/>
       </a:defRPr>
     </a:lvl2pPr>
-    <a:lvl3pPr lvl="2" marR="0" rtl="0" algn="l">
+    <a:lvl3pPr marR="0" lvl="2" algn="l" rtl="0">
       <a:lnSpc>
         <a:spcPct val="100000"/>
       </a:lnSpc>
@@ -129,7 +129,7 @@
         <a:srgbClr val="000000"/>
       </a:buClr>
       <a:buFont typeface="Arial"/>
-      <a:defRPr b="0" i="0" sz="1400" u="none" cap="none" strike="noStrike">
+      <a:defRPr sz="1400" b="0" i="0" u="none" strike="noStrike" cap="none">
         <a:solidFill>
           <a:srgbClr val="000000"/>
         </a:solidFill>
@@ -139,7 +139,7 @@
         <a:sym typeface="Arial"/>
       </a:defRPr>
     </a:lvl3pPr>
-    <a:lvl4pPr lvl="3" marR="0" rtl="0" algn="l">
+    <a:lvl4pPr marR="0" lvl="3" algn="l" rtl="0">
       <a:lnSpc>
         <a:spcPct val="100000"/>
       </a:lnSpc>
@@ -153,7 +153,7 @@
         <a:srgbClr val="000000"/>
       </a:buClr>
       <a:buFont typeface="Arial"/>
-      <a:defRPr b="0" i="0" sz="1400" u="none" cap="none" strike="noStrike">
+      <a:defRPr sz="1400" b="0" i="0" u="none" strike="noStrike" cap="none">
         <a:solidFill>
           <a:srgbClr val="000000"/>
         </a:solidFill>
@@ -163,7 +163,7 @@
         <a:sym typeface="Arial"/>
       </a:defRPr>
     </a:lvl4pPr>
-    <a:lvl5pPr lvl="4" marR="0" rtl="0" algn="l">
+    <a:lvl5pPr marR="0" lvl="4" algn="l" rtl="0">
       <a:lnSpc>
         <a:spcPct val="100000"/>
       </a:lnSpc>
@@ -177,7 +177,7 @@
         <a:srgbClr val="000000"/>
       </a:buClr>
       <a:buFont typeface="Arial"/>
-      <a:defRPr b="0" i="0" sz="1400" u="none" cap="none" strike="noStrike">
+      <a:defRPr sz="1400" b="0" i="0" u="none" strike="noStrike" cap="none">
         <a:solidFill>
           <a:srgbClr val="000000"/>
         </a:solidFill>
@@ -187,7 +187,7 @@
         <a:sym typeface="Arial"/>
       </a:defRPr>
     </a:lvl5pPr>
-    <a:lvl6pPr lvl="5" marR="0" rtl="0" algn="l">
+    <a:lvl6pPr marR="0" lvl="5" algn="l" rtl="0">
       <a:lnSpc>
         <a:spcPct val="100000"/>
       </a:lnSpc>
@@ -201,7 +201,7 @@
         <a:srgbClr val="000000"/>
       </a:buClr>
       <a:buFont typeface="Arial"/>
-      <a:defRPr b="0" i="0" sz="1400" u="none" cap="none" strike="noStrike">
+      <a:defRPr sz="1400" b="0" i="0" u="none" strike="noStrike" cap="none">
         <a:solidFill>
           <a:srgbClr val="000000"/>
         </a:solidFill>
@@ -211,7 +211,7 @@
         <a:sym typeface="Arial"/>
       </a:defRPr>
     </a:lvl6pPr>
-    <a:lvl7pPr lvl="6" marR="0" rtl="0" algn="l">
+    <a:lvl7pPr marR="0" lvl="6" algn="l" rtl="0">
       <a:lnSpc>
         <a:spcPct val="100000"/>
       </a:lnSpc>
@@ -225,7 +225,7 @@
         <a:srgbClr val="000000"/>
       </a:buClr>
       <a:buFont typeface="Arial"/>
-      <a:defRPr b="0" i="0" sz="1400" u="none" cap="none" strike="noStrike">
+      <a:defRPr sz="1400" b="0" i="0" u="none" strike="noStrike" cap="none">
         <a:solidFill>
           <a:srgbClr val="000000"/>
         </a:solidFill>
@@ -235,7 +235,7 @@
         <a:sym typeface="Arial"/>
       </a:defRPr>
     </a:lvl7pPr>
-    <a:lvl8pPr lvl="7" marR="0" rtl="0" algn="l">
+    <a:lvl8pPr marR="0" lvl="7" algn="l" rtl="0">
       <a:lnSpc>
         <a:spcPct val="100000"/>
       </a:lnSpc>
@@ -249,7 +249,7 @@
         <a:srgbClr val="000000"/>
       </a:buClr>
       <a:buFont typeface="Arial"/>
-      <a:defRPr b="0" i="0" sz="1400" u="none" cap="none" strike="noStrike">
+      <a:defRPr sz="1400" b="0" i="0" u="none" strike="noStrike" cap="none">
         <a:solidFill>
           <a:srgbClr val="000000"/>
         </a:solidFill>
@@ -259,7 +259,7 @@
         <a:sym typeface="Arial"/>
       </a:defRPr>
     </a:lvl8pPr>
-    <a:lvl9pPr lvl="8" marR="0" rtl="0" algn="l">
+    <a:lvl9pPr marR="0" lvl="8" algn="l" rtl="0">
       <a:lnSpc>
         <a:spcPct val="100000"/>
       </a:lnSpc>
@@ -273,7 +273,7 @@
         <a:srgbClr val="000000"/>
       </a:buClr>
       <a:buFont typeface="Arial"/>
-      <a:defRPr b="0" i="0" sz="1400" u="none" cap="none" strike="noStrike">
+      <a:defRPr sz="1400" b="0" i="0" u="none" strike="noStrike" cap="none">
         <a:solidFill>
           <a:srgbClr val="000000"/>
         </a:solidFill>
@@ -286,7 +286,7 @@
   </p:defaultTextStyle>
   <p:extLst>
     <p:ext uri="{EFAFB233-063F-42B5-8137-9DF3F51BA10A}">
-      <p15:sldGuideLst>
+      <p15:sldGuideLst xmlns:p15="http://schemas.microsoft.com/office/powerpoint/2012/main">
         <p15:guide id="1" orient="horz" pos="1620">
           <p15:clr>
             <a:srgbClr val="747775"/>
@@ -304,11 +304,16 @@
 </file>
 
 <file path=ppt/notesMasters/notesMaster1.xml><?xml version="1.0" encoding="utf-8"?>
-<p:notesMaster xmlns:a="http://schemas.openxmlformats.org/drawingml/2006/main" xmlns:r="http://schemas.openxmlformats.org/officeDocument/2006/relationships" xmlns:mc="http://schemas.openxmlformats.org/markup-compatibility/2006" xmlns:mv="urn:schemas-microsoft-com:mac:vml" xmlns:p="http://schemas.openxmlformats.org/presentationml/2006/main" xmlns:c="http://schemas.openxmlformats.org/drawingml/2006/chart" xmlns:dgm="http://schemas.openxmlformats.org/drawingml/2006/diagram" xmlns:o="urn:schemas-microsoft-com:office:office" xmlns:v="urn:schemas-microsoft-com:vml" xmlns:pvml="urn:schemas-microsoft-com:office:powerpoint" xmlns:com="http://schemas.openxmlformats.org/drawingml/2006/compatibility" xmlns:p14="http://schemas.microsoft.com/office/powerpoint/2010/main" xmlns:p15="http://schemas.microsoft.com/office/powerpoint/2012/main" xmlns:ahyp="http://schemas.microsoft.com/office/drawing/2018/hyperlinkcolor">
+<p:notesMaster xmlns:a="http://schemas.openxmlformats.org/drawingml/2006/main" xmlns:r="http://schemas.openxmlformats.org/officeDocument/2006/relationships" xmlns:p="http://schemas.openxmlformats.org/presentationml/2006/main">
   <p:cSld>
+    <p:bg>
+      <p:bgRef idx="1001">
+        <a:schemeClr val="bg1"/>
+      </p:bgRef>
+    </p:bg>
     <p:spTree>
       <p:nvGrpSpPr>
-        <p:cNvPr id="2" name="Shape 2"/>
+        <p:cNvPr id="1" name="Shape 2"/>
         <p:cNvGrpSpPr/>
         <p:nvPr/>
       </p:nvGrpSpPr>
@@ -323,9 +328,11 @@
       <p:sp>
         <p:nvSpPr>
           <p:cNvPr id="3" name="Google Shape;3;n"/>
-          <p:cNvSpPr/>
+          <p:cNvSpPr>
+            <a:spLocks noGrp="1" noRot="1" noChangeAspect="1"/>
+          </p:cNvSpPr>
           <p:nvPr>
-            <p:ph idx="2" type="sldImg"/>
+            <p:ph type="sldImg" idx="2"/>
           </p:nvPr>
         </p:nvSpPr>
         <p:spPr>
@@ -334,9 +341,13 @@
             <a:ext cx="6096075" cy="3429000"/>
           </a:xfrm>
           <a:custGeom>
-            <a:rect b="b" l="l" r="r" t="t"/>
+            <a:avLst/>
+            <a:gdLst/>
+            <a:ahLst/>
+            <a:cxnLst/>
+            <a:rect l="l" t="t" r="r" b="b"/>
             <a:pathLst>
-              <a:path extrusionOk="0" h="120000" w="120000">
+              <a:path w="120000" h="120000" extrusionOk="0">
                 <a:moveTo>
                   <a:pt x="0" y="0"/>
                 </a:moveTo>
@@ -354,23 +365,25 @@
             </a:pathLst>
           </a:custGeom>
           <a:noFill/>
-          <a:ln cap="flat" cmpd="sng" w="9525">
+          <a:ln w="9525" cap="flat" cmpd="sng">
             <a:solidFill>
               <a:srgbClr val="000000"/>
             </a:solidFill>
             <a:prstDash val="solid"/>
             <a:round/>
-            <a:headEnd len="sm" w="sm" type="none"/>
-            <a:tailEnd len="sm" w="sm" type="none"/>
+            <a:headEnd type="none" w="sm" len="sm"/>
+            <a:tailEnd type="none" w="sm" len="sm"/>
           </a:ln>
         </p:spPr>
       </p:sp>
       <p:sp>
         <p:nvSpPr>
           <p:cNvPr id="4" name="Google Shape;4;n"/>
-          <p:cNvSpPr txBox="1"/>
+          <p:cNvSpPr txBox="1">
+            <a:spLocks noGrp="1"/>
+          </p:cNvSpPr>
           <p:nvPr>
-            <p:ph idx="1" type="body"/>
+            <p:ph type="body" idx="1"/>
           </p:nvPr>
         </p:nvSpPr>
         <p:spPr>
@@ -387,11 +400,11 @@
           </a:ln>
         </p:spPr>
         <p:txBody>
-          <a:bodyPr anchorCtr="0" anchor="t" bIns="91425" lIns="91425" spcFirstLastPara="1" rIns="91425" wrap="square" tIns="91425">
+          <a:bodyPr spcFirstLastPara="1" wrap="square" lIns="91425" tIns="91425" rIns="91425" bIns="91425" anchor="t" anchorCtr="0">
             <a:noAutofit/>
           </a:bodyPr>
           <a:lstStyle>
-            <a:lvl1pPr indent="-298450" lvl="0" marL="457200">
+            <a:lvl1pPr marL="457200" lvl="0" indent="-298450">
               <a:spcBef>
                 <a:spcPts val="0"/>
               </a:spcBef>
@@ -402,7 +415,7 @@
               <a:buChar char="●"/>
               <a:defRPr sz="1100"/>
             </a:lvl1pPr>
-            <a:lvl2pPr indent="-298450" lvl="1" marL="914400">
+            <a:lvl2pPr marL="914400" lvl="1" indent="-298450">
               <a:spcBef>
                 <a:spcPts val="0"/>
               </a:spcBef>
@@ -413,7 +426,7 @@
               <a:buChar char="○"/>
               <a:defRPr sz="1100"/>
             </a:lvl2pPr>
-            <a:lvl3pPr indent="-298450" lvl="2" marL="1371600">
+            <a:lvl3pPr marL="1371600" lvl="2" indent="-298450">
               <a:spcBef>
                 <a:spcPts val="0"/>
               </a:spcBef>
@@ -424,7 +437,7 @@
               <a:buChar char="■"/>
               <a:defRPr sz="1100"/>
             </a:lvl3pPr>
-            <a:lvl4pPr indent="-298450" lvl="3" marL="1828800">
+            <a:lvl4pPr marL="1828800" lvl="3" indent="-298450">
               <a:spcBef>
                 <a:spcPts val="0"/>
               </a:spcBef>
@@ -435,7 +448,7 @@
               <a:buChar char="●"/>
               <a:defRPr sz="1100"/>
             </a:lvl4pPr>
-            <a:lvl5pPr indent="-298450" lvl="4" marL="2286000">
+            <a:lvl5pPr marL="2286000" lvl="4" indent="-298450">
               <a:spcBef>
                 <a:spcPts val="0"/>
               </a:spcBef>
@@ -446,7 +459,7 @@
               <a:buChar char="○"/>
               <a:defRPr sz="1100"/>
             </a:lvl5pPr>
-            <a:lvl6pPr indent="-298450" lvl="5" marL="2743200">
+            <a:lvl6pPr marL="2743200" lvl="5" indent="-298450">
               <a:spcBef>
                 <a:spcPts val="0"/>
               </a:spcBef>
@@ -457,7 +470,7 @@
               <a:buChar char="■"/>
               <a:defRPr sz="1100"/>
             </a:lvl6pPr>
-            <a:lvl7pPr indent="-298450" lvl="6" marL="3200400">
+            <a:lvl7pPr marL="3200400" lvl="6" indent="-298450">
               <a:spcBef>
                 <a:spcPts val="0"/>
               </a:spcBef>
@@ -468,7 +481,7 @@
               <a:buChar char="●"/>
               <a:defRPr sz="1100"/>
             </a:lvl7pPr>
-            <a:lvl8pPr indent="-298450" lvl="7" marL="3657600">
+            <a:lvl8pPr marL="3657600" lvl="7" indent="-298450">
               <a:spcBef>
                 <a:spcPts val="0"/>
               </a:spcBef>
@@ -479,7 +492,7 @@
               <a:buChar char="○"/>
               <a:defRPr sz="1100"/>
             </a:lvl8pPr>
-            <a:lvl9pPr indent="-298450" lvl="8" marL="4114800">
+            <a:lvl9pPr marL="4114800" lvl="8" indent="-298450">
               <a:spcBef>
                 <a:spcPts val="0"/>
               </a:spcBef>
@@ -491,14 +504,16 @@
               <a:defRPr sz="1100"/>
             </a:lvl9pPr>
           </a:lstStyle>
-          <a:p/>
+          <a:p>
+            <a:endParaRPr/>
+          </a:p>
         </p:txBody>
       </p:sp>
     </p:spTree>
   </p:cSld>
-  <p:clrMap accent1="accent1" accent2="accent2" accent3="accent3" accent4="accent4" accent5="accent5" accent6="accent6" bg1="lt1" bg2="dk2" tx1="dk1" tx2="lt2" folHlink="folHlink" hlink="hlink"/>
+  <p:clrMap bg1="lt1" tx1="dk1" bg2="dk2" tx2="lt2" accent1="accent1" accent2="accent2" accent3="accent3" accent4="accent4" accent5="accent5" accent6="accent6" hlink="hlink" folHlink="folHlink"/>
   <p:notesStyle>
-    <a:defPPr lvl="0" marR="0" rtl="0" algn="l">
+    <a:defPPr marR="0" lvl="0" algn="l" rtl="0">
       <a:lnSpc>
         <a:spcPct val="100000"/>
       </a:lnSpc>
@@ -509,7 +524,7 @@
         <a:spcPts val="0"/>
       </a:spcAft>
     </a:defPPr>
-    <a:lvl1pPr lvl="0" marR="0" rtl="0" algn="l">
+    <a:lvl1pPr marR="0" lvl="0" algn="l" rtl="0">
       <a:lnSpc>
         <a:spcPct val="100000"/>
       </a:lnSpc>
@@ -523,7 +538,7 @@
         <a:srgbClr val="000000"/>
       </a:buClr>
       <a:buFont typeface="Arial"/>
-      <a:defRPr b="0" i="0" sz="1400" u="none" cap="none" strike="noStrike">
+      <a:defRPr sz="1400" b="0" i="0" u="none" strike="noStrike" cap="none">
         <a:solidFill>
           <a:srgbClr val="000000"/>
         </a:solidFill>
@@ -533,7 +548,7 @@
         <a:sym typeface="Arial"/>
       </a:defRPr>
     </a:lvl1pPr>
-    <a:lvl2pPr lvl="1" marR="0" rtl="0" algn="l">
+    <a:lvl2pPr marR="0" lvl="1" algn="l" rtl="0">
       <a:lnSpc>
         <a:spcPct val="100000"/>
       </a:lnSpc>
@@ -547,7 +562,7 @@
         <a:srgbClr val="000000"/>
       </a:buClr>
       <a:buFont typeface="Arial"/>
-      <a:defRPr b="0" i="0" sz="1400" u="none" cap="none" strike="noStrike">
+      <a:defRPr sz="1400" b="0" i="0" u="none" strike="noStrike" cap="none">
         <a:solidFill>
           <a:srgbClr val="000000"/>
         </a:solidFill>
@@ -557,7 +572,7 @@
         <a:sym typeface="Arial"/>
       </a:defRPr>
     </a:lvl2pPr>
-    <a:lvl3pPr lvl="2" marR="0" rtl="0" algn="l">
+    <a:lvl3pPr marR="0" lvl="2" algn="l" rtl="0">
       <a:lnSpc>
         <a:spcPct val="100000"/>
       </a:lnSpc>
@@ -571,7 +586,7 @@
         <a:srgbClr val="000000"/>
       </a:buClr>
       <a:buFont typeface="Arial"/>
-      <a:defRPr b="0" i="0" sz="1400" u="none" cap="none" strike="noStrike">
+      <a:defRPr sz="1400" b="0" i="0" u="none" strike="noStrike" cap="none">
         <a:solidFill>
           <a:srgbClr val="000000"/>
         </a:solidFill>
@@ -581,7 +596,7 @@
         <a:sym typeface="Arial"/>
       </a:defRPr>
     </a:lvl3pPr>
-    <a:lvl4pPr lvl="3" marR="0" rtl="0" algn="l">
+    <a:lvl4pPr marR="0" lvl="3" algn="l" rtl="0">
       <a:lnSpc>
         <a:spcPct val="100000"/>
       </a:lnSpc>
@@ -595,7 +610,7 @@
         <a:srgbClr val="000000"/>
       </a:buClr>
       <a:buFont typeface="Arial"/>
-      <a:defRPr b="0" i="0" sz="1400" u="none" cap="none" strike="noStrike">
+      <a:defRPr sz="1400" b="0" i="0" u="none" strike="noStrike" cap="none">
         <a:solidFill>
           <a:srgbClr val="000000"/>
         </a:solidFill>
@@ -605,7 +620,7 @@
         <a:sym typeface="Arial"/>
       </a:defRPr>
     </a:lvl4pPr>
-    <a:lvl5pPr lvl="4" marR="0" rtl="0" algn="l">
+    <a:lvl5pPr marR="0" lvl="4" algn="l" rtl="0">
       <a:lnSpc>
         <a:spcPct val="100000"/>
       </a:lnSpc>
@@ -619,7 +634,7 @@
         <a:srgbClr val="000000"/>
       </a:buClr>
       <a:buFont typeface="Arial"/>
-      <a:defRPr b="0" i="0" sz="1400" u="none" cap="none" strike="noStrike">
+      <a:defRPr sz="1400" b="0" i="0" u="none" strike="noStrike" cap="none">
         <a:solidFill>
           <a:srgbClr val="000000"/>
         </a:solidFill>
@@ -629,7 +644,7 @@
         <a:sym typeface="Arial"/>
       </a:defRPr>
     </a:lvl5pPr>
-    <a:lvl6pPr lvl="5" marR="0" rtl="0" algn="l">
+    <a:lvl6pPr marR="0" lvl="5" algn="l" rtl="0">
       <a:lnSpc>
         <a:spcPct val="100000"/>
       </a:lnSpc>
@@ -643,7 +658,7 @@
         <a:srgbClr val="000000"/>
       </a:buClr>
       <a:buFont typeface="Arial"/>
-      <a:defRPr b="0" i="0" sz="1400" u="none" cap="none" strike="noStrike">
+      <a:defRPr sz="1400" b="0" i="0" u="none" strike="noStrike" cap="none">
         <a:solidFill>
           <a:srgbClr val="000000"/>
         </a:solidFill>
@@ -653,7 +668,7 @@
         <a:sym typeface="Arial"/>
       </a:defRPr>
     </a:lvl6pPr>
-    <a:lvl7pPr lvl="6" marR="0" rtl="0" algn="l">
+    <a:lvl7pPr marR="0" lvl="6" algn="l" rtl="0">
       <a:lnSpc>
         <a:spcPct val="100000"/>
       </a:lnSpc>
@@ -667,7 +682,7 @@
         <a:srgbClr val="000000"/>
       </a:buClr>
       <a:buFont typeface="Arial"/>
-      <a:defRPr b="0" i="0" sz="1400" u="none" cap="none" strike="noStrike">
+      <a:defRPr sz="1400" b="0" i="0" u="none" strike="noStrike" cap="none">
         <a:solidFill>
           <a:srgbClr val="000000"/>
         </a:solidFill>
@@ -677,7 +692,7 @@
         <a:sym typeface="Arial"/>
       </a:defRPr>
     </a:lvl7pPr>
-    <a:lvl8pPr lvl="7" marR="0" rtl="0" algn="l">
+    <a:lvl8pPr marR="0" lvl="7" algn="l" rtl="0">
       <a:lnSpc>
         <a:spcPct val="100000"/>
       </a:lnSpc>
@@ -691,7 +706,7 @@
         <a:srgbClr val="000000"/>
       </a:buClr>
       <a:buFont typeface="Arial"/>
-      <a:defRPr b="0" i="0" sz="1400" u="none" cap="none" strike="noStrike">
+      <a:defRPr sz="1400" b="0" i="0" u="none" strike="noStrike" cap="none">
         <a:solidFill>
           <a:srgbClr val="000000"/>
         </a:solidFill>
@@ -701,7 +716,7 @@
         <a:sym typeface="Arial"/>
       </a:defRPr>
     </a:lvl8pPr>
-    <a:lvl9pPr lvl="8" marR="0" rtl="0" algn="l">
+    <a:lvl9pPr marR="0" lvl="8" algn="l" rtl="0">
       <a:lnSpc>
         <a:spcPct val="100000"/>
       </a:lnSpc>
@@ -715,7 +730,7 @@
         <a:srgbClr val="000000"/>
       </a:buClr>
       <a:buFont typeface="Arial"/>
-      <a:defRPr b="0" i="0" sz="1400" u="none" cap="none" strike="noStrike">
+      <a:defRPr sz="1400" b="0" i="0" u="none" strike="noStrike" cap="none">
         <a:solidFill>
           <a:srgbClr val="000000"/>
         </a:solidFill>
@@ -730,11 +745,11 @@
 </file>
 
 <file path=ppt/notesSlides/notesSlide1.xml><?xml version="1.0" encoding="utf-8"?>
-<p:notes xmlns:a="http://schemas.openxmlformats.org/drawingml/2006/main" xmlns:r="http://schemas.openxmlformats.org/officeDocument/2006/relationships" xmlns:mc="http://schemas.openxmlformats.org/markup-compatibility/2006" xmlns:mv="urn:schemas-microsoft-com:mac:vml" xmlns:p="http://schemas.openxmlformats.org/presentationml/2006/main" xmlns:c="http://schemas.openxmlformats.org/drawingml/2006/chart" xmlns:dgm="http://schemas.openxmlformats.org/drawingml/2006/diagram" xmlns:o="urn:schemas-microsoft-com:office:office" xmlns:v="urn:schemas-microsoft-com:vml" xmlns:pvml="urn:schemas-microsoft-com:office:powerpoint" xmlns:com="http://schemas.openxmlformats.org/drawingml/2006/compatibility" xmlns:p14="http://schemas.microsoft.com/office/powerpoint/2010/main" xmlns:p15="http://schemas.microsoft.com/office/powerpoint/2012/main" xmlns:ahyp="http://schemas.microsoft.com/office/drawing/2018/hyperlinkcolor" showMasterPhAnim="0" showMasterSp="0">
+<p:notes xmlns:a="http://schemas.openxmlformats.org/drawingml/2006/main" xmlns:r="http://schemas.openxmlformats.org/officeDocument/2006/relationships" xmlns:p="http://schemas.openxmlformats.org/presentationml/2006/main" showMasterSp="0" showMasterPhAnim="0">
   <p:cSld>
     <p:spTree>
       <p:nvGrpSpPr>
-        <p:cNvPr id="103" name="Shape 103"/>
+        <p:cNvPr id="1" name="Shape 103"/>
         <p:cNvGrpSpPr/>
         <p:nvPr/>
       </p:nvGrpSpPr>
@@ -749,9 +764,11 @@
       <p:sp>
         <p:nvSpPr>
           <p:cNvPr id="104" name="Google Shape;104;g3919914d717_0_603:notes"/>
-          <p:cNvSpPr/>
+          <p:cNvSpPr>
+            <a:spLocks noGrp="1" noRot="1" noChangeAspect="1"/>
+          </p:cNvSpPr>
           <p:nvPr>
-            <p:ph idx="2" type="sldImg"/>
+            <p:ph type="sldImg" idx="2"/>
           </p:nvPr>
         </p:nvSpPr>
         <p:spPr>
@@ -760,9 +777,13 @@
             <a:ext cx="6096000" cy="3429000"/>
           </a:xfrm>
           <a:custGeom>
-            <a:rect b="b" l="l" r="r" t="t"/>
+            <a:avLst/>
+            <a:gdLst/>
+            <a:ahLst/>
+            <a:cxnLst/>
+            <a:rect l="l" t="t" r="r" b="b"/>
             <a:pathLst>
-              <a:path extrusionOk="0" h="120000" w="120000">
+              <a:path w="120000" h="120000" extrusionOk="0">
                 <a:moveTo>
                   <a:pt x="0" y="0"/>
                 </a:moveTo>
@@ -784,9 +805,11 @@
       <p:sp>
         <p:nvSpPr>
           <p:cNvPr id="105" name="Google Shape;105;g3919914d717_0_603:notes"/>
-          <p:cNvSpPr txBox="1"/>
+          <p:cNvSpPr txBox="1">
+            <a:spLocks noGrp="1"/>
+          </p:cNvSpPr>
           <p:nvPr>
-            <p:ph idx="1" type="body"/>
+            <p:ph type="body" idx="1"/>
           </p:nvPr>
         </p:nvSpPr>
         <p:spPr>
@@ -799,12 +822,12 @@
           </a:prstGeom>
         </p:spPr>
         <p:txBody>
-          <a:bodyPr anchorCtr="0" anchor="t" bIns="91425" lIns="91425" spcFirstLastPara="1" rIns="91425" wrap="square" tIns="91425">
+          <a:bodyPr spcFirstLastPara="1" wrap="square" lIns="91425" tIns="91425" rIns="91425" bIns="91425" anchor="t" anchorCtr="0">
             <a:noAutofit/>
           </a:bodyPr>
           <a:lstStyle/>
           <a:p>
-            <a:pPr indent="0" lvl="0" marL="0" rtl="0" algn="l">
+            <a:pPr marL="0" lvl="0" indent="0" algn="l" rtl="0">
               <a:spcBef>
                 <a:spcPts val="0"/>
               </a:spcBef>
@@ -813,9 +836,6 @@
               </a:spcAft>
               <a:buNone/>
             </a:pPr>
-            <a:r>
-              <a:t/>
-            </a:r>
             <a:endParaRPr/>
           </a:p>
         </p:txBody>
@@ -829,11 +849,11 @@
 </file>
 
 <file path=ppt/notesSlides/notesSlide10.xml><?xml version="1.0" encoding="utf-8"?>
-<p:notes xmlns:a="http://schemas.openxmlformats.org/drawingml/2006/main" xmlns:r="http://schemas.openxmlformats.org/officeDocument/2006/relationships" xmlns:mc="http://schemas.openxmlformats.org/markup-compatibility/2006" xmlns:mv="urn:schemas-microsoft-com:mac:vml" xmlns:p="http://schemas.openxmlformats.org/presentationml/2006/main" xmlns:c="http://schemas.openxmlformats.org/drawingml/2006/chart" xmlns:dgm="http://schemas.openxmlformats.org/drawingml/2006/diagram" xmlns:o="urn:schemas-microsoft-com:office:office" xmlns:v="urn:schemas-microsoft-com:vml" xmlns:pvml="urn:schemas-microsoft-com:office:powerpoint" xmlns:com="http://schemas.openxmlformats.org/drawingml/2006/compatibility" xmlns:p14="http://schemas.microsoft.com/office/powerpoint/2010/main" xmlns:p15="http://schemas.microsoft.com/office/powerpoint/2012/main" xmlns:ahyp="http://schemas.microsoft.com/office/drawing/2018/hyperlinkcolor" showMasterPhAnim="0" showMasterSp="0">
+<p:notes xmlns:a="http://schemas.openxmlformats.org/drawingml/2006/main" xmlns:r="http://schemas.openxmlformats.org/officeDocument/2006/relationships" xmlns:p="http://schemas.openxmlformats.org/presentationml/2006/main" showMasterSp="0" showMasterPhAnim="0">
   <p:cSld>
     <p:spTree>
       <p:nvGrpSpPr>
-        <p:cNvPr id="170" name="Shape 170"/>
+        <p:cNvPr id="1" name="Shape 170"/>
         <p:cNvGrpSpPr/>
         <p:nvPr/>
       </p:nvGrpSpPr>
@@ -848,9 +868,11 @@
       <p:sp>
         <p:nvSpPr>
           <p:cNvPr id="171" name="Google Shape;171;g3919914d717_0_1278:notes"/>
-          <p:cNvSpPr/>
+          <p:cNvSpPr>
+            <a:spLocks noGrp="1" noRot="1" noChangeAspect="1"/>
+          </p:cNvSpPr>
           <p:nvPr>
-            <p:ph idx="2" type="sldImg"/>
+            <p:ph type="sldImg" idx="2"/>
           </p:nvPr>
         </p:nvSpPr>
         <p:spPr>
@@ -859,9 +881,13 @@
             <a:ext cx="6096000" cy="3429000"/>
           </a:xfrm>
           <a:custGeom>
-            <a:rect b="b" l="l" r="r" t="t"/>
+            <a:avLst/>
+            <a:gdLst/>
+            <a:ahLst/>
+            <a:cxnLst/>
+            <a:rect l="l" t="t" r="r" b="b"/>
             <a:pathLst>
-              <a:path extrusionOk="0" h="120000" w="120000">
+              <a:path w="120000" h="120000" extrusionOk="0">
                 <a:moveTo>
                   <a:pt x="0" y="0"/>
                 </a:moveTo>
@@ -883,9 +909,11 @@
       <p:sp>
         <p:nvSpPr>
           <p:cNvPr id="172" name="Google Shape;172;g3919914d717_0_1278:notes"/>
-          <p:cNvSpPr txBox="1"/>
+          <p:cNvSpPr txBox="1">
+            <a:spLocks noGrp="1"/>
+          </p:cNvSpPr>
           <p:nvPr>
-            <p:ph idx="1" type="body"/>
+            <p:ph type="body" idx="1"/>
           </p:nvPr>
         </p:nvSpPr>
         <p:spPr>
@@ -898,12 +926,12 @@
           </a:prstGeom>
         </p:spPr>
         <p:txBody>
-          <a:bodyPr anchorCtr="0" anchor="t" bIns="91425" lIns="91425" spcFirstLastPara="1" rIns="91425" wrap="square" tIns="91425">
+          <a:bodyPr spcFirstLastPara="1" wrap="square" lIns="91425" tIns="91425" rIns="91425" bIns="91425" anchor="t" anchorCtr="0">
             <a:noAutofit/>
           </a:bodyPr>
           <a:lstStyle/>
           <a:p>
-            <a:pPr indent="0" lvl="0" marL="0" rtl="0" algn="l">
+            <a:pPr marL="0" lvl="0" indent="0" algn="l" rtl="0">
               <a:spcBef>
                 <a:spcPts val="0"/>
               </a:spcBef>
@@ -912,9 +940,6 @@
               </a:spcAft>
               <a:buNone/>
             </a:pPr>
-            <a:r>
-              <a:t/>
-            </a:r>
             <a:endParaRPr/>
           </a:p>
         </p:txBody>
@@ -928,11 +953,11 @@
 </file>
 
 <file path=ppt/notesSlides/notesSlide11.xml><?xml version="1.0" encoding="utf-8"?>
-<p:notes xmlns:a="http://schemas.openxmlformats.org/drawingml/2006/main" xmlns:r="http://schemas.openxmlformats.org/officeDocument/2006/relationships" xmlns:mc="http://schemas.openxmlformats.org/markup-compatibility/2006" xmlns:mv="urn:schemas-microsoft-com:mac:vml" xmlns:p="http://schemas.openxmlformats.org/presentationml/2006/main" xmlns:c="http://schemas.openxmlformats.org/drawingml/2006/chart" xmlns:dgm="http://schemas.openxmlformats.org/drawingml/2006/diagram" xmlns:o="urn:schemas-microsoft-com:office:office" xmlns:v="urn:schemas-microsoft-com:vml" xmlns:pvml="urn:schemas-microsoft-com:office:powerpoint" xmlns:com="http://schemas.openxmlformats.org/drawingml/2006/compatibility" xmlns:p14="http://schemas.microsoft.com/office/powerpoint/2010/main" xmlns:p15="http://schemas.microsoft.com/office/powerpoint/2012/main" xmlns:ahyp="http://schemas.microsoft.com/office/drawing/2018/hyperlinkcolor" showMasterPhAnim="0" showMasterSp="0">
+<p:notes xmlns:a="http://schemas.openxmlformats.org/drawingml/2006/main" xmlns:r="http://schemas.openxmlformats.org/officeDocument/2006/relationships" xmlns:p="http://schemas.openxmlformats.org/presentationml/2006/main" showMasterSp="0" showMasterPhAnim="0">
   <p:cSld>
     <p:spTree>
       <p:nvGrpSpPr>
-        <p:cNvPr id="181" name="Shape 181"/>
+        <p:cNvPr id="1" name="Shape 181"/>
         <p:cNvGrpSpPr/>
         <p:nvPr/>
       </p:nvGrpSpPr>
@@ -947,20 +972,26 @@
       <p:sp>
         <p:nvSpPr>
           <p:cNvPr id="182" name="Google Shape;182;g3919914d717_0_1337:notes"/>
-          <p:cNvSpPr/>
+          <p:cNvSpPr>
+            <a:spLocks noGrp="1" noRot="1" noChangeAspect="1"/>
+          </p:cNvSpPr>
           <p:nvPr>
-            <p:ph idx="2" type="sldImg"/>
+            <p:ph type="sldImg" idx="2"/>
           </p:nvPr>
         </p:nvSpPr>
         <p:spPr>
           <a:xfrm>
-            <a:off x="381300" y="685800"/>
+            <a:off x="381000" y="685800"/>
             <a:ext cx="6096000" cy="3429000"/>
           </a:xfrm>
           <a:custGeom>
-            <a:rect b="b" l="l" r="r" t="t"/>
+            <a:avLst/>
+            <a:gdLst/>
+            <a:ahLst/>
+            <a:cxnLst/>
+            <a:rect l="l" t="t" r="r" b="b"/>
             <a:pathLst>
-              <a:path extrusionOk="0" h="120000" w="120000">
+              <a:path w="120000" h="120000" extrusionOk="0">
                 <a:moveTo>
                   <a:pt x="0" y="0"/>
                 </a:moveTo>
@@ -982,9 +1013,11 @@
       <p:sp>
         <p:nvSpPr>
           <p:cNvPr id="183" name="Google Shape;183;g3919914d717_0_1337:notes"/>
-          <p:cNvSpPr txBox="1"/>
+          <p:cNvSpPr txBox="1">
+            <a:spLocks noGrp="1"/>
+          </p:cNvSpPr>
           <p:nvPr>
-            <p:ph idx="1" type="body"/>
+            <p:ph type="body" idx="1"/>
           </p:nvPr>
         </p:nvSpPr>
         <p:spPr>
@@ -997,12 +1030,12 @@
           </a:prstGeom>
         </p:spPr>
         <p:txBody>
-          <a:bodyPr anchorCtr="0" anchor="t" bIns="91425" lIns="91425" spcFirstLastPara="1" rIns="91425" wrap="square" tIns="91425">
+          <a:bodyPr spcFirstLastPara="1" wrap="square" lIns="91425" tIns="91425" rIns="91425" bIns="91425" anchor="t" anchorCtr="0">
             <a:noAutofit/>
           </a:bodyPr>
           <a:lstStyle/>
           <a:p>
-            <a:pPr indent="0" lvl="0" marL="0" rtl="0" algn="l">
+            <a:pPr marL="0" lvl="0" indent="0" algn="l" rtl="0">
               <a:spcBef>
                 <a:spcPts val="0"/>
               </a:spcBef>
@@ -1011,9 +1044,6 @@
               </a:spcAft>
               <a:buNone/>
             </a:pPr>
-            <a:r>
-              <a:t/>
-            </a:r>
             <a:endParaRPr/>
           </a:p>
         </p:txBody>
@@ -1027,11 +1057,11 @@
 </file>
 
 <file path=ppt/notesSlides/notesSlide12.xml><?xml version="1.0" encoding="utf-8"?>
-<p:notes xmlns:a="http://schemas.openxmlformats.org/drawingml/2006/main" xmlns:r="http://schemas.openxmlformats.org/officeDocument/2006/relationships" xmlns:mc="http://schemas.openxmlformats.org/markup-compatibility/2006" xmlns:mv="urn:schemas-microsoft-com:mac:vml" xmlns:p="http://schemas.openxmlformats.org/presentationml/2006/main" xmlns:c="http://schemas.openxmlformats.org/drawingml/2006/chart" xmlns:dgm="http://schemas.openxmlformats.org/drawingml/2006/diagram" xmlns:o="urn:schemas-microsoft-com:office:office" xmlns:v="urn:schemas-microsoft-com:vml" xmlns:pvml="urn:schemas-microsoft-com:office:powerpoint" xmlns:com="http://schemas.openxmlformats.org/drawingml/2006/compatibility" xmlns:p14="http://schemas.microsoft.com/office/powerpoint/2010/main" xmlns:p15="http://schemas.microsoft.com/office/powerpoint/2012/main" xmlns:ahyp="http://schemas.microsoft.com/office/drawing/2018/hyperlinkcolor" showMasterPhAnim="0" showMasterSp="0">
+<p:notes xmlns:a="http://schemas.openxmlformats.org/drawingml/2006/main" xmlns:r="http://schemas.openxmlformats.org/officeDocument/2006/relationships" xmlns:p="http://schemas.openxmlformats.org/presentationml/2006/main" showMasterSp="0" showMasterPhAnim="0">
   <p:cSld>
     <p:spTree>
       <p:nvGrpSpPr>
-        <p:cNvPr id="187" name="Shape 187"/>
+        <p:cNvPr id="1" name="Shape 187"/>
         <p:cNvGrpSpPr/>
         <p:nvPr/>
       </p:nvGrpSpPr>
@@ -1046,9 +1076,11 @@
       <p:sp>
         <p:nvSpPr>
           <p:cNvPr id="188" name="Google Shape;188;g3919914d717_0_1347:notes"/>
-          <p:cNvSpPr/>
+          <p:cNvSpPr>
+            <a:spLocks noGrp="1" noRot="1" noChangeAspect="1"/>
+          </p:cNvSpPr>
           <p:nvPr>
-            <p:ph idx="2" type="sldImg"/>
+            <p:ph type="sldImg" idx="2"/>
           </p:nvPr>
         </p:nvSpPr>
         <p:spPr>
@@ -1057,9 +1089,13 @@
             <a:ext cx="6096000" cy="3429000"/>
           </a:xfrm>
           <a:custGeom>
-            <a:rect b="b" l="l" r="r" t="t"/>
+            <a:avLst/>
+            <a:gdLst/>
+            <a:ahLst/>
+            <a:cxnLst/>
+            <a:rect l="l" t="t" r="r" b="b"/>
             <a:pathLst>
-              <a:path extrusionOk="0" h="120000" w="120000">
+              <a:path w="120000" h="120000" extrusionOk="0">
                 <a:moveTo>
                   <a:pt x="0" y="0"/>
                 </a:moveTo>
@@ -1081,9 +1117,11 @@
       <p:sp>
         <p:nvSpPr>
           <p:cNvPr id="189" name="Google Shape;189;g3919914d717_0_1347:notes"/>
-          <p:cNvSpPr txBox="1"/>
+          <p:cNvSpPr txBox="1">
+            <a:spLocks noGrp="1"/>
+          </p:cNvSpPr>
           <p:nvPr>
-            <p:ph idx="1" type="body"/>
+            <p:ph type="body" idx="1"/>
           </p:nvPr>
         </p:nvSpPr>
         <p:spPr>
@@ -1096,12 +1134,12 @@
           </a:prstGeom>
         </p:spPr>
         <p:txBody>
-          <a:bodyPr anchorCtr="0" anchor="t" bIns="91425" lIns="91425" spcFirstLastPara="1" rIns="91425" wrap="square" tIns="91425">
+          <a:bodyPr spcFirstLastPara="1" wrap="square" lIns="91425" tIns="91425" rIns="91425" bIns="91425" anchor="t" anchorCtr="0">
             <a:noAutofit/>
           </a:bodyPr>
           <a:lstStyle/>
           <a:p>
-            <a:pPr indent="0" lvl="0" marL="0" rtl="0" algn="l">
+            <a:pPr marL="0" lvl="0" indent="0" algn="l" rtl="0">
               <a:spcBef>
                 <a:spcPts val="0"/>
               </a:spcBef>
@@ -1110,9 +1148,6 @@
               </a:spcAft>
               <a:buNone/>
             </a:pPr>
-            <a:r>
-              <a:t/>
-            </a:r>
             <a:endParaRPr/>
           </a:p>
         </p:txBody>
@@ -1126,11 +1161,11 @@
 </file>
 
 <file path=ppt/notesSlides/notesSlide13.xml><?xml version="1.0" encoding="utf-8"?>
-<p:notes xmlns:a="http://schemas.openxmlformats.org/drawingml/2006/main" xmlns:r="http://schemas.openxmlformats.org/officeDocument/2006/relationships" xmlns:mc="http://schemas.openxmlformats.org/markup-compatibility/2006" xmlns:mv="urn:schemas-microsoft-com:mac:vml" xmlns:p="http://schemas.openxmlformats.org/presentationml/2006/main" xmlns:c="http://schemas.openxmlformats.org/drawingml/2006/chart" xmlns:dgm="http://schemas.openxmlformats.org/drawingml/2006/diagram" xmlns:o="urn:schemas-microsoft-com:office:office" xmlns:v="urn:schemas-microsoft-com:vml" xmlns:pvml="urn:schemas-microsoft-com:office:powerpoint" xmlns:com="http://schemas.openxmlformats.org/drawingml/2006/compatibility" xmlns:p14="http://schemas.microsoft.com/office/powerpoint/2010/main" xmlns:p15="http://schemas.microsoft.com/office/powerpoint/2012/main" xmlns:ahyp="http://schemas.microsoft.com/office/drawing/2018/hyperlinkcolor" showMasterPhAnim="0" showMasterSp="0">
+<p:notes xmlns:a="http://schemas.openxmlformats.org/drawingml/2006/main" xmlns:r="http://schemas.openxmlformats.org/officeDocument/2006/relationships" xmlns:p="http://schemas.openxmlformats.org/presentationml/2006/main" showMasterSp="0" showMasterPhAnim="0">
   <p:cSld>
     <p:spTree>
       <p:nvGrpSpPr>
-        <p:cNvPr id="197" name="Shape 197"/>
+        <p:cNvPr id="1" name="Shape 197"/>
         <p:cNvGrpSpPr/>
         <p:nvPr/>
       </p:nvGrpSpPr>
@@ -1145,9 +1180,11 @@
       <p:sp>
         <p:nvSpPr>
           <p:cNvPr id="198" name="Google Shape;198;g3919914d717_0_1351:notes"/>
-          <p:cNvSpPr/>
+          <p:cNvSpPr>
+            <a:spLocks noGrp="1" noRot="1" noChangeAspect="1"/>
+          </p:cNvSpPr>
           <p:nvPr>
-            <p:ph idx="2" type="sldImg"/>
+            <p:ph type="sldImg" idx="2"/>
           </p:nvPr>
         </p:nvSpPr>
         <p:spPr>
@@ -1156,9 +1193,13 @@
             <a:ext cx="6096000" cy="3429000"/>
           </a:xfrm>
           <a:custGeom>
-            <a:rect b="b" l="l" r="r" t="t"/>
+            <a:avLst/>
+            <a:gdLst/>
+            <a:ahLst/>
+            <a:cxnLst/>
+            <a:rect l="l" t="t" r="r" b="b"/>
             <a:pathLst>
-              <a:path extrusionOk="0" h="120000" w="120000">
+              <a:path w="120000" h="120000" extrusionOk="0">
                 <a:moveTo>
                   <a:pt x="0" y="0"/>
                 </a:moveTo>
@@ -1180,9 +1221,11 @@
       <p:sp>
         <p:nvSpPr>
           <p:cNvPr id="199" name="Google Shape;199;g3919914d717_0_1351:notes"/>
-          <p:cNvSpPr txBox="1"/>
+          <p:cNvSpPr txBox="1">
+            <a:spLocks noGrp="1"/>
+          </p:cNvSpPr>
           <p:nvPr>
-            <p:ph idx="1" type="body"/>
+            <p:ph type="body" idx="1"/>
           </p:nvPr>
         </p:nvSpPr>
         <p:spPr>
@@ -1195,12 +1238,12 @@
           </a:prstGeom>
         </p:spPr>
         <p:txBody>
-          <a:bodyPr anchorCtr="0" anchor="t" bIns="91425" lIns="91425" spcFirstLastPara="1" rIns="91425" wrap="square" tIns="91425">
+          <a:bodyPr spcFirstLastPara="1" wrap="square" lIns="91425" tIns="91425" rIns="91425" bIns="91425" anchor="t" anchorCtr="0">
             <a:noAutofit/>
           </a:bodyPr>
           <a:lstStyle/>
           <a:p>
-            <a:pPr indent="0" lvl="0" marL="0" rtl="0" algn="l">
+            <a:pPr marL="0" lvl="0" indent="0" algn="l" rtl="0">
               <a:spcBef>
                 <a:spcPts val="0"/>
               </a:spcBef>
@@ -1209,9 +1252,6 @@
               </a:spcAft>
               <a:buNone/>
             </a:pPr>
-            <a:r>
-              <a:t/>
-            </a:r>
             <a:endParaRPr/>
           </a:p>
         </p:txBody>
@@ -1225,11 +1265,11 @@
 </file>
 
 <file path=ppt/notesSlides/notesSlide14.xml><?xml version="1.0" encoding="utf-8"?>
-<p:notes xmlns:a="http://schemas.openxmlformats.org/drawingml/2006/main" xmlns:r="http://schemas.openxmlformats.org/officeDocument/2006/relationships" xmlns:mc="http://schemas.openxmlformats.org/markup-compatibility/2006" xmlns:mv="urn:schemas-microsoft-com:mac:vml" xmlns:p="http://schemas.openxmlformats.org/presentationml/2006/main" xmlns:c="http://schemas.openxmlformats.org/drawingml/2006/chart" xmlns:dgm="http://schemas.openxmlformats.org/drawingml/2006/diagram" xmlns:o="urn:schemas-microsoft-com:office:office" xmlns:v="urn:schemas-microsoft-com:vml" xmlns:pvml="urn:schemas-microsoft-com:office:powerpoint" xmlns:com="http://schemas.openxmlformats.org/drawingml/2006/compatibility" xmlns:p14="http://schemas.microsoft.com/office/powerpoint/2010/main" xmlns:p15="http://schemas.microsoft.com/office/powerpoint/2012/main" xmlns:ahyp="http://schemas.microsoft.com/office/drawing/2018/hyperlinkcolor" showMasterPhAnim="0" showMasterSp="0">
+<p:notes xmlns:a="http://schemas.openxmlformats.org/drawingml/2006/main" xmlns:r="http://schemas.openxmlformats.org/officeDocument/2006/relationships" xmlns:p="http://schemas.openxmlformats.org/presentationml/2006/main" showMasterSp="0" showMasterPhAnim="0">
   <p:cSld>
     <p:spTree>
       <p:nvGrpSpPr>
-        <p:cNvPr id="207" name="Shape 207"/>
+        <p:cNvPr id="1" name="Shape 207"/>
         <p:cNvGrpSpPr/>
         <p:nvPr/>
       </p:nvGrpSpPr>
@@ -1244,9 +1284,11 @@
       <p:sp>
         <p:nvSpPr>
           <p:cNvPr id="208" name="Google Shape;208;g3919914d717_0_1355:notes"/>
-          <p:cNvSpPr/>
+          <p:cNvSpPr>
+            <a:spLocks noGrp="1" noRot="1" noChangeAspect="1"/>
+          </p:cNvSpPr>
           <p:nvPr>
-            <p:ph idx="2" type="sldImg"/>
+            <p:ph type="sldImg" idx="2"/>
           </p:nvPr>
         </p:nvSpPr>
         <p:spPr>
@@ -1255,9 +1297,13 @@
             <a:ext cx="6096000" cy="3429000"/>
           </a:xfrm>
           <a:custGeom>
-            <a:rect b="b" l="l" r="r" t="t"/>
+            <a:avLst/>
+            <a:gdLst/>
+            <a:ahLst/>
+            <a:cxnLst/>
+            <a:rect l="l" t="t" r="r" b="b"/>
             <a:pathLst>
-              <a:path extrusionOk="0" h="120000" w="120000">
+              <a:path w="120000" h="120000" extrusionOk="0">
                 <a:moveTo>
                   <a:pt x="0" y="0"/>
                 </a:moveTo>
@@ -1279,9 +1325,11 @@
       <p:sp>
         <p:nvSpPr>
           <p:cNvPr id="209" name="Google Shape;209;g3919914d717_0_1355:notes"/>
-          <p:cNvSpPr txBox="1"/>
+          <p:cNvSpPr txBox="1">
+            <a:spLocks noGrp="1"/>
+          </p:cNvSpPr>
           <p:nvPr>
-            <p:ph idx="1" type="body"/>
+            <p:ph type="body" idx="1"/>
           </p:nvPr>
         </p:nvSpPr>
         <p:spPr>
@@ -1294,12 +1342,12 @@
           </a:prstGeom>
         </p:spPr>
         <p:txBody>
-          <a:bodyPr anchorCtr="0" anchor="t" bIns="91425" lIns="91425" spcFirstLastPara="1" rIns="91425" wrap="square" tIns="91425">
+          <a:bodyPr spcFirstLastPara="1" wrap="square" lIns="91425" tIns="91425" rIns="91425" bIns="91425" anchor="t" anchorCtr="0">
             <a:noAutofit/>
           </a:bodyPr>
           <a:lstStyle/>
           <a:p>
-            <a:pPr indent="0" lvl="0" marL="0" rtl="0" algn="l">
+            <a:pPr marL="0" lvl="0" indent="0" algn="l" rtl="0">
               <a:spcBef>
                 <a:spcPts val="0"/>
               </a:spcBef>
@@ -1308,9 +1356,6 @@
               </a:spcAft>
               <a:buNone/>
             </a:pPr>
-            <a:r>
-              <a:t/>
-            </a:r>
             <a:endParaRPr/>
           </a:p>
         </p:txBody>
@@ -1324,11 +1369,11 @@
 </file>
 
 <file path=ppt/notesSlides/notesSlide2.xml><?xml version="1.0" encoding="utf-8"?>
-<p:notes xmlns:a="http://schemas.openxmlformats.org/drawingml/2006/main" xmlns:r="http://schemas.openxmlformats.org/officeDocument/2006/relationships" xmlns:mc="http://schemas.openxmlformats.org/markup-compatibility/2006" xmlns:mv="urn:schemas-microsoft-com:mac:vml" xmlns:p="http://schemas.openxmlformats.org/presentationml/2006/main" xmlns:c="http://schemas.openxmlformats.org/drawingml/2006/chart" xmlns:dgm="http://schemas.openxmlformats.org/drawingml/2006/diagram" xmlns:o="urn:schemas-microsoft-com:office:office" xmlns:v="urn:schemas-microsoft-com:vml" xmlns:pvml="urn:schemas-microsoft-com:office:powerpoint" xmlns:com="http://schemas.openxmlformats.org/drawingml/2006/compatibility" xmlns:p14="http://schemas.microsoft.com/office/powerpoint/2010/main" xmlns:p15="http://schemas.microsoft.com/office/powerpoint/2012/main" xmlns:ahyp="http://schemas.microsoft.com/office/drawing/2018/hyperlinkcolor" showMasterPhAnim="0" showMasterSp="0">
+<p:notes xmlns:a="http://schemas.openxmlformats.org/drawingml/2006/main" xmlns:r="http://schemas.openxmlformats.org/officeDocument/2006/relationships" xmlns:p="http://schemas.openxmlformats.org/presentationml/2006/main" showMasterSp="0" showMasterPhAnim="0">
   <p:cSld>
     <p:spTree>
       <p:nvGrpSpPr>
-        <p:cNvPr id="109" name="Shape 109"/>
+        <p:cNvPr id="1" name="Shape 109"/>
         <p:cNvGrpSpPr/>
         <p:nvPr/>
       </p:nvGrpSpPr>
@@ -1343,9 +1388,11 @@
       <p:sp>
         <p:nvSpPr>
           <p:cNvPr id="110" name="Google Shape;110;g3919914d717_0_1089:notes"/>
-          <p:cNvSpPr/>
+          <p:cNvSpPr>
+            <a:spLocks noGrp="1" noRot="1" noChangeAspect="1"/>
+          </p:cNvSpPr>
           <p:nvPr>
-            <p:ph idx="2" type="sldImg"/>
+            <p:ph type="sldImg" idx="2"/>
           </p:nvPr>
         </p:nvSpPr>
         <p:spPr>
@@ -1354,9 +1401,13 @@
             <a:ext cx="6096000" cy="3429000"/>
           </a:xfrm>
           <a:custGeom>
-            <a:rect b="b" l="l" r="r" t="t"/>
+            <a:avLst/>
+            <a:gdLst/>
+            <a:ahLst/>
+            <a:cxnLst/>
+            <a:rect l="l" t="t" r="r" b="b"/>
             <a:pathLst>
-              <a:path extrusionOk="0" h="120000" w="120000">
+              <a:path w="120000" h="120000" extrusionOk="0">
                 <a:moveTo>
                   <a:pt x="0" y="0"/>
                 </a:moveTo>
@@ -1378,9 +1429,11 @@
       <p:sp>
         <p:nvSpPr>
           <p:cNvPr id="111" name="Google Shape;111;g3919914d717_0_1089:notes"/>
-          <p:cNvSpPr txBox="1"/>
+          <p:cNvSpPr txBox="1">
+            <a:spLocks noGrp="1"/>
+          </p:cNvSpPr>
           <p:nvPr>
-            <p:ph idx="1" type="body"/>
+            <p:ph type="body" idx="1"/>
           </p:nvPr>
         </p:nvSpPr>
         <p:spPr>
@@ -1393,12 +1446,12 @@
           </a:prstGeom>
         </p:spPr>
         <p:txBody>
-          <a:bodyPr anchorCtr="0" anchor="t" bIns="91425" lIns="91425" spcFirstLastPara="1" rIns="91425" wrap="square" tIns="91425">
+          <a:bodyPr spcFirstLastPara="1" wrap="square" lIns="91425" tIns="91425" rIns="91425" bIns="91425" anchor="t" anchorCtr="0">
             <a:noAutofit/>
           </a:bodyPr>
           <a:lstStyle/>
           <a:p>
-            <a:pPr indent="0" lvl="0" marL="0" rtl="0" algn="l">
+            <a:pPr marL="0" lvl="0" indent="0" algn="l" rtl="0">
               <a:spcBef>
                 <a:spcPts val="0"/>
               </a:spcBef>
@@ -1407,9 +1460,6 @@
               </a:spcAft>
               <a:buNone/>
             </a:pPr>
-            <a:r>
-              <a:t/>
-            </a:r>
             <a:endParaRPr/>
           </a:p>
         </p:txBody>
@@ -1423,11 +1473,11 @@
 </file>
 
 <file path=ppt/notesSlides/notesSlide3.xml><?xml version="1.0" encoding="utf-8"?>
-<p:notes xmlns:a="http://schemas.openxmlformats.org/drawingml/2006/main" xmlns:r="http://schemas.openxmlformats.org/officeDocument/2006/relationships" xmlns:mc="http://schemas.openxmlformats.org/markup-compatibility/2006" xmlns:mv="urn:schemas-microsoft-com:mac:vml" xmlns:p="http://schemas.openxmlformats.org/presentationml/2006/main" xmlns:c="http://schemas.openxmlformats.org/drawingml/2006/chart" xmlns:dgm="http://schemas.openxmlformats.org/drawingml/2006/diagram" xmlns:o="urn:schemas-microsoft-com:office:office" xmlns:v="urn:schemas-microsoft-com:vml" xmlns:pvml="urn:schemas-microsoft-com:office:powerpoint" xmlns:com="http://schemas.openxmlformats.org/drawingml/2006/compatibility" xmlns:p14="http://schemas.microsoft.com/office/powerpoint/2010/main" xmlns:p15="http://schemas.microsoft.com/office/powerpoint/2012/main" xmlns:ahyp="http://schemas.microsoft.com/office/drawing/2018/hyperlinkcolor" showMasterPhAnim="0" showMasterSp="0">
+<p:notes xmlns:a="http://schemas.openxmlformats.org/drawingml/2006/main" xmlns:r="http://schemas.openxmlformats.org/officeDocument/2006/relationships" xmlns:p="http://schemas.openxmlformats.org/presentationml/2006/main" showMasterSp="0" showMasterPhAnim="0">
   <p:cSld>
     <p:spTree>
       <p:nvGrpSpPr>
-        <p:cNvPr id="115" name="Shape 115"/>
+        <p:cNvPr id="1" name="Shape 115"/>
         <p:cNvGrpSpPr/>
         <p:nvPr/>
       </p:nvGrpSpPr>
@@ -1442,9 +1492,11 @@
       <p:sp>
         <p:nvSpPr>
           <p:cNvPr id="116" name="Google Shape;116;g3919914d717_0_1237:notes"/>
-          <p:cNvSpPr/>
+          <p:cNvSpPr>
+            <a:spLocks noGrp="1" noRot="1" noChangeAspect="1"/>
+          </p:cNvSpPr>
           <p:nvPr>
-            <p:ph idx="2" type="sldImg"/>
+            <p:ph type="sldImg" idx="2"/>
           </p:nvPr>
         </p:nvSpPr>
         <p:spPr>
@@ -1453,9 +1505,13 @@
             <a:ext cx="6096000" cy="3429000"/>
           </a:xfrm>
           <a:custGeom>
-            <a:rect b="b" l="l" r="r" t="t"/>
+            <a:avLst/>
+            <a:gdLst/>
+            <a:ahLst/>
+            <a:cxnLst/>
+            <a:rect l="l" t="t" r="r" b="b"/>
             <a:pathLst>
-              <a:path extrusionOk="0" h="120000" w="120000">
+              <a:path w="120000" h="120000" extrusionOk="0">
                 <a:moveTo>
                   <a:pt x="0" y="0"/>
                 </a:moveTo>
@@ -1477,9 +1533,11 @@
       <p:sp>
         <p:nvSpPr>
           <p:cNvPr id="117" name="Google Shape;117;g3919914d717_0_1237:notes"/>
-          <p:cNvSpPr txBox="1"/>
+          <p:cNvSpPr txBox="1">
+            <a:spLocks noGrp="1"/>
+          </p:cNvSpPr>
           <p:nvPr>
-            <p:ph idx="1" type="body"/>
+            <p:ph type="body" idx="1"/>
           </p:nvPr>
         </p:nvSpPr>
         <p:spPr>
@@ -1492,12 +1550,12 @@
           </a:prstGeom>
         </p:spPr>
         <p:txBody>
-          <a:bodyPr anchorCtr="0" anchor="t" bIns="91425" lIns="91425" spcFirstLastPara="1" rIns="91425" wrap="square" tIns="91425">
+          <a:bodyPr spcFirstLastPara="1" wrap="square" lIns="91425" tIns="91425" rIns="91425" bIns="91425" anchor="t" anchorCtr="0">
             <a:noAutofit/>
           </a:bodyPr>
           <a:lstStyle/>
           <a:p>
-            <a:pPr indent="0" lvl="0" marL="0" rtl="0" algn="l">
+            <a:pPr marL="0" lvl="0" indent="0" algn="l" rtl="0">
               <a:spcBef>
                 <a:spcPts val="0"/>
               </a:spcBef>
@@ -1506,9 +1564,6 @@
               </a:spcAft>
               <a:buNone/>
             </a:pPr>
-            <a:r>
-              <a:t/>
-            </a:r>
             <a:endParaRPr/>
           </a:p>
         </p:txBody>
@@ -1522,11 +1577,11 @@
 </file>
 
 <file path=ppt/notesSlides/notesSlide4.xml><?xml version="1.0" encoding="utf-8"?>
-<p:notes xmlns:a="http://schemas.openxmlformats.org/drawingml/2006/main" xmlns:r="http://schemas.openxmlformats.org/officeDocument/2006/relationships" xmlns:mc="http://schemas.openxmlformats.org/markup-compatibility/2006" xmlns:mv="urn:schemas-microsoft-com:mac:vml" xmlns:p="http://schemas.openxmlformats.org/presentationml/2006/main" xmlns:c="http://schemas.openxmlformats.org/drawingml/2006/chart" xmlns:dgm="http://schemas.openxmlformats.org/drawingml/2006/diagram" xmlns:o="urn:schemas-microsoft-com:office:office" xmlns:v="urn:schemas-microsoft-com:vml" xmlns:pvml="urn:schemas-microsoft-com:office:powerpoint" xmlns:com="http://schemas.openxmlformats.org/drawingml/2006/compatibility" xmlns:p14="http://schemas.microsoft.com/office/powerpoint/2010/main" xmlns:p15="http://schemas.microsoft.com/office/powerpoint/2012/main" xmlns:ahyp="http://schemas.microsoft.com/office/drawing/2018/hyperlinkcolor" showMasterPhAnim="0" showMasterSp="0">
+<p:notes xmlns:a="http://schemas.openxmlformats.org/drawingml/2006/main" xmlns:r="http://schemas.openxmlformats.org/officeDocument/2006/relationships" xmlns:p="http://schemas.openxmlformats.org/presentationml/2006/main" showMasterSp="0" showMasterPhAnim="0">
   <p:cSld>
     <p:spTree>
       <p:nvGrpSpPr>
-        <p:cNvPr id="121" name="Shape 121"/>
+        <p:cNvPr id="1" name="Shape 121"/>
         <p:cNvGrpSpPr/>
         <p:nvPr/>
       </p:nvGrpSpPr>
@@ -1541,9 +1596,11 @@
       <p:sp>
         <p:nvSpPr>
           <p:cNvPr id="122" name="Google Shape;122;g3919914d717_0_1243:notes"/>
-          <p:cNvSpPr/>
+          <p:cNvSpPr>
+            <a:spLocks noGrp="1" noRot="1" noChangeAspect="1"/>
+          </p:cNvSpPr>
           <p:nvPr>
-            <p:ph idx="2" type="sldImg"/>
+            <p:ph type="sldImg" idx="2"/>
           </p:nvPr>
         </p:nvSpPr>
         <p:spPr>
@@ -1552,9 +1609,13 @@
             <a:ext cx="6096000" cy="3429000"/>
           </a:xfrm>
           <a:custGeom>
-            <a:rect b="b" l="l" r="r" t="t"/>
+            <a:avLst/>
+            <a:gdLst/>
+            <a:ahLst/>
+            <a:cxnLst/>
+            <a:rect l="l" t="t" r="r" b="b"/>
             <a:pathLst>
-              <a:path extrusionOk="0" h="120000" w="120000">
+              <a:path w="120000" h="120000" extrusionOk="0">
                 <a:moveTo>
                   <a:pt x="0" y="0"/>
                 </a:moveTo>
@@ -1576,9 +1637,11 @@
       <p:sp>
         <p:nvSpPr>
           <p:cNvPr id="123" name="Google Shape;123;g3919914d717_0_1243:notes"/>
-          <p:cNvSpPr txBox="1"/>
+          <p:cNvSpPr txBox="1">
+            <a:spLocks noGrp="1"/>
+          </p:cNvSpPr>
           <p:nvPr>
-            <p:ph idx="1" type="body"/>
+            <p:ph type="body" idx="1"/>
           </p:nvPr>
         </p:nvSpPr>
         <p:spPr>
@@ -1591,12 +1654,12 @@
           </a:prstGeom>
         </p:spPr>
         <p:txBody>
-          <a:bodyPr anchorCtr="0" anchor="t" bIns="91425" lIns="91425" spcFirstLastPara="1" rIns="91425" wrap="square" tIns="91425">
+          <a:bodyPr spcFirstLastPara="1" wrap="square" lIns="91425" tIns="91425" rIns="91425" bIns="91425" anchor="t" anchorCtr="0">
             <a:noAutofit/>
           </a:bodyPr>
           <a:lstStyle/>
           <a:p>
-            <a:pPr indent="0" lvl="0" marL="0" rtl="0" algn="l">
+            <a:pPr marL="0" lvl="0" indent="0" algn="l" rtl="0">
               <a:spcBef>
                 <a:spcPts val="0"/>
               </a:spcBef>
@@ -1605,9 +1668,6 @@
               </a:spcAft>
               <a:buNone/>
             </a:pPr>
-            <a:r>
-              <a:t/>
-            </a:r>
             <a:endParaRPr/>
           </a:p>
         </p:txBody>
@@ -1621,11 +1681,11 @@
 </file>
 
 <file path=ppt/notesSlides/notesSlide5.xml><?xml version="1.0" encoding="utf-8"?>
-<p:notes xmlns:a="http://schemas.openxmlformats.org/drawingml/2006/main" xmlns:r="http://schemas.openxmlformats.org/officeDocument/2006/relationships" xmlns:mc="http://schemas.openxmlformats.org/markup-compatibility/2006" xmlns:mv="urn:schemas-microsoft-com:mac:vml" xmlns:p="http://schemas.openxmlformats.org/presentationml/2006/main" xmlns:c="http://schemas.openxmlformats.org/drawingml/2006/chart" xmlns:dgm="http://schemas.openxmlformats.org/drawingml/2006/diagram" xmlns:o="urn:schemas-microsoft-com:office:office" xmlns:v="urn:schemas-microsoft-com:vml" xmlns:pvml="urn:schemas-microsoft-com:office:powerpoint" xmlns:com="http://schemas.openxmlformats.org/drawingml/2006/compatibility" xmlns:p14="http://schemas.microsoft.com/office/powerpoint/2010/main" xmlns:p15="http://schemas.microsoft.com/office/powerpoint/2012/main" xmlns:ahyp="http://schemas.microsoft.com/office/drawing/2018/hyperlinkcolor" showMasterPhAnim="0" showMasterSp="0">
+<p:notes xmlns:a="http://schemas.openxmlformats.org/drawingml/2006/main" xmlns:r="http://schemas.openxmlformats.org/officeDocument/2006/relationships" xmlns:p="http://schemas.openxmlformats.org/presentationml/2006/main" showMasterSp="0" showMasterPhAnim="0">
   <p:cSld>
     <p:spTree>
       <p:nvGrpSpPr>
-        <p:cNvPr id="127" name="Shape 127"/>
+        <p:cNvPr id="1" name="Shape 127"/>
         <p:cNvGrpSpPr/>
         <p:nvPr/>
       </p:nvGrpSpPr>
@@ -1640,9 +1700,11 @@
       <p:sp>
         <p:nvSpPr>
           <p:cNvPr id="128" name="Google Shape;128;g3919914d717_0_1312:notes"/>
-          <p:cNvSpPr/>
+          <p:cNvSpPr>
+            <a:spLocks noGrp="1" noRot="1" noChangeAspect="1"/>
+          </p:cNvSpPr>
           <p:nvPr>
-            <p:ph idx="2" type="sldImg"/>
+            <p:ph type="sldImg" idx="2"/>
           </p:nvPr>
         </p:nvSpPr>
         <p:spPr>
@@ -1651,9 +1713,13 @@
             <a:ext cx="6096000" cy="3429000"/>
           </a:xfrm>
           <a:custGeom>
-            <a:rect b="b" l="l" r="r" t="t"/>
+            <a:avLst/>
+            <a:gdLst/>
+            <a:ahLst/>
+            <a:cxnLst/>
+            <a:rect l="l" t="t" r="r" b="b"/>
             <a:pathLst>
-              <a:path extrusionOk="0" h="120000" w="120000">
+              <a:path w="120000" h="120000" extrusionOk="0">
                 <a:moveTo>
                   <a:pt x="0" y="0"/>
                 </a:moveTo>
@@ -1675,9 +1741,11 @@
       <p:sp>
         <p:nvSpPr>
           <p:cNvPr id="129" name="Google Shape;129;g3919914d717_0_1312:notes"/>
-          <p:cNvSpPr txBox="1"/>
+          <p:cNvSpPr txBox="1">
+            <a:spLocks noGrp="1"/>
+          </p:cNvSpPr>
           <p:nvPr>
-            <p:ph idx="1" type="body"/>
+            <p:ph type="body" idx="1"/>
           </p:nvPr>
         </p:nvSpPr>
         <p:spPr>
@@ -1690,12 +1758,12 @@
           </a:prstGeom>
         </p:spPr>
         <p:txBody>
-          <a:bodyPr anchorCtr="0" anchor="t" bIns="91425" lIns="91425" spcFirstLastPara="1" rIns="91425" wrap="square" tIns="91425">
+          <a:bodyPr spcFirstLastPara="1" wrap="square" lIns="91425" tIns="91425" rIns="91425" bIns="91425" anchor="t" anchorCtr="0">
             <a:noAutofit/>
           </a:bodyPr>
           <a:lstStyle/>
           <a:p>
-            <a:pPr indent="0" lvl="0" marL="0" rtl="0" algn="l">
+            <a:pPr marL="0" lvl="0" indent="0" algn="l" rtl="0">
               <a:spcBef>
                 <a:spcPts val="0"/>
               </a:spcBef>
@@ -1704,9 +1772,6 @@
               </a:spcAft>
               <a:buNone/>
             </a:pPr>
-            <a:r>
-              <a:t/>
-            </a:r>
             <a:endParaRPr/>
           </a:p>
         </p:txBody>
@@ -1720,11 +1785,11 @@
 </file>
 
 <file path=ppt/notesSlides/notesSlide6.xml><?xml version="1.0" encoding="utf-8"?>
-<p:notes xmlns:a="http://schemas.openxmlformats.org/drawingml/2006/main" xmlns:r="http://schemas.openxmlformats.org/officeDocument/2006/relationships" xmlns:mc="http://schemas.openxmlformats.org/markup-compatibility/2006" xmlns:mv="urn:schemas-microsoft-com:mac:vml" xmlns:p="http://schemas.openxmlformats.org/presentationml/2006/main" xmlns:c="http://schemas.openxmlformats.org/drawingml/2006/chart" xmlns:dgm="http://schemas.openxmlformats.org/drawingml/2006/diagram" xmlns:o="urn:schemas-microsoft-com:office:office" xmlns:v="urn:schemas-microsoft-com:vml" xmlns:pvml="urn:schemas-microsoft-com:office:powerpoint" xmlns:com="http://schemas.openxmlformats.org/drawingml/2006/compatibility" xmlns:p14="http://schemas.microsoft.com/office/powerpoint/2010/main" xmlns:p15="http://schemas.microsoft.com/office/powerpoint/2012/main" xmlns:ahyp="http://schemas.microsoft.com/office/drawing/2018/hyperlinkcolor" showMasterPhAnim="0" showMasterSp="0">
+<p:notes xmlns:a="http://schemas.openxmlformats.org/drawingml/2006/main" xmlns:r="http://schemas.openxmlformats.org/officeDocument/2006/relationships" xmlns:p="http://schemas.openxmlformats.org/presentationml/2006/main" showMasterSp="0" showMasterPhAnim="0">
   <p:cSld>
     <p:spTree>
       <p:nvGrpSpPr>
-        <p:cNvPr id="136" name="Shape 136"/>
+        <p:cNvPr id="1" name="Shape 136"/>
         <p:cNvGrpSpPr/>
         <p:nvPr/>
       </p:nvGrpSpPr>
@@ -1739,9 +1804,11 @@
       <p:sp>
         <p:nvSpPr>
           <p:cNvPr id="137" name="Google Shape;137;g3919914d717_0_1321:notes"/>
-          <p:cNvSpPr/>
+          <p:cNvSpPr>
+            <a:spLocks noGrp="1" noRot="1" noChangeAspect="1"/>
+          </p:cNvSpPr>
           <p:nvPr>
-            <p:ph idx="2" type="sldImg"/>
+            <p:ph type="sldImg" idx="2"/>
           </p:nvPr>
         </p:nvSpPr>
         <p:spPr>
@@ -1750,9 +1817,13 @@
             <a:ext cx="6096000" cy="3429000"/>
           </a:xfrm>
           <a:custGeom>
-            <a:rect b="b" l="l" r="r" t="t"/>
+            <a:avLst/>
+            <a:gdLst/>
+            <a:ahLst/>
+            <a:cxnLst/>
+            <a:rect l="l" t="t" r="r" b="b"/>
             <a:pathLst>
-              <a:path extrusionOk="0" h="120000" w="120000">
+              <a:path w="120000" h="120000" extrusionOk="0">
                 <a:moveTo>
                   <a:pt x="0" y="0"/>
                 </a:moveTo>
@@ -1774,9 +1845,11 @@
       <p:sp>
         <p:nvSpPr>
           <p:cNvPr id="138" name="Google Shape;138;g3919914d717_0_1321:notes"/>
-          <p:cNvSpPr txBox="1"/>
+          <p:cNvSpPr txBox="1">
+            <a:spLocks noGrp="1"/>
+          </p:cNvSpPr>
           <p:nvPr>
-            <p:ph idx="1" type="body"/>
+            <p:ph type="body" idx="1"/>
           </p:nvPr>
         </p:nvSpPr>
         <p:spPr>
@@ -1789,12 +1862,12 @@
           </a:prstGeom>
         </p:spPr>
         <p:txBody>
-          <a:bodyPr anchorCtr="0" anchor="t" bIns="91425" lIns="91425" spcFirstLastPara="1" rIns="91425" wrap="square" tIns="91425">
+          <a:bodyPr spcFirstLastPara="1" wrap="square" lIns="91425" tIns="91425" rIns="91425" bIns="91425" anchor="t" anchorCtr="0">
             <a:noAutofit/>
           </a:bodyPr>
           <a:lstStyle/>
           <a:p>
-            <a:pPr indent="0" lvl="0" marL="0" rtl="0" algn="l">
+            <a:pPr marL="0" lvl="0" indent="0" algn="l" rtl="0">
               <a:spcBef>
                 <a:spcPts val="0"/>
               </a:spcBef>
@@ -1803,9 +1876,6 @@
               </a:spcAft>
               <a:buNone/>
             </a:pPr>
-            <a:r>
-              <a:t/>
-            </a:r>
             <a:endParaRPr/>
           </a:p>
         </p:txBody>
@@ -1819,11 +1889,11 @@
 </file>
 
 <file path=ppt/notesSlides/notesSlide7.xml><?xml version="1.0" encoding="utf-8"?>
-<p:notes xmlns:a="http://schemas.openxmlformats.org/drawingml/2006/main" xmlns:r="http://schemas.openxmlformats.org/officeDocument/2006/relationships" xmlns:mc="http://schemas.openxmlformats.org/markup-compatibility/2006" xmlns:mv="urn:schemas-microsoft-com:mac:vml" xmlns:p="http://schemas.openxmlformats.org/presentationml/2006/main" xmlns:c="http://schemas.openxmlformats.org/drawingml/2006/chart" xmlns:dgm="http://schemas.openxmlformats.org/drawingml/2006/diagram" xmlns:o="urn:schemas-microsoft-com:office:office" xmlns:v="urn:schemas-microsoft-com:vml" xmlns:pvml="urn:schemas-microsoft-com:office:powerpoint" xmlns:com="http://schemas.openxmlformats.org/drawingml/2006/compatibility" xmlns:p14="http://schemas.microsoft.com/office/powerpoint/2010/main" xmlns:p15="http://schemas.microsoft.com/office/powerpoint/2012/main" xmlns:ahyp="http://schemas.microsoft.com/office/drawing/2018/hyperlinkcolor" showMasterPhAnim="0" showMasterSp="0">
+<p:notes xmlns:a="http://schemas.openxmlformats.org/drawingml/2006/main" xmlns:r="http://schemas.openxmlformats.org/officeDocument/2006/relationships" xmlns:p="http://schemas.openxmlformats.org/presentationml/2006/main" showMasterSp="0" showMasterPhAnim="0">
   <p:cSld>
     <p:spTree>
       <p:nvGrpSpPr>
-        <p:cNvPr id="149" name="Shape 149"/>
+        <p:cNvPr id="1" name="Shape 149"/>
         <p:cNvGrpSpPr/>
         <p:nvPr/>
       </p:nvGrpSpPr>
@@ -1838,9 +1908,11 @@
       <p:sp>
         <p:nvSpPr>
           <p:cNvPr id="150" name="Google Shape;150;g3919914d717_0_1292:notes"/>
-          <p:cNvSpPr/>
+          <p:cNvSpPr>
+            <a:spLocks noGrp="1" noRot="1" noChangeAspect="1"/>
+          </p:cNvSpPr>
           <p:nvPr>
-            <p:ph idx="2" type="sldImg"/>
+            <p:ph type="sldImg" idx="2"/>
           </p:nvPr>
         </p:nvSpPr>
         <p:spPr>
@@ -1849,9 +1921,13 @@
             <a:ext cx="6096000" cy="3429000"/>
           </a:xfrm>
           <a:custGeom>
-            <a:rect b="b" l="l" r="r" t="t"/>
+            <a:avLst/>
+            <a:gdLst/>
+            <a:ahLst/>
+            <a:cxnLst/>
+            <a:rect l="l" t="t" r="r" b="b"/>
             <a:pathLst>
-              <a:path extrusionOk="0" h="120000" w="120000">
+              <a:path w="120000" h="120000" extrusionOk="0">
                 <a:moveTo>
                   <a:pt x="0" y="0"/>
                 </a:moveTo>
@@ -1873,9 +1949,11 @@
       <p:sp>
         <p:nvSpPr>
           <p:cNvPr id="151" name="Google Shape;151;g3919914d717_0_1292:notes"/>
-          <p:cNvSpPr txBox="1"/>
+          <p:cNvSpPr txBox="1">
+            <a:spLocks noGrp="1"/>
+          </p:cNvSpPr>
           <p:nvPr>
-            <p:ph idx="1" type="body"/>
+            <p:ph type="body" idx="1"/>
           </p:nvPr>
         </p:nvSpPr>
         <p:spPr>
@@ -1888,12 +1966,12 @@
           </a:prstGeom>
         </p:spPr>
         <p:txBody>
-          <a:bodyPr anchorCtr="0" anchor="t" bIns="91425" lIns="91425" spcFirstLastPara="1" rIns="91425" wrap="square" tIns="91425">
+          <a:bodyPr spcFirstLastPara="1" wrap="square" lIns="91425" tIns="91425" rIns="91425" bIns="91425" anchor="t" anchorCtr="0">
             <a:noAutofit/>
           </a:bodyPr>
           <a:lstStyle/>
           <a:p>
-            <a:pPr indent="0" lvl="0" marL="0" rtl="0" algn="l">
+            <a:pPr marL="0" lvl="0" indent="0" algn="l" rtl="0">
               <a:spcBef>
                 <a:spcPts val="0"/>
               </a:spcBef>
@@ -1902,9 +1980,6 @@
               </a:spcAft>
               <a:buNone/>
             </a:pPr>
-            <a:r>
-              <a:t/>
-            </a:r>
             <a:endParaRPr/>
           </a:p>
         </p:txBody>
@@ -1918,11 +1993,11 @@
 </file>
 
 <file path=ppt/notesSlides/notesSlide8.xml><?xml version="1.0" encoding="utf-8"?>
-<p:notes xmlns:a="http://schemas.openxmlformats.org/drawingml/2006/main" xmlns:r="http://schemas.openxmlformats.org/officeDocument/2006/relationships" xmlns:mc="http://schemas.openxmlformats.org/markup-compatibility/2006" xmlns:mv="urn:schemas-microsoft-com:mac:vml" xmlns:p="http://schemas.openxmlformats.org/presentationml/2006/main" xmlns:c="http://schemas.openxmlformats.org/drawingml/2006/chart" xmlns:dgm="http://schemas.openxmlformats.org/drawingml/2006/diagram" xmlns:o="urn:schemas-microsoft-com:office:office" xmlns:v="urn:schemas-microsoft-com:vml" xmlns:pvml="urn:schemas-microsoft-com:office:powerpoint" xmlns:com="http://schemas.openxmlformats.org/drawingml/2006/compatibility" xmlns:p14="http://schemas.microsoft.com/office/powerpoint/2010/main" xmlns:p15="http://schemas.microsoft.com/office/powerpoint/2012/main" xmlns:ahyp="http://schemas.microsoft.com/office/drawing/2018/hyperlinkcolor" showMasterPhAnim="0" showMasterSp="0">
+<p:notes xmlns:a="http://schemas.openxmlformats.org/drawingml/2006/main" xmlns:r="http://schemas.openxmlformats.org/officeDocument/2006/relationships" xmlns:p="http://schemas.openxmlformats.org/presentationml/2006/main" showMasterSp="0" showMasterPhAnim="0">
   <p:cSld>
     <p:spTree>
       <p:nvGrpSpPr>
-        <p:cNvPr id="156" name="Shape 156"/>
+        <p:cNvPr id="1" name="Shape 156"/>
         <p:cNvGrpSpPr/>
         <p:nvPr/>
       </p:nvGrpSpPr>
@@ -1937,9 +2012,11 @@
       <p:sp>
         <p:nvSpPr>
           <p:cNvPr id="157" name="Google Shape;157;g3919914d717_0_1304:notes"/>
-          <p:cNvSpPr/>
+          <p:cNvSpPr>
+            <a:spLocks noGrp="1" noRot="1" noChangeAspect="1"/>
+          </p:cNvSpPr>
           <p:nvPr>
-            <p:ph idx="2" type="sldImg"/>
+            <p:ph type="sldImg" idx="2"/>
           </p:nvPr>
         </p:nvSpPr>
         <p:spPr>
@@ -1948,9 +2025,13 @@
             <a:ext cx="6096000" cy="3429000"/>
           </a:xfrm>
           <a:custGeom>
-            <a:rect b="b" l="l" r="r" t="t"/>
+            <a:avLst/>
+            <a:gdLst/>
+            <a:ahLst/>
+            <a:cxnLst/>
+            <a:rect l="l" t="t" r="r" b="b"/>
             <a:pathLst>
-              <a:path extrusionOk="0" h="120000" w="120000">
+              <a:path w="120000" h="120000" extrusionOk="0">
                 <a:moveTo>
                   <a:pt x="0" y="0"/>
                 </a:moveTo>
@@ -1972,9 +2053,11 @@
       <p:sp>
         <p:nvSpPr>
           <p:cNvPr id="158" name="Google Shape;158;g3919914d717_0_1304:notes"/>
-          <p:cNvSpPr txBox="1"/>
+          <p:cNvSpPr txBox="1">
+            <a:spLocks noGrp="1"/>
+          </p:cNvSpPr>
           <p:nvPr>
-            <p:ph idx="1" type="body"/>
+            <p:ph type="body" idx="1"/>
           </p:nvPr>
         </p:nvSpPr>
         <p:spPr>
@@ -1987,12 +2070,12 @@
           </a:prstGeom>
         </p:spPr>
         <p:txBody>
-          <a:bodyPr anchorCtr="0" anchor="t" bIns="91425" lIns="91425" spcFirstLastPara="1" rIns="91425" wrap="square" tIns="91425">
+          <a:bodyPr spcFirstLastPara="1" wrap="square" lIns="91425" tIns="91425" rIns="91425" bIns="91425" anchor="t" anchorCtr="0">
             <a:noAutofit/>
           </a:bodyPr>
           <a:lstStyle/>
           <a:p>
-            <a:pPr indent="0" lvl="0" marL="0" rtl="0" algn="l">
+            <a:pPr marL="0" lvl="0" indent="0" algn="l" rtl="0">
               <a:spcBef>
                 <a:spcPts val="0"/>
               </a:spcBef>
@@ -2001,9 +2084,6 @@
               </a:spcAft>
               <a:buNone/>
             </a:pPr>
-            <a:r>
-              <a:t/>
-            </a:r>
             <a:endParaRPr/>
           </a:p>
         </p:txBody>
@@ -2017,11 +2097,11 @@
 </file>
 
 <file path=ppt/notesSlides/notesSlide9.xml><?xml version="1.0" encoding="utf-8"?>
-<p:notes xmlns:a="http://schemas.openxmlformats.org/drawingml/2006/main" xmlns:r="http://schemas.openxmlformats.org/officeDocument/2006/relationships" xmlns:mc="http://schemas.openxmlformats.org/markup-compatibility/2006" xmlns:mv="urn:schemas-microsoft-com:mac:vml" xmlns:p="http://schemas.openxmlformats.org/presentationml/2006/main" xmlns:c="http://schemas.openxmlformats.org/drawingml/2006/chart" xmlns:dgm="http://schemas.openxmlformats.org/drawingml/2006/diagram" xmlns:o="urn:schemas-microsoft-com:office:office" xmlns:v="urn:schemas-microsoft-com:vml" xmlns:pvml="urn:schemas-microsoft-com:office:powerpoint" xmlns:com="http://schemas.openxmlformats.org/drawingml/2006/compatibility" xmlns:p14="http://schemas.microsoft.com/office/powerpoint/2010/main" xmlns:p15="http://schemas.microsoft.com/office/powerpoint/2012/main" xmlns:ahyp="http://schemas.microsoft.com/office/drawing/2018/hyperlinkcolor" showMasterPhAnim="0" showMasterSp="0">
+<p:notes xmlns:a="http://schemas.openxmlformats.org/drawingml/2006/main" xmlns:r="http://schemas.openxmlformats.org/officeDocument/2006/relationships" xmlns:p="http://schemas.openxmlformats.org/presentationml/2006/main" showMasterSp="0" showMasterPhAnim="0">
   <p:cSld>
     <p:spTree>
       <p:nvGrpSpPr>
-        <p:cNvPr id="163" name="Shape 163"/>
+        <p:cNvPr id="1" name="Shape 163"/>
         <p:cNvGrpSpPr/>
         <p:nvPr/>
       </p:nvGrpSpPr>
@@ -2036,9 +2116,11 @@
       <p:sp>
         <p:nvSpPr>
           <p:cNvPr id="164" name="Google Shape;164;g3919914d717_0_1249:notes"/>
-          <p:cNvSpPr/>
+          <p:cNvSpPr>
+            <a:spLocks noGrp="1" noRot="1" noChangeAspect="1"/>
+          </p:cNvSpPr>
           <p:nvPr>
-            <p:ph idx="2" type="sldImg"/>
+            <p:ph type="sldImg" idx="2"/>
           </p:nvPr>
         </p:nvSpPr>
         <p:spPr>
@@ -2047,9 +2129,13 @@
             <a:ext cx="6096000" cy="3429000"/>
           </a:xfrm>
           <a:custGeom>
-            <a:rect b="b" l="l" r="r" t="t"/>
+            <a:avLst/>
+            <a:gdLst/>
+            <a:ahLst/>
+            <a:cxnLst/>
+            <a:rect l="l" t="t" r="r" b="b"/>
             <a:pathLst>
-              <a:path extrusionOk="0" h="120000" w="120000">
+              <a:path w="120000" h="120000" extrusionOk="0">
                 <a:moveTo>
                   <a:pt x="0" y="0"/>
                 </a:moveTo>
@@ -2071,9 +2157,11 @@
       <p:sp>
         <p:nvSpPr>
           <p:cNvPr id="165" name="Google Shape;165;g3919914d717_0_1249:notes"/>
-          <p:cNvSpPr txBox="1"/>
+          <p:cNvSpPr txBox="1">
+            <a:spLocks noGrp="1"/>
+          </p:cNvSpPr>
           <p:nvPr>
-            <p:ph idx="1" type="body"/>
+            <p:ph type="body" idx="1"/>
           </p:nvPr>
         </p:nvSpPr>
         <p:spPr>
@@ -2086,12 +2174,12 @@
           </a:prstGeom>
         </p:spPr>
         <p:txBody>
-          <a:bodyPr anchorCtr="0" anchor="t" bIns="91425" lIns="91425" spcFirstLastPara="1" rIns="91425" wrap="square" tIns="91425">
+          <a:bodyPr spcFirstLastPara="1" wrap="square" lIns="91425" tIns="91425" rIns="91425" bIns="91425" anchor="t" anchorCtr="0">
             <a:noAutofit/>
           </a:bodyPr>
           <a:lstStyle/>
           <a:p>
-            <a:pPr indent="0" lvl="0" marL="0" rtl="0" algn="l">
+            <a:pPr marL="0" lvl="0" indent="0" algn="l" rtl="0">
               <a:spcBef>
                 <a:spcPts val="0"/>
               </a:spcBef>
@@ -2100,9 +2188,6 @@
               </a:spcAft>
               <a:buNone/>
             </a:pPr>
-            <a:r>
-              <a:t/>
-            </a:r>
             <a:endParaRPr/>
           </a:p>
         </p:txBody>
@@ -2116,18 +2201,19 @@
 </file>
 
 <file path=ppt/slideLayouts/slideLayout1.xml><?xml version="1.0" encoding="utf-8"?>
-<p:sldLayout xmlns:a="http://schemas.openxmlformats.org/drawingml/2006/main" xmlns:r="http://schemas.openxmlformats.org/officeDocument/2006/relationships" xmlns:mc="http://schemas.openxmlformats.org/markup-compatibility/2006" xmlns:mv="urn:schemas-microsoft-com:mac:vml" xmlns:p="http://schemas.openxmlformats.org/presentationml/2006/main" xmlns:c="http://schemas.openxmlformats.org/drawingml/2006/chart" xmlns:dgm="http://schemas.openxmlformats.org/drawingml/2006/diagram" xmlns:o="urn:schemas-microsoft-com:office:office" xmlns:v="urn:schemas-microsoft-com:vml" xmlns:pvml="urn:schemas-microsoft-com:office:powerpoint" xmlns:com="http://schemas.openxmlformats.org/drawingml/2006/compatibility" xmlns:p14="http://schemas.microsoft.com/office/powerpoint/2010/main" xmlns:p15="http://schemas.microsoft.com/office/powerpoint/2012/main" xmlns:ahyp="http://schemas.microsoft.com/office/drawing/2018/hyperlinkcolor" matchingName="Title slide" type="title">
+<p:sldLayout xmlns:a="http://schemas.openxmlformats.org/drawingml/2006/main" xmlns:r="http://schemas.openxmlformats.org/officeDocument/2006/relationships" xmlns:p="http://schemas.openxmlformats.org/presentationml/2006/main" matchingName="Title slide" type="title">
   <p:cSld name="TITLE">
     <p:bg>
       <p:bgPr>
         <a:solidFill>
           <a:schemeClr val="dk1"/>
         </a:solidFill>
+        <a:effectLst/>
       </p:bgPr>
     </p:bg>
     <p:spTree>
       <p:nvGrpSpPr>
-        <p:cNvPr id="9" name="Shape 9"/>
+        <p:cNvPr id="1" name="Shape 9"/>
         <p:cNvGrpSpPr/>
         <p:nvPr/>
       </p:nvGrpSpPr>
@@ -2151,9 +2237,13 @@
             <a:ext cx="9144250" cy="4398100"/>
           </a:xfrm>
           <a:custGeom>
-            <a:rect b="b" l="l" r="r" t="t"/>
+            <a:avLst/>
+            <a:gdLst/>
+            <a:ahLst/>
+            <a:cxnLst/>
+            <a:rect l="l" t="t" r="r" b="b"/>
             <a:pathLst>
-              <a:path extrusionOk="0" h="175924" w="365770">
+              <a:path w="365770" h="175924" extrusionOk="0">
                 <a:moveTo>
                   <a:pt x="0" y="0"/>
                 </a:moveTo>
@@ -2181,7 +2271,9 @@
       <p:sp>
         <p:nvSpPr>
           <p:cNvPr id="11" name="Google Shape;11;p2"/>
-          <p:cNvSpPr txBox="1"/>
+          <p:cNvSpPr txBox="1">
+            <a:spLocks noGrp="1"/>
+          </p:cNvSpPr>
           <p:nvPr>
             <p:ph type="ctrTitle"/>
           </p:nvPr>
@@ -2196,7 +2288,7 @@
           </a:prstGeom>
         </p:spPr>
         <p:txBody>
-          <a:bodyPr anchorCtr="0" anchor="t" bIns="91425" lIns="91425" spcFirstLastPara="1" rIns="91425" wrap="square" tIns="91425">
+          <a:bodyPr spcFirstLastPara="1" wrap="square" lIns="91425" tIns="91425" rIns="91425" bIns="91425" anchor="t" anchorCtr="0">
             <a:normAutofit/>
           </a:bodyPr>
           <a:lstStyle>
@@ -2300,15 +2392,19 @@
               <a:defRPr sz="3600"/>
             </a:lvl9pPr>
           </a:lstStyle>
-          <a:p/>
+          <a:p>
+            <a:endParaRPr/>
+          </a:p>
         </p:txBody>
       </p:sp>
       <p:sp>
         <p:nvSpPr>
           <p:cNvPr id="12" name="Google Shape;12;p2"/>
-          <p:cNvSpPr txBox="1"/>
+          <p:cNvSpPr txBox="1">
+            <a:spLocks noGrp="1"/>
+          </p:cNvSpPr>
           <p:nvPr>
-            <p:ph idx="1" type="subTitle"/>
+            <p:ph type="subTitle" idx="1"/>
           </p:nvPr>
         </p:nvSpPr>
         <p:spPr>
@@ -2321,7 +2417,7 @@
           </a:prstGeom>
         </p:spPr>
         <p:txBody>
-          <a:bodyPr anchorCtr="0" anchor="t" bIns="91425" lIns="91425" spcFirstLastPara="1" rIns="91425" wrap="square" tIns="91425">
+          <a:bodyPr spcFirstLastPara="1" wrap="square" lIns="91425" tIns="91425" rIns="91425" bIns="91425" anchor="t" anchorCtr="0">
             <a:normAutofit/>
           </a:bodyPr>
           <a:lstStyle>
@@ -2515,15 +2611,19 @@
               </a:defRPr>
             </a:lvl9pPr>
           </a:lstStyle>
-          <a:p/>
+          <a:p>
+            <a:endParaRPr/>
+          </a:p>
         </p:txBody>
       </p:sp>
       <p:sp>
         <p:nvSpPr>
           <p:cNvPr id="13" name="Google Shape;13;p2"/>
-          <p:cNvSpPr txBox="1"/>
+          <p:cNvSpPr txBox="1">
+            <a:spLocks noGrp="1"/>
+          </p:cNvSpPr>
           <p:nvPr>
-            <p:ph idx="12" type="sldNum"/>
+            <p:ph type="sldNum" idx="12"/>
           </p:nvPr>
         </p:nvSpPr>
         <p:spPr>
@@ -2536,7 +2636,7 @@
           </a:prstGeom>
         </p:spPr>
         <p:txBody>
-          <a:bodyPr anchorCtr="0" anchor="ctr" bIns="91425" lIns="91425" spcFirstLastPara="1" rIns="91425" wrap="square" tIns="91425">
+          <a:bodyPr spcFirstLastPara="1" wrap="square" lIns="91425" tIns="91425" rIns="91425" bIns="91425" anchor="ctr" anchorCtr="0">
             <a:normAutofit/>
           </a:bodyPr>
           <a:lstStyle>
@@ -2614,7 +2714,7 @@
             </a:lvl9pPr>
           </a:lstStyle>
           <a:p>
-            <a:pPr indent="0" lvl="0" marL="0" rtl="0" algn="r">
+            <a:pPr marL="0" lvl="0" indent="0" algn="r" rtl="0">
               <a:spcBef>
                 <a:spcPts val="0"/>
               </a:spcBef>
@@ -2640,18 +2740,19 @@
 </file>
 
 <file path=ppt/slideLayouts/slideLayout10.xml><?xml version="1.0" encoding="utf-8"?>
-<p:sldLayout xmlns:a="http://schemas.openxmlformats.org/drawingml/2006/main" xmlns:r="http://schemas.openxmlformats.org/officeDocument/2006/relationships" xmlns:mc="http://schemas.openxmlformats.org/markup-compatibility/2006" xmlns:mv="urn:schemas-microsoft-com:mac:vml" xmlns:p="http://schemas.openxmlformats.org/presentationml/2006/main" xmlns:c="http://schemas.openxmlformats.org/drawingml/2006/chart" xmlns:dgm="http://schemas.openxmlformats.org/drawingml/2006/diagram" xmlns:o="urn:schemas-microsoft-com:office:office" xmlns:v="urn:schemas-microsoft-com:vml" xmlns:pvml="urn:schemas-microsoft-com:office:powerpoint" xmlns:com="http://schemas.openxmlformats.org/drawingml/2006/compatibility" xmlns:p14="http://schemas.microsoft.com/office/powerpoint/2010/main" xmlns:p15="http://schemas.microsoft.com/office/powerpoint/2012/main" xmlns:ahyp="http://schemas.microsoft.com/office/drawing/2018/hyperlinkcolor" matchingName="Big number">
+<p:sldLayout xmlns:a="http://schemas.openxmlformats.org/drawingml/2006/main" xmlns:r="http://schemas.openxmlformats.org/officeDocument/2006/relationships" xmlns:p="http://schemas.openxmlformats.org/presentationml/2006/main" matchingName="Big number">
   <p:cSld name="BIG_NUMBER">
     <p:bg>
       <p:bgPr>
         <a:solidFill>
           <a:schemeClr val="dk1"/>
         </a:solidFill>
+        <a:effectLst/>
       </p:bgPr>
     </p:bg>
     <p:spTree>
       <p:nvGrpSpPr>
-        <p:cNvPr id="54" name="Shape 54"/>
+        <p:cNvPr id="1" name="Shape 54"/>
         <p:cNvGrpSpPr/>
         <p:nvPr/>
       </p:nvGrpSpPr>
@@ -2666,9 +2767,11 @@
       <p:sp>
         <p:nvSpPr>
           <p:cNvPr id="55" name="Google Shape;55;p11"/>
-          <p:cNvSpPr txBox="1"/>
+          <p:cNvSpPr txBox="1">
+            <a:spLocks noGrp="1"/>
+          </p:cNvSpPr>
           <p:nvPr>
-            <p:ph hasCustomPrompt="1" type="title"/>
+            <p:ph type="title" hasCustomPrompt="1"/>
           </p:nvPr>
         </p:nvSpPr>
         <p:spPr>
@@ -2681,7 +2784,7 @@
           </a:prstGeom>
         </p:spPr>
         <p:txBody>
-          <a:bodyPr anchorCtr="0" anchor="b" bIns="91425" lIns="91425" spcFirstLastPara="1" rIns="91425" wrap="square" tIns="91425">
+          <a:bodyPr spcFirstLastPara="1" wrap="square" lIns="91425" tIns="91425" rIns="91425" bIns="91425" anchor="b" anchorCtr="0">
             <a:normAutofit/>
           </a:bodyPr>
           <a:lstStyle>
@@ -2858,9 +2961,11 @@
       <p:sp>
         <p:nvSpPr>
           <p:cNvPr id="56" name="Google Shape;56;p11"/>
-          <p:cNvSpPr txBox="1"/>
+          <p:cNvSpPr txBox="1">
+            <a:spLocks noGrp="1"/>
+          </p:cNvSpPr>
           <p:nvPr>
-            <p:ph idx="1" type="body"/>
+            <p:ph type="body" idx="1"/>
           </p:nvPr>
         </p:nvSpPr>
         <p:spPr>
@@ -2873,11 +2978,11 @@
           </a:prstGeom>
         </p:spPr>
         <p:txBody>
-          <a:bodyPr anchorCtr="0" anchor="t" bIns="91425" lIns="91425" spcFirstLastPara="1" rIns="91425" wrap="square" tIns="91425">
+          <a:bodyPr spcFirstLastPara="1" wrap="square" lIns="91425" tIns="91425" rIns="91425" bIns="91425" anchor="t" anchorCtr="0">
             <a:normAutofit/>
           </a:bodyPr>
           <a:lstStyle>
-            <a:lvl1pPr indent="-311150" lvl="0" marL="457200">
+            <a:lvl1pPr marL="457200" lvl="0" indent="-311150">
               <a:spcBef>
                 <a:spcPts val="0"/>
               </a:spcBef>
@@ -2895,7 +3000,7 @@
                 </a:solidFill>
               </a:defRPr>
             </a:lvl1pPr>
-            <a:lvl2pPr indent="-298450" lvl="1" marL="914400">
+            <a:lvl2pPr marL="914400" lvl="1" indent="-298450">
               <a:spcBef>
                 <a:spcPts val="0"/>
               </a:spcBef>
@@ -2913,7 +3018,7 @@
                 </a:solidFill>
               </a:defRPr>
             </a:lvl2pPr>
-            <a:lvl3pPr indent="-298450" lvl="2" marL="1371600">
+            <a:lvl3pPr marL="1371600" lvl="2" indent="-298450">
               <a:spcBef>
                 <a:spcPts val="0"/>
               </a:spcBef>
@@ -2931,7 +3036,7 @@
                 </a:solidFill>
               </a:defRPr>
             </a:lvl3pPr>
-            <a:lvl4pPr indent="-298450" lvl="3" marL="1828800">
+            <a:lvl4pPr marL="1828800" lvl="3" indent="-298450">
               <a:spcBef>
                 <a:spcPts val="0"/>
               </a:spcBef>
@@ -2949,7 +3054,7 @@
                 </a:solidFill>
               </a:defRPr>
             </a:lvl4pPr>
-            <a:lvl5pPr indent="-298450" lvl="4" marL="2286000">
+            <a:lvl5pPr marL="2286000" lvl="4" indent="-298450">
               <a:spcBef>
                 <a:spcPts val="0"/>
               </a:spcBef>
@@ -2967,7 +3072,7 @@
                 </a:solidFill>
               </a:defRPr>
             </a:lvl5pPr>
-            <a:lvl6pPr indent="-298450" lvl="5" marL="2743200">
+            <a:lvl6pPr marL="2743200" lvl="5" indent="-298450">
               <a:spcBef>
                 <a:spcPts val="0"/>
               </a:spcBef>
@@ -2985,7 +3090,7 @@
                 </a:solidFill>
               </a:defRPr>
             </a:lvl6pPr>
-            <a:lvl7pPr indent="-298450" lvl="6" marL="3200400">
+            <a:lvl7pPr marL="3200400" lvl="6" indent="-298450">
               <a:spcBef>
                 <a:spcPts val="0"/>
               </a:spcBef>
@@ -3003,7 +3108,7 @@
                 </a:solidFill>
               </a:defRPr>
             </a:lvl7pPr>
-            <a:lvl8pPr indent="-298450" lvl="7" marL="3657600">
+            <a:lvl8pPr marL="3657600" lvl="7" indent="-298450">
               <a:spcBef>
                 <a:spcPts val="0"/>
               </a:spcBef>
@@ -3021,7 +3126,7 @@
                 </a:solidFill>
               </a:defRPr>
             </a:lvl8pPr>
-            <a:lvl9pPr indent="-298450" lvl="8" marL="4114800">
+            <a:lvl9pPr marL="4114800" lvl="8" indent="-298450">
               <a:spcBef>
                 <a:spcPts val="0"/>
               </a:spcBef>
@@ -3040,15 +3145,19 @@
               </a:defRPr>
             </a:lvl9pPr>
           </a:lstStyle>
-          <a:p/>
+          <a:p>
+            <a:endParaRPr/>
+          </a:p>
         </p:txBody>
       </p:sp>
       <p:sp>
         <p:nvSpPr>
           <p:cNvPr id="57" name="Google Shape;57;p11"/>
-          <p:cNvSpPr txBox="1"/>
+          <p:cNvSpPr txBox="1">
+            <a:spLocks noGrp="1"/>
+          </p:cNvSpPr>
           <p:nvPr>
-            <p:ph idx="12" type="sldNum"/>
+            <p:ph type="sldNum" idx="12"/>
           </p:nvPr>
         </p:nvSpPr>
         <p:spPr>
@@ -3061,7 +3170,7 @@
           </a:prstGeom>
         </p:spPr>
         <p:txBody>
-          <a:bodyPr anchorCtr="0" anchor="ctr" bIns="91425" lIns="91425" spcFirstLastPara="1" rIns="91425" wrap="square" tIns="91425">
+          <a:bodyPr spcFirstLastPara="1" wrap="square" lIns="91425" tIns="91425" rIns="91425" bIns="91425" anchor="ctr" anchorCtr="0">
             <a:normAutofit/>
           </a:bodyPr>
           <a:lstStyle>
@@ -3139,7 +3248,7 @@
             </a:lvl9pPr>
           </a:lstStyle>
           <a:p>
-            <a:pPr indent="0" lvl="0" marL="0" rtl="0" algn="r">
+            <a:pPr marL="0" lvl="0" indent="0" algn="r" rtl="0">
               <a:spcBef>
                 <a:spcPts val="0"/>
               </a:spcBef>
@@ -3165,11 +3274,11 @@
 </file>
 
 <file path=ppt/slideLayouts/slideLayout11.xml><?xml version="1.0" encoding="utf-8"?>
-<p:sldLayout xmlns:a="http://schemas.openxmlformats.org/drawingml/2006/main" xmlns:r="http://schemas.openxmlformats.org/officeDocument/2006/relationships" xmlns:mc="http://schemas.openxmlformats.org/markup-compatibility/2006" xmlns:mv="urn:schemas-microsoft-com:mac:vml" xmlns:p="http://schemas.openxmlformats.org/presentationml/2006/main" xmlns:c="http://schemas.openxmlformats.org/drawingml/2006/chart" xmlns:dgm="http://schemas.openxmlformats.org/drawingml/2006/diagram" xmlns:o="urn:schemas-microsoft-com:office:office" xmlns:v="urn:schemas-microsoft-com:vml" xmlns:pvml="urn:schemas-microsoft-com:office:powerpoint" xmlns:com="http://schemas.openxmlformats.org/drawingml/2006/compatibility" xmlns:p14="http://schemas.microsoft.com/office/powerpoint/2010/main" xmlns:p15="http://schemas.microsoft.com/office/powerpoint/2012/main" xmlns:ahyp="http://schemas.microsoft.com/office/drawing/2018/hyperlinkcolor" matchingName="Blank" type="blank">
+<p:sldLayout xmlns:a="http://schemas.openxmlformats.org/drawingml/2006/main" xmlns:r="http://schemas.openxmlformats.org/officeDocument/2006/relationships" xmlns:p="http://schemas.openxmlformats.org/presentationml/2006/main" matchingName="Blank" type="blank">
   <p:cSld name="BLANK">
     <p:spTree>
       <p:nvGrpSpPr>
-        <p:cNvPr id="58" name="Shape 58"/>
+        <p:cNvPr id="1" name="Shape 58"/>
         <p:cNvGrpSpPr/>
         <p:nvPr/>
       </p:nvGrpSpPr>
@@ -3184,9 +3293,11 @@
       <p:sp>
         <p:nvSpPr>
           <p:cNvPr id="59" name="Google Shape;59;p12"/>
-          <p:cNvSpPr txBox="1"/>
+          <p:cNvSpPr txBox="1">
+            <a:spLocks noGrp="1"/>
+          </p:cNvSpPr>
           <p:nvPr>
-            <p:ph idx="12" type="sldNum"/>
+            <p:ph type="sldNum" idx="12"/>
           </p:nvPr>
         </p:nvSpPr>
         <p:spPr>
@@ -3199,7 +3310,7 @@
           </a:prstGeom>
         </p:spPr>
         <p:txBody>
-          <a:bodyPr anchorCtr="0" anchor="ctr" bIns="91425" lIns="91425" spcFirstLastPara="1" rIns="91425" wrap="square" tIns="91425">
+          <a:bodyPr spcFirstLastPara="1" wrap="square" lIns="91425" tIns="91425" rIns="91425" bIns="91425" anchor="ctr" anchorCtr="0">
             <a:normAutofit/>
           </a:bodyPr>
           <a:lstStyle>
@@ -3241,7 +3352,7 @@
             </a:lvl9pPr>
           </a:lstStyle>
           <a:p>
-            <a:pPr indent="0" lvl="0" marL="0" rtl="0" algn="r">
+            <a:pPr marL="0" lvl="0" indent="0" algn="r" rtl="0">
               <a:spcBef>
                 <a:spcPts val="0"/>
               </a:spcBef>
@@ -3267,11 +3378,11 @@
 </file>
 
 <file path=ppt/slideLayouts/slideLayout12.xml><?xml version="1.0" encoding="utf-8"?>
-<p:sldLayout xmlns:a="http://schemas.openxmlformats.org/drawingml/2006/main" xmlns:r="http://schemas.openxmlformats.org/officeDocument/2006/relationships" xmlns:mc="http://schemas.openxmlformats.org/markup-compatibility/2006" xmlns:mv="urn:schemas-microsoft-com:mac:vml" xmlns:p="http://schemas.openxmlformats.org/presentationml/2006/main" xmlns:c="http://schemas.openxmlformats.org/drawingml/2006/chart" xmlns:dgm="http://schemas.openxmlformats.org/drawingml/2006/diagram" xmlns:o="urn:schemas-microsoft-com:office:office" xmlns:v="urn:schemas-microsoft-com:vml" xmlns:pvml="urn:schemas-microsoft-com:office:powerpoint" xmlns:com="http://schemas.openxmlformats.org/drawingml/2006/compatibility" xmlns:p14="http://schemas.microsoft.com/office/powerpoint/2010/main" xmlns:p15="http://schemas.microsoft.com/office/powerpoint/2012/main" xmlns:ahyp="http://schemas.microsoft.com/office/drawing/2018/hyperlinkcolor" matchingName="Title slide ALT 1">
+<p:sldLayout xmlns:a="http://schemas.openxmlformats.org/drawingml/2006/main" xmlns:r="http://schemas.openxmlformats.org/officeDocument/2006/relationships" xmlns:p="http://schemas.openxmlformats.org/presentationml/2006/main" matchingName="Title slide ALT 1">
   <p:cSld name="BLANK_4">
     <p:spTree>
       <p:nvGrpSpPr>
-        <p:cNvPr id="60" name="Shape 60"/>
+        <p:cNvPr id="1" name="Shape 60"/>
         <p:cNvGrpSpPr/>
         <p:nvPr/>
       </p:nvGrpSpPr>
@@ -3293,11 +3404,11 @@
           <a:blip r:embed="rId2">
             <a:alphaModFix amt="50000"/>
           </a:blip>
-          <a:srcRect b="8145" l="3133" r="7834" t="16785"/>
+          <a:srcRect l="3133" t="16785" r="7834" b="8145"/>
           <a:stretch/>
         </p:blipFill>
         <p:spPr>
-          <a:xfrm flipH="1" rot="10800000">
+          <a:xfrm rot="10800000" flipH="1">
             <a:off x="0" y="-3474"/>
             <a:ext cx="9161550" cy="5154499"/>
           </a:xfrm>
@@ -3317,7 +3428,7 @@
           <p:nvPr/>
         </p:nvSpPr>
         <p:spPr>
-          <a:xfrm flipH="1" rot="10800000">
+          <a:xfrm rot="10800000" flipH="1">
             <a:off x="0" y="4676700"/>
             <a:ext cx="9149700" cy="466800"/>
           </a:xfrm>
@@ -3332,12 +3443,12 @@
           </a:ln>
         </p:spPr>
         <p:txBody>
-          <a:bodyPr anchorCtr="0" anchor="ctr" bIns="91425" lIns="91425" spcFirstLastPara="1" rIns="91425" wrap="square" tIns="91425">
+          <a:bodyPr spcFirstLastPara="1" wrap="square" lIns="91425" tIns="91425" rIns="91425" bIns="91425" anchor="ctr" anchorCtr="0">
             <a:noAutofit/>
           </a:bodyPr>
           <a:lstStyle/>
           <a:p>
-            <a:pPr indent="0" lvl="0" marL="0" rtl="0" algn="ctr">
+            <a:pPr marL="0" lvl="0" indent="0" algn="ctr" rtl="0">
               <a:spcBef>
                 <a:spcPts val="0"/>
               </a:spcBef>
@@ -3346,9 +3457,6 @@
               </a:spcAft>
               <a:buNone/>
             </a:pPr>
-            <a:r>
-              <a:t/>
-            </a:r>
             <a:endParaRPr>
               <a:solidFill>
                 <a:schemeClr val="dk1"/>
@@ -3364,9 +3472,11 @@
       <p:sp>
         <p:nvSpPr>
           <p:cNvPr id="63" name="Google Shape;63;p13"/>
-          <p:cNvSpPr txBox="1"/>
+          <p:cNvSpPr txBox="1">
+            <a:spLocks noGrp="1"/>
+          </p:cNvSpPr>
           <p:nvPr>
-            <p:ph idx="1" type="subTitle"/>
+            <p:ph type="subTitle" idx="1"/>
           </p:nvPr>
         </p:nvSpPr>
         <p:spPr>
@@ -3379,7 +3489,7 @@
           </a:prstGeom>
         </p:spPr>
         <p:txBody>
-          <a:bodyPr anchorCtr="0" anchor="t" bIns="0" lIns="0" spcFirstLastPara="1" rIns="0" wrap="square" tIns="0">
+          <a:bodyPr spcFirstLastPara="1" wrap="square" lIns="0" tIns="0" rIns="0" bIns="0" anchor="t" anchorCtr="0">
             <a:normAutofit/>
           </a:bodyPr>
           <a:lstStyle>
@@ -3587,15 +3697,19 @@
               </a:defRPr>
             </a:lvl9pPr>
           </a:lstStyle>
-          <a:p/>
+          <a:p>
+            <a:endParaRPr/>
+          </a:p>
         </p:txBody>
       </p:sp>
       <p:sp>
         <p:nvSpPr>
           <p:cNvPr id="64" name="Google Shape;64;p13"/>
-          <p:cNvSpPr txBox="1"/>
+          <p:cNvSpPr txBox="1">
+            <a:spLocks noGrp="1"/>
+          </p:cNvSpPr>
           <p:nvPr>
-            <p:ph idx="2" type="subTitle"/>
+            <p:ph type="subTitle" idx="2"/>
           </p:nvPr>
         </p:nvSpPr>
         <p:spPr>
@@ -3608,7 +3722,7 @@
           </a:prstGeom>
         </p:spPr>
         <p:txBody>
-          <a:bodyPr anchorCtr="0" anchor="b" bIns="0" lIns="0" spcFirstLastPara="1" rIns="0" wrap="square" tIns="0">
+          <a:bodyPr spcFirstLastPara="1" wrap="square" lIns="0" tIns="0" rIns="0" bIns="0" anchor="b" anchorCtr="0">
             <a:normAutofit/>
           </a:bodyPr>
           <a:lstStyle>
@@ -3820,15 +3934,19 @@
               </a:defRPr>
             </a:lvl9pPr>
           </a:lstStyle>
-          <a:p/>
+          <a:p>
+            <a:endParaRPr/>
+          </a:p>
         </p:txBody>
       </p:sp>
       <p:sp>
         <p:nvSpPr>
           <p:cNvPr id="65" name="Google Shape;65;p13"/>
-          <p:cNvSpPr txBox="1"/>
+          <p:cNvSpPr txBox="1">
+            <a:spLocks noGrp="1"/>
+          </p:cNvSpPr>
           <p:nvPr>
-            <p:ph idx="3" type="subTitle"/>
+            <p:ph type="subTitle" idx="3"/>
           </p:nvPr>
         </p:nvSpPr>
         <p:spPr>
@@ -3841,7 +3959,7 @@
           </a:prstGeom>
         </p:spPr>
         <p:txBody>
-          <a:bodyPr anchorCtr="0" anchor="b" bIns="0" lIns="0" spcFirstLastPara="1" rIns="0" wrap="square" tIns="0">
+          <a:bodyPr spcFirstLastPara="1" wrap="square" lIns="0" tIns="0" rIns="0" bIns="0" anchor="b" anchorCtr="0">
             <a:normAutofit/>
           </a:bodyPr>
           <a:lstStyle>
@@ -4053,15 +4171,19 @@
               </a:defRPr>
             </a:lvl9pPr>
           </a:lstStyle>
-          <a:p/>
+          <a:p>
+            <a:endParaRPr/>
+          </a:p>
         </p:txBody>
       </p:sp>
       <p:sp>
         <p:nvSpPr>
           <p:cNvPr id="66" name="Google Shape;66;p13"/>
-          <p:cNvSpPr txBox="1"/>
+          <p:cNvSpPr txBox="1">
+            <a:spLocks noGrp="1"/>
+          </p:cNvSpPr>
           <p:nvPr>
-            <p:ph idx="4" type="subTitle"/>
+            <p:ph type="subTitle" idx="4"/>
           </p:nvPr>
         </p:nvSpPr>
         <p:spPr>
@@ -4074,7 +4196,7 @@
           </a:prstGeom>
         </p:spPr>
         <p:txBody>
-          <a:bodyPr anchorCtr="0" anchor="b" bIns="0" lIns="0" spcFirstLastPara="1" rIns="0" wrap="square" tIns="0">
+          <a:bodyPr spcFirstLastPara="1" wrap="square" lIns="0" tIns="0" rIns="0" bIns="0" anchor="b" anchorCtr="0">
             <a:normAutofit/>
           </a:bodyPr>
           <a:lstStyle>
@@ -4286,7 +4408,9 @@
               </a:defRPr>
             </a:lvl9pPr>
           </a:lstStyle>
-          <a:p/>
+          <a:p>
+            <a:endParaRPr/>
+          </a:p>
         </p:txBody>
       </p:sp>
       <p:sp>
@@ -4311,12 +4435,12 @@
           </a:ln>
         </p:spPr>
         <p:txBody>
-          <a:bodyPr anchorCtr="0" anchor="ctr" bIns="91425" lIns="91425" spcFirstLastPara="1" rIns="91425" wrap="square" tIns="91425">
+          <a:bodyPr spcFirstLastPara="1" wrap="square" lIns="91425" tIns="91425" rIns="91425" bIns="91425" anchor="ctr" anchorCtr="0">
             <a:noAutofit/>
           </a:bodyPr>
           <a:lstStyle/>
           <a:p>
-            <a:pPr indent="0" lvl="0" marL="0" rtl="0" algn="ctr">
+            <a:pPr marL="0" lvl="0" indent="0" algn="ctr" rtl="0">
               <a:spcBef>
                 <a:spcPts val="0"/>
               </a:spcBef>
@@ -4325,9 +4449,6 @@
               </a:spcAft>
               <a:buNone/>
             </a:pPr>
-            <a:r>
-              <a:t/>
-            </a:r>
             <a:endParaRPr>
               <a:solidFill>
                 <a:schemeClr val="dk1"/>
@@ -4362,12 +4483,12 @@
           </a:ln>
         </p:spPr>
         <p:txBody>
-          <a:bodyPr anchorCtr="0" anchor="ctr" bIns="91425" lIns="91425" spcFirstLastPara="1" rIns="91425" wrap="square" tIns="91425">
+          <a:bodyPr spcFirstLastPara="1" wrap="square" lIns="91425" tIns="91425" rIns="91425" bIns="91425" anchor="ctr" anchorCtr="0">
             <a:noAutofit/>
           </a:bodyPr>
           <a:lstStyle/>
           <a:p>
-            <a:pPr indent="0" lvl="0" marL="0" rtl="0" algn="ctr">
+            <a:pPr marL="0" lvl="0" indent="0" algn="ctr" rtl="0">
               <a:spcBef>
                 <a:spcPts val="0"/>
               </a:spcBef>
@@ -4376,9 +4497,6 @@
               </a:spcAft>
               <a:buNone/>
             </a:pPr>
-            <a:r>
-              <a:t/>
-            </a:r>
             <a:endParaRPr>
               <a:solidFill>
                 <a:schemeClr val="dk1"/>
@@ -4394,7 +4512,9 @@
       <p:sp>
         <p:nvSpPr>
           <p:cNvPr id="69" name="Google Shape;69;p13"/>
-          <p:cNvSpPr txBox="1"/>
+          <p:cNvSpPr txBox="1">
+            <a:spLocks noGrp="1"/>
+          </p:cNvSpPr>
           <p:nvPr>
             <p:ph type="title"/>
           </p:nvPr>
@@ -4409,7 +4529,7 @@
           </a:prstGeom>
         </p:spPr>
         <p:txBody>
-          <a:bodyPr anchorCtr="0" anchor="t" bIns="0" lIns="0" spcFirstLastPara="1" rIns="0" wrap="square" tIns="0">
+          <a:bodyPr spcFirstLastPara="1" wrap="square" lIns="0" tIns="0" rIns="0" bIns="0" anchor="t" anchorCtr="0">
             <a:normAutofit/>
           </a:bodyPr>
           <a:lstStyle>
@@ -4567,7 +4687,9 @@
               </a:defRPr>
             </a:lvl9pPr>
           </a:lstStyle>
-          <a:p/>
+          <a:p>
+            <a:endParaRPr/>
+          </a:p>
         </p:txBody>
       </p:sp>
       <p:cxnSp>
@@ -4585,23 +4707,25 @@
             <a:avLst/>
           </a:prstGeom>
           <a:noFill/>
-          <a:ln cap="flat" cmpd="sng" w="9525">
+          <a:ln w="9525" cap="flat" cmpd="sng">
             <a:solidFill>
               <a:schemeClr val="accent1"/>
             </a:solidFill>
             <a:prstDash val="solid"/>
             <a:round/>
-            <a:headEnd len="med" w="med" type="none"/>
-            <a:tailEnd len="med" w="med" type="none"/>
+            <a:headEnd type="none" w="med" len="med"/>
+            <a:tailEnd type="none" w="med" len="med"/>
           </a:ln>
         </p:spPr>
       </p:cxnSp>
       <p:sp>
         <p:nvSpPr>
           <p:cNvPr id="71" name="Google Shape;71;p13"/>
-          <p:cNvSpPr txBox="1"/>
+          <p:cNvSpPr txBox="1">
+            <a:spLocks noGrp="1"/>
+          </p:cNvSpPr>
           <p:nvPr>
-            <p:ph idx="5" type="subTitle"/>
+            <p:ph type="subTitle" idx="5"/>
           </p:nvPr>
         </p:nvSpPr>
         <p:spPr>
@@ -4614,7 +4738,7 @@
           </a:prstGeom>
         </p:spPr>
         <p:txBody>
-          <a:bodyPr anchorCtr="0" anchor="t" bIns="0" lIns="0" spcFirstLastPara="1" rIns="0" wrap="square" tIns="0">
+          <a:bodyPr spcFirstLastPara="1" wrap="square" lIns="0" tIns="0" rIns="0" bIns="0" anchor="t" anchorCtr="0">
             <a:normAutofit/>
           </a:bodyPr>
           <a:lstStyle>
@@ -4818,15 +4942,19 @@
               </a:defRPr>
             </a:lvl9pPr>
           </a:lstStyle>
-          <a:p/>
+          <a:p>
+            <a:endParaRPr/>
+          </a:p>
         </p:txBody>
       </p:sp>
       <p:sp>
         <p:nvSpPr>
           <p:cNvPr id="72" name="Google Shape;72;p13"/>
-          <p:cNvSpPr txBox="1"/>
+          <p:cNvSpPr txBox="1">
+            <a:spLocks noGrp="1"/>
+          </p:cNvSpPr>
           <p:nvPr>
-            <p:ph idx="6" type="subTitle"/>
+            <p:ph type="subTitle" idx="6"/>
           </p:nvPr>
         </p:nvSpPr>
         <p:spPr>
@@ -4839,7 +4967,7 @@
           </a:prstGeom>
         </p:spPr>
         <p:txBody>
-          <a:bodyPr anchorCtr="0" anchor="t" bIns="0" lIns="0" spcFirstLastPara="1" rIns="0" wrap="square" tIns="0">
+          <a:bodyPr spcFirstLastPara="1" wrap="square" lIns="0" tIns="0" rIns="0" bIns="0" anchor="t" anchorCtr="0">
             <a:normAutofit/>
           </a:bodyPr>
           <a:lstStyle>
@@ -5043,15 +5171,19 @@
               </a:defRPr>
             </a:lvl9pPr>
           </a:lstStyle>
-          <a:p/>
+          <a:p>
+            <a:endParaRPr/>
+          </a:p>
         </p:txBody>
       </p:sp>
       <p:sp>
         <p:nvSpPr>
           <p:cNvPr id="73" name="Google Shape;73;p13"/>
-          <p:cNvSpPr txBox="1"/>
+          <p:cNvSpPr txBox="1">
+            <a:spLocks noGrp="1"/>
+          </p:cNvSpPr>
           <p:nvPr>
-            <p:ph idx="7" type="subTitle"/>
+            <p:ph type="subTitle" idx="7"/>
           </p:nvPr>
         </p:nvSpPr>
         <p:spPr>
@@ -5064,7 +5196,7 @@
           </a:prstGeom>
         </p:spPr>
         <p:txBody>
-          <a:bodyPr anchorCtr="0" anchor="t" bIns="91425" lIns="0" spcFirstLastPara="1" rIns="91425" wrap="square" tIns="0">
+          <a:bodyPr spcFirstLastPara="1" wrap="square" lIns="0" tIns="0" rIns="91425" bIns="91425" anchor="t" anchorCtr="0">
             <a:normAutofit/>
           </a:bodyPr>
           <a:lstStyle>
@@ -5081,7 +5213,7 @@
               <a:buSzPts val="1200"/>
               <a:buFont typeface="Urbanist"/>
               <a:buNone/>
-              <a:defRPr b="1" sz="1200"/>
+              <a:defRPr sz="1200" b="1"/>
             </a:lvl1pPr>
             <a:lvl2pPr lvl="1">
               <a:spcBef>
@@ -5268,15 +5400,19 @@
               </a:defRPr>
             </a:lvl9pPr>
           </a:lstStyle>
-          <a:p/>
+          <a:p>
+            <a:endParaRPr/>
+          </a:p>
         </p:txBody>
       </p:sp>
       <p:sp>
         <p:nvSpPr>
           <p:cNvPr id="74" name="Google Shape;74;p13"/>
-          <p:cNvSpPr txBox="1"/>
+          <p:cNvSpPr txBox="1">
+            <a:spLocks noGrp="1"/>
+          </p:cNvSpPr>
           <p:nvPr>
-            <p:ph idx="8" type="subTitle"/>
+            <p:ph type="subTitle" idx="8"/>
           </p:nvPr>
         </p:nvSpPr>
         <p:spPr>
@@ -5289,7 +5425,7 @@
           </a:prstGeom>
         </p:spPr>
         <p:txBody>
-          <a:bodyPr anchorCtr="0" anchor="t" bIns="91425" lIns="0" spcFirstLastPara="1" rIns="91425" wrap="square" tIns="0">
+          <a:bodyPr spcFirstLastPara="1" wrap="square" lIns="0" tIns="0" rIns="91425" bIns="91425" anchor="t" anchorCtr="0">
             <a:normAutofit/>
           </a:bodyPr>
           <a:lstStyle>
@@ -5306,7 +5442,7 @@
               <a:buSzPts val="1200"/>
               <a:buFont typeface="Urbanist"/>
               <a:buNone/>
-              <a:defRPr b="1" sz="1200"/>
+              <a:defRPr sz="1200" b="1"/>
             </a:lvl1pPr>
             <a:lvl2pPr lvl="1">
               <a:spcBef>
@@ -5493,7 +5629,9 @@
               </a:defRPr>
             </a:lvl9pPr>
           </a:lstStyle>
-          <a:p/>
+          <a:p>
+            <a:endParaRPr/>
+          </a:p>
         </p:txBody>
       </p:sp>
     </p:spTree>
@@ -5503,7 +5641,7 @@
   </p:clrMapOvr>
   <p:extLst>
     <p:ext uri="{DCECCB84-F9BA-43D5-87BE-67443E8EF086}">
-      <p15:sldGuideLst>
+      <p15:sldGuideLst xmlns:p15="http://schemas.microsoft.com/office/powerpoint/2012/main">
         <p15:guide id="1" orient="horz" pos="2805">
           <p15:clr>
             <a:srgbClr val="E46962"/>
@@ -5516,11 +5654,11 @@
 </file>
 
 <file path=ppt/slideLayouts/slideLayout13.xml><?xml version="1.0" encoding="utf-8"?>
-<p:sldLayout xmlns:a="http://schemas.openxmlformats.org/drawingml/2006/main" xmlns:r="http://schemas.openxmlformats.org/officeDocument/2006/relationships" xmlns:mc="http://schemas.openxmlformats.org/markup-compatibility/2006" xmlns:mv="urn:schemas-microsoft-com:mac:vml" xmlns:p="http://schemas.openxmlformats.org/presentationml/2006/main" xmlns:c="http://schemas.openxmlformats.org/drawingml/2006/chart" xmlns:dgm="http://schemas.openxmlformats.org/drawingml/2006/diagram" xmlns:o="urn:schemas-microsoft-com:office:office" xmlns:v="urn:schemas-microsoft-com:vml" xmlns:pvml="urn:schemas-microsoft-com:office:powerpoint" xmlns:com="http://schemas.openxmlformats.org/drawingml/2006/compatibility" xmlns:p14="http://schemas.microsoft.com/office/powerpoint/2010/main" xmlns:p15="http://schemas.microsoft.com/office/powerpoint/2012/main" xmlns:ahyp="http://schemas.microsoft.com/office/drawing/2018/hyperlinkcolor" matchingName="Cards w/ images">
+<p:sldLayout xmlns:a="http://schemas.openxmlformats.org/drawingml/2006/main" xmlns:r="http://schemas.openxmlformats.org/officeDocument/2006/relationships" xmlns:p="http://schemas.openxmlformats.org/presentationml/2006/main" matchingName="Cards w/ images">
   <p:cSld name="BLANK_1_1_1_1_1_1_1_1_1_1_3">
     <p:spTree>
       <p:nvGrpSpPr>
-        <p:cNvPr id="75" name="Shape 75"/>
+        <p:cNvPr id="1" name="Shape 75"/>
         <p:cNvGrpSpPr/>
         <p:nvPr/>
       </p:nvGrpSpPr>
@@ -5535,9 +5673,11 @@
       <p:sp>
         <p:nvSpPr>
           <p:cNvPr id="76" name="Google Shape;76;p14"/>
-          <p:cNvSpPr txBox="1"/>
+          <p:cNvSpPr txBox="1">
+            <a:spLocks noGrp="1"/>
+          </p:cNvSpPr>
           <p:nvPr>
-            <p:ph idx="1" type="subTitle"/>
+            <p:ph type="subTitle" idx="1"/>
           </p:nvPr>
         </p:nvSpPr>
         <p:spPr>
@@ -5550,7 +5690,7 @@
           </a:prstGeom>
         </p:spPr>
         <p:txBody>
-          <a:bodyPr anchorCtr="0" anchor="b" bIns="0" lIns="0" spcFirstLastPara="1" rIns="0" wrap="square" tIns="0">
+          <a:bodyPr spcFirstLastPara="1" wrap="square" lIns="0" tIns="0" rIns="0" bIns="0" anchor="b" anchorCtr="0">
             <a:normAutofit/>
           </a:bodyPr>
           <a:lstStyle>
@@ -5762,15 +5902,19 @@
               </a:defRPr>
             </a:lvl9pPr>
           </a:lstStyle>
-          <a:p/>
+          <a:p>
+            <a:endParaRPr/>
+          </a:p>
         </p:txBody>
       </p:sp>
       <p:sp>
         <p:nvSpPr>
           <p:cNvPr id="77" name="Google Shape;77;p14"/>
-          <p:cNvSpPr txBox="1"/>
+          <p:cNvSpPr txBox="1">
+            <a:spLocks noGrp="1"/>
+          </p:cNvSpPr>
           <p:nvPr>
-            <p:ph idx="2" type="subTitle"/>
+            <p:ph type="subTitle" idx="2"/>
           </p:nvPr>
         </p:nvSpPr>
         <p:spPr>
@@ -5783,7 +5927,7 @@
           </a:prstGeom>
         </p:spPr>
         <p:txBody>
-          <a:bodyPr anchorCtr="0" anchor="b" bIns="0" lIns="0" spcFirstLastPara="1" rIns="0" wrap="square" tIns="0">
+          <a:bodyPr spcFirstLastPara="1" wrap="square" lIns="0" tIns="0" rIns="0" bIns="0" anchor="b" anchorCtr="0">
             <a:normAutofit/>
           </a:bodyPr>
           <a:lstStyle>
@@ -5995,15 +6139,19 @@
               </a:defRPr>
             </a:lvl9pPr>
           </a:lstStyle>
-          <a:p/>
+          <a:p>
+            <a:endParaRPr/>
+          </a:p>
         </p:txBody>
       </p:sp>
       <p:sp>
         <p:nvSpPr>
           <p:cNvPr id="78" name="Google Shape;78;p14"/>
-          <p:cNvSpPr txBox="1"/>
+          <p:cNvSpPr txBox="1">
+            <a:spLocks noGrp="1"/>
+          </p:cNvSpPr>
           <p:nvPr>
-            <p:ph idx="3" type="subTitle"/>
+            <p:ph type="subTitle" idx="3"/>
           </p:nvPr>
         </p:nvSpPr>
         <p:spPr>
@@ -6016,7 +6164,7 @@
           </a:prstGeom>
         </p:spPr>
         <p:txBody>
-          <a:bodyPr anchorCtr="0" anchor="b" bIns="0" lIns="0" spcFirstLastPara="1" rIns="0" wrap="square" tIns="0">
+          <a:bodyPr spcFirstLastPara="1" wrap="square" lIns="0" tIns="0" rIns="0" bIns="0" anchor="b" anchorCtr="0">
             <a:normAutofit/>
           </a:bodyPr>
           <a:lstStyle>
@@ -6228,7 +6376,9 @@
               </a:defRPr>
             </a:lvl9pPr>
           </a:lstStyle>
-          <a:p/>
+          <a:p>
+            <a:endParaRPr/>
+          </a:p>
         </p:txBody>
       </p:sp>
       <p:grpSp>
@@ -6267,12 +6417,12 @@
             </a:ln>
           </p:spPr>
           <p:txBody>
-            <a:bodyPr anchorCtr="0" anchor="ctr" bIns="91425" lIns="91425" spcFirstLastPara="1" rIns="91425" wrap="square" tIns="91425">
+            <a:bodyPr spcFirstLastPara="1" wrap="square" lIns="91425" tIns="91425" rIns="91425" bIns="91425" anchor="ctr" anchorCtr="0">
               <a:noAutofit/>
             </a:bodyPr>
             <a:lstStyle/>
             <a:p>
-              <a:pPr indent="0" lvl="0" marL="0" rtl="0" algn="ctr">
+              <a:pPr marL="0" lvl="0" indent="0" algn="ctr" rtl="0">
                 <a:spcBef>
                   <a:spcPts val="0"/>
                 </a:spcBef>
@@ -6281,9 +6431,6 @@
                 </a:spcAft>
                 <a:buNone/>
               </a:pPr>
-              <a:r>
-                <a:t/>
-              </a:r>
               <a:endParaRPr>
                 <a:solidFill>
                   <a:schemeClr val="dk1"/>
@@ -6325,14 +6472,14 @@
                 <a:avLst/>
               </a:prstGeom>
               <a:noFill/>
-              <a:ln cap="flat" cmpd="sng" w="9525">
+              <a:ln w="9525" cap="flat" cmpd="sng">
                 <a:solidFill>
                   <a:schemeClr val="dk1"/>
                 </a:solidFill>
                 <a:prstDash val="solid"/>
                 <a:round/>
-                <a:headEnd len="med" w="med" type="none"/>
-                <a:tailEnd len="med" w="med" type="none"/>
+                <a:headEnd type="none" w="med" len="med"/>
+                <a:tailEnd type="none" w="med" len="med"/>
               </a:ln>
             </p:spPr>
           </p:cxnSp>
@@ -6351,14 +6498,14 @@
                 <a:avLst/>
               </a:prstGeom>
               <a:noFill/>
-              <a:ln cap="flat" cmpd="sng" w="9525">
+              <a:ln w="9525" cap="flat" cmpd="sng">
                 <a:solidFill>
                   <a:schemeClr val="dk1"/>
                 </a:solidFill>
                 <a:prstDash val="solid"/>
                 <a:round/>
-                <a:headEnd len="med" w="med" type="none"/>
-                <a:tailEnd len="med" w="med" type="none"/>
+                <a:headEnd type="none" w="med" len="med"/>
+                <a:tailEnd type="none" w="med" len="med"/>
               </a:ln>
             </p:spPr>
           </p:cxnSp>
@@ -6367,9 +6514,11 @@
       <p:sp>
         <p:nvSpPr>
           <p:cNvPr id="84" name="Google Shape;84;p14"/>
-          <p:cNvSpPr/>
+          <p:cNvSpPr>
+            <a:spLocks noGrp="1"/>
+          </p:cNvSpPr>
           <p:nvPr>
-            <p:ph idx="4" type="pic"/>
+            <p:ph type="pic" idx="4"/>
           </p:nvPr>
         </p:nvSpPr>
         <p:spPr>
@@ -6379,7 +6528,7 @@
           </a:xfrm>
           <a:prstGeom prst="roundRect">
             <a:avLst>
-              <a:gd fmla="val 17601" name="adj"/>
+              <a:gd name="adj" fmla="val 17601"/>
             </a:avLst>
           </a:prstGeom>
           <a:noFill/>
@@ -6391,9 +6540,11 @@
       <p:sp>
         <p:nvSpPr>
           <p:cNvPr id="85" name="Google Shape;85;p14"/>
-          <p:cNvSpPr txBox="1"/>
+          <p:cNvSpPr txBox="1">
+            <a:spLocks noGrp="1"/>
+          </p:cNvSpPr>
           <p:nvPr>
-            <p:ph idx="5" type="subTitle"/>
+            <p:ph type="subTitle" idx="5"/>
           </p:nvPr>
         </p:nvSpPr>
         <p:spPr>
@@ -6406,7 +6557,7 @@
           </a:prstGeom>
         </p:spPr>
         <p:txBody>
-          <a:bodyPr anchorCtr="0" anchor="b" bIns="0" lIns="0" spcFirstLastPara="1" rIns="91425" wrap="square" tIns="0">
+          <a:bodyPr spcFirstLastPara="1" wrap="square" lIns="0" tIns="0" rIns="91425" bIns="0" anchor="b" anchorCtr="0">
             <a:normAutofit/>
           </a:bodyPr>
           <a:lstStyle>
@@ -6616,15 +6767,19 @@
               </a:defRPr>
             </a:lvl9pPr>
           </a:lstStyle>
-          <a:p/>
+          <a:p>
+            <a:endParaRPr/>
+          </a:p>
         </p:txBody>
       </p:sp>
       <p:sp>
         <p:nvSpPr>
           <p:cNvPr id="86" name="Google Shape;86;p14"/>
-          <p:cNvSpPr txBox="1"/>
+          <p:cNvSpPr txBox="1">
+            <a:spLocks noGrp="1"/>
+          </p:cNvSpPr>
           <p:nvPr>
-            <p:ph idx="6" type="subTitle"/>
+            <p:ph type="subTitle" idx="6"/>
           </p:nvPr>
         </p:nvSpPr>
         <p:spPr>
@@ -6637,7 +6792,7 @@
           </a:prstGeom>
         </p:spPr>
         <p:txBody>
-          <a:bodyPr anchorCtr="0" anchor="t" bIns="0" lIns="0" spcFirstLastPara="1" rIns="91425" wrap="square" tIns="0">
+          <a:bodyPr spcFirstLastPara="1" wrap="square" lIns="0" tIns="0" rIns="91425" bIns="0" anchor="t" anchorCtr="0">
             <a:normAutofit/>
           </a:bodyPr>
           <a:lstStyle>
@@ -6844,15 +6999,19 @@
               </a:defRPr>
             </a:lvl9pPr>
           </a:lstStyle>
-          <a:p/>
+          <a:p>
+            <a:endParaRPr/>
+          </a:p>
         </p:txBody>
       </p:sp>
       <p:sp>
         <p:nvSpPr>
           <p:cNvPr id="87" name="Google Shape;87;p14"/>
-          <p:cNvSpPr txBox="1"/>
+          <p:cNvSpPr txBox="1">
+            <a:spLocks noGrp="1"/>
+          </p:cNvSpPr>
           <p:nvPr>
-            <p:ph idx="7" type="body"/>
+            <p:ph type="body" idx="7"/>
           </p:nvPr>
         </p:nvSpPr>
         <p:spPr>
@@ -6865,11 +7024,11 @@
           </a:prstGeom>
         </p:spPr>
         <p:txBody>
-          <a:bodyPr anchorCtr="0" anchor="t" bIns="0" lIns="0" spcFirstLastPara="1" rIns="91425" wrap="square" tIns="0">
+          <a:bodyPr spcFirstLastPara="1" wrap="square" lIns="0" tIns="0" rIns="91425" bIns="0" anchor="t" anchorCtr="0">
             <a:normAutofit/>
           </a:bodyPr>
           <a:lstStyle>
-            <a:lvl1pPr indent="-292100" lvl="0" marL="457200">
+            <a:lvl1pPr marL="457200" lvl="0" indent="-292100">
               <a:spcBef>
                 <a:spcPts val="0"/>
               </a:spcBef>
@@ -6884,7 +7043,7 @@
               <a:buChar char="●"/>
               <a:defRPr sz="1000"/>
             </a:lvl1pPr>
-            <a:lvl2pPr indent="-292100" lvl="1" marL="914400">
+            <a:lvl2pPr marL="914400" lvl="1" indent="-292100">
               <a:spcBef>
                 <a:spcPts val="0"/>
               </a:spcBef>
@@ -6899,7 +7058,7 @@
               <a:buChar char="○"/>
               <a:defRPr sz="1000"/>
             </a:lvl2pPr>
-            <a:lvl3pPr indent="-292100" lvl="2" marL="1371600">
+            <a:lvl3pPr marL="1371600" lvl="2" indent="-292100">
               <a:spcBef>
                 <a:spcPts val="0"/>
               </a:spcBef>
@@ -6914,7 +7073,7 @@
               <a:buChar char="■"/>
               <a:defRPr sz="1000"/>
             </a:lvl3pPr>
-            <a:lvl4pPr indent="-292100" lvl="3" marL="1828800">
+            <a:lvl4pPr marL="1828800" lvl="3" indent="-292100">
               <a:spcBef>
                 <a:spcPts val="0"/>
               </a:spcBef>
@@ -6929,7 +7088,7 @@
               <a:buChar char="●"/>
               <a:defRPr sz="1000"/>
             </a:lvl4pPr>
-            <a:lvl5pPr indent="-292100" lvl="4" marL="2286000">
+            <a:lvl5pPr marL="2286000" lvl="4" indent="-292100">
               <a:spcBef>
                 <a:spcPts val="0"/>
               </a:spcBef>
@@ -6944,7 +7103,7 @@
               <a:buChar char="○"/>
               <a:defRPr sz="1000"/>
             </a:lvl5pPr>
-            <a:lvl6pPr indent="-292100" lvl="5" marL="2743200">
+            <a:lvl6pPr marL="2743200" lvl="5" indent="-292100">
               <a:spcBef>
                 <a:spcPts val="0"/>
               </a:spcBef>
@@ -6959,7 +7118,7 @@
               <a:buChar char="■"/>
               <a:defRPr sz="1000"/>
             </a:lvl6pPr>
-            <a:lvl7pPr indent="-292100" lvl="6" marL="3200400">
+            <a:lvl7pPr marL="3200400" lvl="6" indent="-292100">
               <a:spcBef>
                 <a:spcPts val="0"/>
               </a:spcBef>
@@ -6974,7 +7133,7 @@
               <a:buChar char="●"/>
               <a:defRPr sz="1000"/>
             </a:lvl7pPr>
-            <a:lvl8pPr indent="-292100" lvl="7" marL="3657600">
+            <a:lvl8pPr marL="3657600" lvl="7" indent="-292100">
               <a:spcBef>
                 <a:spcPts val="0"/>
               </a:spcBef>
@@ -6989,7 +7148,7 @@
               <a:buChar char="○"/>
               <a:defRPr sz="1000"/>
             </a:lvl8pPr>
-            <a:lvl9pPr indent="-292100" lvl="8" marL="4114800">
+            <a:lvl9pPr marL="4114800" lvl="8" indent="-292100">
               <a:spcBef>
                 <a:spcPts val="0"/>
               </a:spcBef>
@@ -7005,15 +7164,19 @@
               <a:defRPr sz="1000"/>
             </a:lvl9pPr>
           </a:lstStyle>
-          <a:p/>
+          <a:p>
+            <a:endParaRPr/>
+          </a:p>
         </p:txBody>
       </p:sp>
       <p:sp>
         <p:nvSpPr>
           <p:cNvPr id="88" name="Google Shape;88;p14"/>
-          <p:cNvSpPr/>
+          <p:cNvSpPr>
+            <a:spLocks noGrp="1"/>
+          </p:cNvSpPr>
           <p:nvPr>
-            <p:ph idx="8" type="pic"/>
+            <p:ph type="pic" idx="8"/>
           </p:nvPr>
         </p:nvSpPr>
         <p:spPr>
@@ -7023,7 +7186,7 @@
           </a:xfrm>
           <a:prstGeom prst="roundRect">
             <a:avLst>
-              <a:gd fmla="val 17601" name="adj"/>
+              <a:gd name="adj" fmla="val 17601"/>
             </a:avLst>
           </a:prstGeom>
           <a:noFill/>
@@ -7035,9 +7198,11 @@
       <p:sp>
         <p:nvSpPr>
           <p:cNvPr id="89" name="Google Shape;89;p14"/>
-          <p:cNvSpPr txBox="1"/>
+          <p:cNvSpPr txBox="1">
+            <a:spLocks noGrp="1"/>
+          </p:cNvSpPr>
           <p:nvPr>
-            <p:ph idx="9" type="subTitle"/>
+            <p:ph type="subTitle" idx="9"/>
           </p:nvPr>
         </p:nvSpPr>
         <p:spPr>
@@ -7050,7 +7215,7 @@
           </a:prstGeom>
         </p:spPr>
         <p:txBody>
-          <a:bodyPr anchorCtr="0" anchor="b" bIns="0" lIns="0" spcFirstLastPara="1" rIns="91425" wrap="square" tIns="0">
+          <a:bodyPr spcFirstLastPara="1" wrap="square" lIns="0" tIns="0" rIns="91425" bIns="0" anchor="b" anchorCtr="0">
             <a:normAutofit/>
           </a:bodyPr>
           <a:lstStyle>
@@ -7260,15 +7425,19 @@
               </a:defRPr>
             </a:lvl9pPr>
           </a:lstStyle>
-          <a:p/>
+          <a:p>
+            <a:endParaRPr/>
+          </a:p>
         </p:txBody>
       </p:sp>
       <p:sp>
         <p:nvSpPr>
           <p:cNvPr id="90" name="Google Shape;90;p14"/>
-          <p:cNvSpPr txBox="1"/>
+          <p:cNvSpPr txBox="1">
+            <a:spLocks noGrp="1"/>
+          </p:cNvSpPr>
           <p:nvPr>
-            <p:ph idx="13" type="subTitle"/>
+            <p:ph type="subTitle" idx="13"/>
           </p:nvPr>
         </p:nvSpPr>
         <p:spPr>
@@ -7281,7 +7450,7 @@
           </a:prstGeom>
         </p:spPr>
         <p:txBody>
-          <a:bodyPr anchorCtr="0" anchor="t" bIns="0" lIns="0" spcFirstLastPara="1" rIns="91425" wrap="square" tIns="0">
+          <a:bodyPr spcFirstLastPara="1" wrap="square" lIns="0" tIns="0" rIns="91425" bIns="0" anchor="t" anchorCtr="0">
             <a:normAutofit/>
           </a:bodyPr>
           <a:lstStyle>
@@ -7488,15 +7657,19 @@
               </a:defRPr>
             </a:lvl9pPr>
           </a:lstStyle>
-          <a:p/>
+          <a:p>
+            <a:endParaRPr/>
+          </a:p>
         </p:txBody>
       </p:sp>
       <p:sp>
         <p:nvSpPr>
           <p:cNvPr id="91" name="Google Shape;91;p14"/>
-          <p:cNvSpPr txBox="1"/>
+          <p:cNvSpPr txBox="1">
+            <a:spLocks noGrp="1"/>
+          </p:cNvSpPr>
           <p:nvPr>
-            <p:ph idx="14" type="body"/>
+            <p:ph type="body" idx="14"/>
           </p:nvPr>
         </p:nvSpPr>
         <p:spPr>
@@ -7509,11 +7682,11 @@
           </a:prstGeom>
         </p:spPr>
         <p:txBody>
-          <a:bodyPr anchorCtr="0" anchor="t" bIns="0" lIns="0" spcFirstLastPara="1" rIns="91425" wrap="square" tIns="0">
+          <a:bodyPr spcFirstLastPara="1" wrap="square" lIns="0" tIns="0" rIns="91425" bIns="0" anchor="t" anchorCtr="0">
             <a:normAutofit/>
           </a:bodyPr>
           <a:lstStyle>
-            <a:lvl1pPr indent="-292100" lvl="0" marL="457200">
+            <a:lvl1pPr marL="457200" lvl="0" indent="-292100">
               <a:spcBef>
                 <a:spcPts val="0"/>
               </a:spcBef>
@@ -7528,7 +7701,7 @@
               <a:buChar char="●"/>
               <a:defRPr sz="1000"/>
             </a:lvl1pPr>
-            <a:lvl2pPr indent="-292100" lvl="1" marL="914400">
+            <a:lvl2pPr marL="914400" lvl="1" indent="-292100">
               <a:spcBef>
                 <a:spcPts val="0"/>
               </a:spcBef>
@@ -7543,7 +7716,7 @@
               <a:buChar char="○"/>
               <a:defRPr sz="1000"/>
             </a:lvl2pPr>
-            <a:lvl3pPr indent="-292100" lvl="2" marL="1371600">
+            <a:lvl3pPr marL="1371600" lvl="2" indent="-292100">
               <a:spcBef>
                 <a:spcPts val="0"/>
               </a:spcBef>
@@ -7558,7 +7731,7 @@
               <a:buChar char="■"/>
               <a:defRPr sz="1000"/>
             </a:lvl3pPr>
-            <a:lvl4pPr indent="-292100" lvl="3" marL="1828800">
+            <a:lvl4pPr marL="1828800" lvl="3" indent="-292100">
               <a:spcBef>
                 <a:spcPts val="0"/>
               </a:spcBef>
@@ -7573,7 +7746,7 @@
               <a:buChar char="●"/>
               <a:defRPr sz="1000"/>
             </a:lvl4pPr>
-            <a:lvl5pPr indent="-292100" lvl="4" marL="2286000">
+            <a:lvl5pPr marL="2286000" lvl="4" indent="-292100">
               <a:spcBef>
                 <a:spcPts val="0"/>
               </a:spcBef>
@@ -7588,7 +7761,7 @@
               <a:buChar char="○"/>
               <a:defRPr sz="1000"/>
             </a:lvl5pPr>
-            <a:lvl6pPr indent="-292100" lvl="5" marL="2743200">
+            <a:lvl6pPr marL="2743200" lvl="5" indent="-292100">
               <a:spcBef>
                 <a:spcPts val="0"/>
               </a:spcBef>
@@ -7603,7 +7776,7 @@
               <a:buChar char="■"/>
               <a:defRPr sz="1000"/>
             </a:lvl6pPr>
-            <a:lvl7pPr indent="-292100" lvl="6" marL="3200400">
+            <a:lvl7pPr marL="3200400" lvl="6" indent="-292100">
               <a:spcBef>
                 <a:spcPts val="0"/>
               </a:spcBef>
@@ -7618,7 +7791,7 @@
               <a:buChar char="●"/>
               <a:defRPr sz="1000"/>
             </a:lvl7pPr>
-            <a:lvl8pPr indent="-292100" lvl="7" marL="3657600">
+            <a:lvl8pPr marL="3657600" lvl="7" indent="-292100">
               <a:spcBef>
                 <a:spcPts val="0"/>
               </a:spcBef>
@@ -7633,7 +7806,7 @@
               <a:buChar char="○"/>
               <a:defRPr sz="1000"/>
             </a:lvl8pPr>
-            <a:lvl9pPr indent="-292100" lvl="8" marL="4114800">
+            <a:lvl9pPr marL="4114800" lvl="8" indent="-292100">
               <a:spcBef>
                 <a:spcPts val="0"/>
               </a:spcBef>
@@ -7649,15 +7822,19 @@
               <a:defRPr sz="1000"/>
             </a:lvl9pPr>
           </a:lstStyle>
-          <a:p/>
+          <a:p>
+            <a:endParaRPr/>
+          </a:p>
         </p:txBody>
       </p:sp>
       <p:sp>
         <p:nvSpPr>
           <p:cNvPr id="92" name="Google Shape;92;p14"/>
-          <p:cNvSpPr/>
+          <p:cNvSpPr>
+            <a:spLocks noGrp="1"/>
+          </p:cNvSpPr>
           <p:nvPr>
-            <p:ph idx="15" type="pic"/>
+            <p:ph type="pic" idx="15"/>
           </p:nvPr>
         </p:nvSpPr>
         <p:spPr>
@@ -7667,7 +7844,7 @@
           </a:xfrm>
           <a:prstGeom prst="roundRect">
             <a:avLst>
-              <a:gd fmla="val 17601" name="adj"/>
+              <a:gd name="adj" fmla="val 17601"/>
             </a:avLst>
           </a:prstGeom>
           <a:noFill/>
@@ -7679,9 +7856,11 @@
       <p:sp>
         <p:nvSpPr>
           <p:cNvPr id="93" name="Google Shape;93;p14"/>
-          <p:cNvSpPr txBox="1"/>
+          <p:cNvSpPr txBox="1">
+            <a:spLocks noGrp="1"/>
+          </p:cNvSpPr>
           <p:nvPr>
-            <p:ph idx="16" type="subTitle"/>
+            <p:ph type="subTitle" idx="16"/>
           </p:nvPr>
         </p:nvSpPr>
         <p:spPr>
@@ -7694,7 +7873,7 @@
           </a:prstGeom>
         </p:spPr>
         <p:txBody>
-          <a:bodyPr anchorCtr="0" anchor="b" bIns="0" lIns="0" spcFirstLastPara="1" rIns="91425" wrap="square" tIns="0">
+          <a:bodyPr spcFirstLastPara="1" wrap="square" lIns="0" tIns="0" rIns="91425" bIns="0" anchor="b" anchorCtr="0">
             <a:normAutofit/>
           </a:bodyPr>
           <a:lstStyle>
@@ -7904,15 +8083,19 @@
               </a:defRPr>
             </a:lvl9pPr>
           </a:lstStyle>
-          <a:p/>
+          <a:p>
+            <a:endParaRPr/>
+          </a:p>
         </p:txBody>
       </p:sp>
       <p:sp>
         <p:nvSpPr>
           <p:cNvPr id="94" name="Google Shape;94;p14"/>
-          <p:cNvSpPr txBox="1"/>
+          <p:cNvSpPr txBox="1">
+            <a:spLocks noGrp="1"/>
+          </p:cNvSpPr>
           <p:nvPr>
-            <p:ph idx="17" type="subTitle"/>
+            <p:ph type="subTitle" idx="17"/>
           </p:nvPr>
         </p:nvSpPr>
         <p:spPr>
@@ -7925,7 +8108,7 @@
           </a:prstGeom>
         </p:spPr>
         <p:txBody>
-          <a:bodyPr anchorCtr="0" anchor="t" bIns="0" lIns="0" spcFirstLastPara="1" rIns="91425" wrap="square" tIns="0">
+          <a:bodyPr spcFirstLastPara="1" wrap="square" lIns="0" tIns="0" rIns="91425" bIns="0" anchor="t" anchorCtr="0">
             <a:normAutofit/>
           </a:bodyPr>
           <a:lstStyle>
@@ -8132,15 +8315,19 @@
               </a:defRPr>
             </a:lvl9pPr>
           </a:lstStyle>
-          <a:p/>
+          <a:p>
+            <a:endParaRPr/>
+          </a:p>
         </p:txBody>
       </p:sp>
       <p:sp>
         <p:nvSpPr>
           <p:cNvPr id="95" name="Google Shape;95;p14"/>
-          <p:cNvSpPr txBox="1"/>
+          <p:cNvSpPr txBox="1">
+            <a:spLocks noGrp="1"/>
+          </p:cNvSpPr>
           <p:nvPr>
-            <p:ph idx="18" type="body"/>
+            <p:ph type="body" idx="18"/>
           </p:nvPr>
         </p:nvSpPr>
         <p:spPr>
@@ -8153,11 +8340,11 @@
           </a:prstGeom>
         </p:spPr>
         <p:txBody>
-          <a:bodyPr anchorCtr="0" anchor="t" bIns="0" lIns="0" spcFirstLastPara="1" rIns="91425" wrap="square" tIns="0">
+          <a:bodyPr spcFirstLastPara="1" wrap="square" lIns="0" tIns="0" rIns="91425" bIns="0" anchor="t" anchorCtr="0">
             <a:normAutofit/>
           </a:bodyPr>
           <a:lstStyle>
-            <a:lvl1pPr indent="-292100" lvl="0" marL="457200">
+            <a:lvl1pPr marL="457200" lvl="0" indent="-292100">
               <a:spcBef>
                 <a:spcPts val="0"/>
               </a:spcBef>
@@ -8172,7 +8359,7 @@
               <a:buChar char="●"/>
               <a:defRPr sz="1000"/>
             </a:lvl1pPr>
-            <a:lvl2pPr indent="-292100" lvl="1" marL="914400">
+            <a:lvl2pPr marL="914400" lvl="1" indent="-292100">
               <a:spcBef>
                 <a:spcPts val="0"/>
               </a:spcBef>
@@ -8187,7 +8374,7 @@
               <a:buChar char="○"/>
               <a:defRPr sz="1000"/>
             </a:lvl2pPr>
-            <a:lvl3pPr indent="-292100" lvl="2" marL="1371600">
+            <a:lvl3pPr marL="1371600" lvl="2" indent="-292100">
               <a:spcBef>
                 <a:spcPts val="0"/>
               </a:spcBef>
@@ -8202,7 +8389,7 @@
               <a:buChar char="■"/>
               <a:defRPr sz="1000"/>
             </a:lvl3pPr>
-            <a:lvl4pPr indent="-292100" lvl="3" marL="1828800">
+            <a:lvl4pPr marL="1828800" lvl="3" indent="-292100">
               <a:spcBef>
                 <a:spcPts val="0"/>
               </a:spcBef>
@@ -8217,7 +8404,7 @@
               <a:buChar char="●"/>
               <a:defRPr sz="1000"/>
             </a:lvl4pPr>
-            <a:lvl5pPr indent="-292100" lvl="4" marL="2286000">
+            <a:lvl5pPr marL="2286000" lvl="4" indent="-292100">
               <a:spcBef>
                 <a:spcPts val="0"/>
               </a:spcBef>
@@ -8232,7 +8419,7 @@
               <a:buChar char="○"/>
               <a:defRPr sz="1000"/>
             </a:lvl5pPr>
-            <a:lvl6pPr indent="-292100" lvl="5" marL="2743200">
+            <a:lvl6pPr marL="2743200" lvl="5" indent="-292100">
               <a:spcBef>
                 <a:spcPts val="0"/>
               </a:spcBef>
@@ -8247,7 +8434,7 @@
               <a:buChar char="■"/>
               <a:defRPr sz="1000"/>
             </a:lvl6pPr>
-            <a:lvl7pPr indent="-292100" lvl="6" marL="3200400">
+            <a:lvl7pPr marL="3200400" lvl="6" indent="-292100">
               <a:spcBef>
                 <a:spcPts val="0"/>
               </a:spcBef>
@@ -8262,7 +8449,7 @@
               <a:buChar char="●"/>
               <a:defRPr sz="1000"/>
             </a:lvl7pPr>
-            <a:lvl8pPr indent="-292100" lvl="7" marL="3657600">
+            <a:lvl8pPr marL="3657600" lvl="7" indent="-292100">
               <a:spcBef>
                 <a:spcPts val="0"/>
               </a:spcBef>
@@ -8277,7 +8464,7 @@
               <a:buChar char="○"/>
               <a:defRPr sz="1000"/>
             </a:lvl8pPr>
-            <a:lvl9pPr indent="-292100" lvl="8" marL="4114800">
+            <a:lvl9pPr marL="4114800" lvl="8" indent="-292100">
               <a:spcBef>
                 <a:spcPts val="0"/>
               </a:spcBef>
@@ -8293,15 +8480,19 @@
               <a:defRPr sz="1000"/>
             </a:lvl9pPr>
           </a:lstStyle>
-          <a:p/>
+          <a:p>
+            <a:endParaRPr/>
+          </a:p>
         </p:txBody>
       </p:sp>
       <p:sp>
         <p:nvSpPr>
           <p:cNvPr id="96" name="Google Shape;96;p14"/>
-          <p:cNvSpPr/>
+          <p:cNvSpPr>
+            <a:spLocks noGrp="1"/>
+          </p:cNvSpPr>
           <p:nvPr>
-            <p:ph idx="19" type="pic"/>
+            <p:ph type="pic" idx="19"/>
           </p:nvPr>
         </p:nvSpPr>
         <p:spPr>
@@ -8311,7 +8502,7 @@
           </a:xfrm>
           <a:prstGeom prst="roundRect">
             <a:avLst>
-              <a:gd fmla="val 17601" name="adj"/>
+              <a:gd name="adj" fmla="val 17601"/>
             </a:avLst>
           </a:prstGeom>
           <a:noFill/>
@@ -8323,9 +8514,11 @@
       <p:sp>
         <p:nvSpPr>
           <p:cNvPr id="97" name="Google Shape;97;p14"/>
-          <p:cNvSpPr txBox="1"/>
+          <p:cNvSpPr txBox="1">
+            <a:spLocks noGrp="1"/>
+          </p:cNvSpPr>
           <p:nvPr>
-            <p:ph idx="20" type="subTitle"/>
+            <p:ph type="subTitle" idx="20"/>
           </p:nvPr>
         </p:nvSpPr>
         <p:spPr>
@@ -8338,7 +8531,7 @@
           </a:prstGeom>
         </p:spPr>
         <p:txBody>
-          <a:bodyPr anchorCtr="0" anchor="b" bIns="0" lIns="0" spcFirstLastPara="1" rIns="91425" wrap="square" tIns="0">
+          <a:bodyPr spcFirstLastPara="1" wrap="square" lIns="0" tIns="0" rIns="91425" bIns="0" anchor="b" anchorCtr="0">
             <a:normAutofit/>
           </a:bodyPr>
           <a:lstStyle>
@@ -8548,15 +8741,19 @@
               </a:defRPr>
             </a:lvl9pPr>
           </a:lstStyle>
-          <a:p/>
+          <a:p>
+            <a:endParaRPr/>
+          </a:p>
         </p:txBody>
       </p:sp>
       <p:sp>
         <p:nvSpPr>
           <p:cNvPr id="98" name="Google Shape;98;p14"/>
-          <p:cNvSpPr txBox="1"/>
+          <p:cNvSpPr txBox="1">
+            <a:spLocks noGrp="1"/>
+          </p:cNvSpPr>
           <p:nvPr>
-            <p:ph idx="21" type="subTitle"/>
+            <p:ph type="subTitle" idx="21"/>
           </p:nvPr>
         </p:nvSpPr>
         <p:spPr>
@@ -8569,7 +8766,7 @@
           </a:prstGeom>
         </p:spPr>
         <p:txBody>
-          <a:bodyPr anchorCtr="0" anchor="t" bIns="0" lIns="0" spcFirstLastPara="1" rIns="91425" wrap="square" tIns="0">
+          <a:bodyPr spcFirstLastPara="1" wrap="square" lIns="0" tIns="0" rIns="91425" bIns="0" anchor="t" anchorCtr="0">
             <a:normAutofit/>
           </a:bodyPr>
           <a:lstStyle>
@@ -8776,15 +8973,19 @@
               </a:defRPr>
             </a:lvl9pPr>
           </a:lstStyle>
-          <a:p/>
+          <a:p>
+            <a:endParaRPr/>
+          </a:p>
         </p:txBody>
       </p:sp>
       <p:sp>
         <p:nvSpPr>
           <p:cNvPr id="99" name="Google Shape;99;p14"/>
-          <p:cNvSpPr txBox="1"/>
+          <p:cNvSpPr txBox="1">
+            <a:spLocks noGrp="1"/>
+          </p:cNvSpPr>
           <p:nvPr>
-            <p:ph idx="22" type="body"/>
+            <p:ph type="body" idx="22"/>
           </p:nvPr>
         </p:nvSpPr>
         <p:spPr>
@@ -8797,11 +8998,11 @@
           </a:prstGeom>
         </p:spPr>
         <p:txBody>
-          <a:bodyPr anchorCtr="0" anchor="t" bIns="0" lIns="0" spcFirstLastPara="1" rIns="91425" wrap="square" tIns="0">
+          <a:bodyPr spcFirstLastPara="1" wrap="square" lIns="0" tIns="0" rIns="91425" bIns="0" anchor="t" anchorCtr="0">
             <a:normAutofit/>
           </a:bodyPr>
           <a:lstStyle>
-            <a:lvl1pPr indent="-292100" lvl="0" marL="457200">
+            <a:lvl1pPr marL="457200" lvl="0" indent="-292100">
               <a:spcBef>
                 <a:spcPts val="0"/>
               </a:spcBef>
@@ -8816,7 +9017,7 @@
               <a:buChar char="●"/>
               <a:defRPr sz="1000"/>
             </a:lvl1pPr>
-            <a:lvl2pPr indent="-292100" lvl="1" marL="914400">
+            <a:lvl2pPr marL="914400" lvl="1" indent="-292100">
               <a:spcBef>
                 <a:spcPts val="0"/>
               </a:spcBef>
@@ -8831,7 +9032,7 @@
               <a:buChar char="○"/>
               <a:defRPr sz="1000"/>
             </a:lvl2pPr>
-            <a:lvl3pPr indent="-292100" lvl="2" marL="1371600">
+            <a:lvl3pPr marL="1371600" lvl="2" indent="-292100">
               <a:spcBef>
                 <a:spcPts val="0"/>
               </a:spcBef>
@@ -8846,7 +9047,7 @@
               <a:buChar char="■"/>
               <a:defRPr sz="1000"/>
             </a:lvl3pPr>
-            <a:lvl4pPr indent="-292100" lvl="3" marL="1828800">
+            <a:lvl4pPr marL="1828800" lvl="3" indent="-292100">
               <a:spcBef>
                 <a:spcPts val="0"/>
               </a:spcBef>
@@ -8861,7 +9062,7 @@
               <a:buChar char="●"/>
               <a:defRPr sz="1000"/>
             </a:lvl4pPr>
-            <a:lvl5pPr indent="-292100" lvl="4" marL="2286000">
+            <a:lvl5pPr marL="2286000" lvl="4" indent="-292100">
               <a:spcBef>
                 <a:spcPts val="0"/>
               </a:spcBef>
@@ -8876,7 +9077,7 @@
               <a:buChar char="○"/>
               <a:defRPr sz="1000"/>
             </a:lvl5pPr>
-            <a:lvl6pPr indent="-292100" lvl="5" marL="2743200">
+            <a:lvl6pPr marL="2743200" lvl="5" indent="-292100">
               <a:spcBef>
                 <a:spcPts val="0"/>
               </a:spcBef>
@@ -8891,7 +9092,7 @@
               <a:buChar char="■"/>
               <a:defRPr sz="1000"/>
             </a:lvl6pPr>
-            <a:lvl7pPr indent="-292100" lvl="6" marL="3200400">
+            <a:lvl7pPr marL="3200400" lvl="6" indent="-292100">
               <a:spcBef>
                 <a:spcPts val="0"/>
               </a:spcBef>
@@ -8906,7 +9107,7 @@
               <a:buChar char="●"/>
               <a:defRPr sz="1000"/>
             </a:lvl7pPr>
-            <a:lvl8pPr indent="-292100" lvl="7" marL="3657600">
+            <a:lvl8pPr marL="3657600" lvl="7" indent="-292100">
               <a:spcBef>
                 <a:spcPts val="0"/>
               </a:spcBef>
@@ -8921,7 +9122,7 @@
               <a:buChar char="○"/>
               <a:defRPr sz="1000"/>
             </a:lvl8pPr>
-            <a:lvl9pPr indent="-292100" lvl="8" marL="4114800">
+            <a:lvl9pPr marL="4114800" lvl="8" indent="-292100">
               <a:spcBef>
                 <a:spcPts val="0"/>
               </a:spcBef>
@@ -8937,7 +9138,9 @@
               <a:defRPr sz="1000"/>
             </a:lvl9pPr>
           </a:lstStyle>
-          <a:p/>
+          <a:p>
+            <a:endParaRPr/>
+          </a:p>
         </p:txBody>
       </p:sp>
       <p:cxnSp>
@@ -8955,14 +9158,14 @@
             <a:avLst/>
           </a:prstGeom>
           <a:noFill/>
-          <a:ln cap="flat" cmpd="sng" w="9525">
+          <a:ln w="9525" cap="flat" cmpd="sng">
             <a:solidFill>
               <a:schemeClr val="accent1"/>
             </a:solidFill>
             <a:prstDash val="solid"/>
             <a:round/>
-            <a:headEnd len="med" w="med" type="none"/>
-            <a:tailEnd len="med" w="med" type="none"/>
+            <a:headEnd type="none" w="med" len="med"/>
+            <a:tailEnd type="none" w="med" len="med"/>
           </a:ln>
         </p:spPr>
       </p:cxnSp>
@@ -8988,12 +9191,12 @@
           </a:ln>
         </p:spPr>
         <p:txBody>
-          <a:bodyPr anchorCtr="0" anchor="ctr" bIns="91425" lIns="91425" spcFirstLastPara="1" rIns="91425" wrap="square" tIns="91425">
+          <a:bodyPr spcFirstLastPara="1" wrap="square" lIns="91425" tIns="91425" rIns="91425" bIns="91425" anchor="ctr" anchorCtr="0">
             <a:noAutofit/>
           </a:bodyPr>
           <a:lstStyle/>
           <a:p>
-            <a:pPr indent="0" lvl="0" marL="0" rtl="0" algn="ctr">
+            <a:pPr marL="0" lvl="0" indent="0" algn="ctr" rtl="0">
               <a:spcBef>
                 <a:spcPts val="0"/>
               </a:spcBef>
@@ -9002,9 +9205,6 @@
               </a:spcAft>
               <a:buNone/>
             </a:pPr>
-            <a:r>
-              <a:t/>
-            </a:r>
             <a:endParaRPr>
               <a:solidFill>
                 <a:schemeClr val="dk1"/>
@@ -9039,12 +9239,12 @@
           </a:ln>
         </p:spPr>
         <p:txBody>
-          <a:bodyPr anchorCtr="0" anchor="ctr" bIns="91425" lIns="91425" spcFirstLastPara="1" rIns="91425" wrap="square" tIns="91425">
+          <a:bodyPr spcFirstLastPara="1" wrap="square" lIns="91425" tIns="91425" rIns="91425" bIns="91425" anchor="ctr" anchorCtr="0">
             <a:noAutofit/>
           </a:bodyPr>
           <a:lstStyle/>
           <a:p>
-            <a:pPr indent="0" lvl="0" marL="0" rtl="0" algn="ctr">
+            <a:pPr marL="0" lvl="0" indent="0" algn="ctr" rtl="0">
               <a:spcBef>
                 <a:spcPts val="0"/>
               </a:spcBef>
@@ -9053,9 +9253,6 @@
               </a:spcAft>
               <a:buNone/>
             </a:pPr>
-            <a:r>
-              <a:t/>
-            </a:r>
             <a:endParaRPr>
               <a:solidFill>
                 <a:schemeClr val="dk1"/>
@@ -9075,7 +9272,7 @@
   </p:clrMapOvr>
   <p:extLst>
     <p:ext uri="{DCECCB84-F9BA-43D5-87BE-67443E8EF086}">
-      <p15:sldGuideLst>
+      <p15:sldGuideLst xmlns:p15="http://schemas.microsoft.com/office/powerpoint/2012/main">
         <p15:guide id="1" orient="horz" pos="2805">
           <p15:clr>
             <a:srgbClr val="E46962"/>
@@ -9088,18 +9285,19 @@
 </file>
 
 <file path=ppt/slideLayouts/slideLayout2.xml><?xml version="1.0" encoding="utf-8"?>
-<p:sldLayout xmlns:a="http://schemas.openxmlformats.org/drawingml/2006/main" xmlns:r="http://schemas.openxmlformats.org/officeDocument/2006/relationships" xmlns:mc="http://schemas.openxmlformats.org/markup-compatibility/2006" xmlns:mv="urn:schemas-microsoft-com:mac:vml" xmlns:p="http://schemas.openxmlformats.org/presentationml/2006/main" xmlns:c="http://schemas.openxmlformats.org/drawingml/2006/chart" xmlns:dgm="http://schemas.openxmlformats.org/drawingml/2006/diagram" xmlns:o="urn:schemas-microsoft-com:office:office" xmlns:v="urn:schemas-microsoft-com:vml" xmlns:pvml="urn:schemas-microsoft-com:office:powerpoint" xmlns:com="http://schemas.openxmlformats.org/drawingml/2006/compatibility" xmlns:p14="http://schemas.microsoft.com/office/powerpoint/2010/main" xmlns:p15="http://schemas.microsoft.com/office/powerpoint/2012/main" xmlns:ahyp="http://schemas.microsoft.com/office/drawing/2018/hyperlinkcolor" matchingName="Section header" type="secHead">
+<p:sldLayout xmlns:a="http://schemas.openxmlformats.org/drawingml/2006/main" xmlns:r="http://schemas.openxmlformats.org/officeDocument/2006/relationships" xmlns:p="http://schemas.openxmlformats.org/presentationml/2006/main" matchingName="Section header" type="secHead">
   <p:cSld name="SECTION_HEADER">
     <p:bg>
       <p:bgPr>
         <a:solidFill>
           <a:schemeClr val="accent3"/>
         </a:solidFill>
+        <a:effectLst/>
       </p:bgPr>
     </p:bg>
     <p:spTree>
       <p:nvGrpSpPr>
-        <p:cNvPr id="14" name="Shape 14"/>
+        <p:cNvPr id="1" name="Shape 14"/>
         <p:cNvGrpSpPr/>
         <p:nvPr/>
       </p:nvGrpSpPr>
@@ -9123,9 +9321,13 @@
             <a:ext cx="9144250" cy="4398100"/>
           </a:xfrm>
           <a:custGeom>
-            <a:rect b="b" l="l" r="r" t="t"/>
+            <a:avLst/>
+            <a:gdLst/>
+            <a:ahLst/>
+            <a:cxnLst/>
+            <a:rect l="l" t="t" r="r" b="b"/>
             <a:pathLst>
-              <a:path extrusionOk="0" h="175924" w="365770">
+              <a:path w="365770" h="175924" extrusionOk="0">
                 <a:moveTo>
                   <a:pt x="0" y="0"/>
                 </a:moveTo>
@@ -9162,9 +9364,13 @@
             <a:ext cx="9144250" cy="4398100"/>
           </a:xfrm>
           <a:custGeom>
-            <a:rect b="b" l="l" r="r" t="t"/>
+            <a:avLst/>
+            <a:gdLst/>
+            <a:ahLst/>
+            <a:cxnLst/>
+            <a:rect l="l" t="t" r="r" b="b"/>
             <a:pathLst>
-              <a:path extrusionOk="0" h="175924" w="365770">
+              <a:path w="365770" h="175924" extrusionOk="0">
                 <a:moveTo>
                   <a:pt x="0" y="0"/>
                 </a:moveTo>
@@ -9192,7 +9398,9 @@
       <p:sp>
         <p:nvSpPr>
           <p:cNvPr id="17" name="Google Shape;17;p3"/>
-          <p:cNvSpPr txBox="1"/>
+          <p:cNvSpPr txBox="1">
+            <a:spLocks noGrp="1"/>
+          </p:cNvSpPr>
           <p:nvPr>
             <p:ph type="title"/>
           </p:nvPr>
@@ -9207,7 +9415,7 @@
           </a:prstGeom>
         </p:spPr>
         <p:txBody>
-          <a:bodyPr anchorCtr="0" anchor="t" bIns="91425" lIns="91425" spcFirstLastPara="1" rIns="91425" wrap="square" tIns="91425">
+          <a:bodyPr spcFirstLastPara="1" wrap="square" lIns="91425" tIns="91425" rIns="91425" bIns="91425" anchor="t" anchorCtr="0">
             <a:normAutofit/>
           </a:bodyPr>
           <a:lstStyle>
@@ -9311,15 +9519,19 @@
               <a:defRPr sz="3600"/>
             </a:lvl9pPr>
           </a:lstStyle>
-          <a:p/>
+          <a:p>
+            <a:endParaRPr/>
+          </a:p>
         </p:txBody>
       </p:sp>
       <p:sp>
         <p:nvSpPr>
           <p:cNvPr id="18" name="Google Shape;18;p3"/>
-          <p:cNvSpPr txBox="1"/>
+          <p:cNvSpPr txBox="1">
+            <a:spLocks noGrp="1"/>
+          </p:cNvSpPr>
           <p:nvPr>
-            <p:ph idx="12" type="sldNum"/>
+            <p:ph type="sldNum" idx="12"/>
           </p:nvPr>
         </p:nvSpPr>
         <p:spPr>
@@ -9332,7 +9544,7 @@
           </a:prstGeom>
         </p:spPr>
         <p:txBody>
-          <a:bodyPr anchorCtr="0" anchor="ctr" bIns="91425" lIns="91425" spcFirstLastPara="1" rIns="91425" wrap="square" tIns="91425">
+          <a:bodyPr spcFirstLastPara="1" wrap="square" lIns="91425" tIns="91425" rIns="91425" bIns="91425" anchor="ctr" anchorCtr="0">
             <a:normAutofit/>
           </a:bodyPr>
           <a:lstStyle>
@@ -9410,7 +9622,7 @@
             </a:lvl9pPr>
           </a:lstStyle>
           <a:p>
-            <a:pPr indent="0" lvl="0" marL="0" rtl="0" algn="r">
+            <a:pPr marL="0" lvl="0" indent="0" algn="r" rtl="0">
               <a:spcBef>
                 <a:spcPts val="0"/>
               </a:spcBef>
@@ -9436,11 +9648,11 @@
 </file>
 
 <file path=ppt/slideLayouts/slideLayout3.xml><?xml version="1.0" encoding="utf-8"?>
-<p:sldLayout xmlns:a="http://schemas.openxmlformats.org/drawingml/2006/main" xmlns:r="http://schemas.openxmlformats.org/officeDocument/2006/relationships" xmlns:mc="http://schemas.openxmlformats.org/markup-compatibility/2006" xmlns:mv="urn:schemas-microsoft-com:mac:vml" xmlns:p="http://schemas.openxmlformats.org/presentationml/2006/main" xmlns:c="http://schemas.openxmlformats.org/drawingml/2006/chart" xmlns:dgm="http://schemas.openxmlformats.org/drawingml/2006/diagram" xmlns:o="urn:schemas-microsoft-com:office:office" xmlns:v="urn:schemas-microsoft-com:vml" xmlns:pvml="urn:schemas-microsoft-com:office:powerpoint" xmlns:com="http://schemas.openxmlformats.org/drawingml/2006/compatibility" xmlns:p14="http://schemas.microsoft.com/office/powerpoint/2010/main" xmlns:p15="http://schemas.microsoft.com/office/powerpoint/2012/main" xmlns:ahyp="http://schemas.microsoft.com/office/drawing/2018/hyperlinkcolor" matchingName="Title and body" type="tx">
+<p:sldLayout xmlns:a="http://schemas.openxmlformats.org/drawingml/2006/main" xmlns:r="http://schemas.openxmlformats.org/officeDocument/2006/relationships" xmlns:p="http://schemas.openxmlformats.org/presentationml/2006/main" matchingName="Title and body" type="tx">
   <p:cSld name="TITLE_AND_BODY">
     <p:spTree>
       <p:nvGrpSpPr>
-        <p:cNvPr id="19" name="Shape 19"/>
+        <p:cNvPr id="1" name="Shape 19"/>
         <p:cNvGrpSpPr/>
         <p:nvPr/>
       </p:nvGrpSpPr>
@@ -9474,12 +9686,12 @@
           </a:ln>
         </p:spPr>
         <p:txBody>
-          <a:bodyPr anchorCtr="0" anchor="ctr" bIns="91425" lIns="91425" spcFirstLastPara="1" rIns="91425" wrap="square" tIns="91425">
+          <a:bodyPr spcFirstLastPara="1" wrap="square" lIns="91425" tIns="91425" rIns="91425" bIns="91425" anchor="ctr" anchorCtr="0">
             <a:noAutofit/>
           </a:bodyPr>
           <a:lstStyle/>
           <a:p>
-            <a:pPr indent="0" lvl="0" marL="0" rtl="0" algn="l">
+            <a:pPr marL="0" lvl="0" indent="0" algn="l" rtl="0">
               <a:spcBef>
                 <a:spcPts val="0"/>
               </a:spcBef>
@@ -9488,9 +9700,6 @@
               </a:spcAft>
               <a:buNone/>
             </a:pPr>
-            <a:r>
-              <a:t/>
-            </a:r>
             <a:endParaRPr/>
           </a:p>
         </p:txBody>
@@ -9507,9 +9716,13 @@
             <a:ext cx="4313625" cy="4399375"/>
           </a:xfrm>
           <a:custGeom>
-            <a:rect b="b" l="l" r="r" t="t"/>
+            <a:avLst/>
+            <a:gdLst/>
+            <a:ahLst/>
+            <a:cxnLst/>
+            <a:rect l="l" t="t" r="r" b="b"/>
             <a:pathLst>
-              <a:path extrusionOk="0" h="175975" w="172545">
+              <a:path w="172545" h="175975" extrusionOk="0">
                 <a:moveTo>
                   <a:pt x="0" y="157"/>
                 </a:moveTo>
@@ -9546,9 +9759,13 @@
             <a:ext cx="4316900" cy="4395600"/>
           </a:xfrm>
           <a:custGeom>
-            <a:rect b="b" l="l" r="r" t="t"/>
+            <a:avLst/>
+            <a:gdLst/>
+            <a:ahLst/>
+            <a:cxnLst/>
+            <a:rect l="l" t="t" r="r" b="b"/>
             <a:pathLst>
-              <a:path extrusionOk="0" h="175824" w="172676">
+              <a:path w="172676" h="175824" extrusionOk="0">
                 <a:moveTo>
                   <a:pt x="0" y="6"/>
                 </a:moveTo>
@@ -9576,7 +9793,9 @@
       <p:sp>
         <p:nvSpPr>
           <p:cNvPr id="23" name="Google Shape;23;p4"/>
-          <p:cNvSpPr txBox="1"/>
+          <p:cNvSpPr txBox="1">
+            <a:spLocks noGrp="1"/>
+          </p:cNvSpPr>
           <p:nvPr>
             <p:ph type="title"/>
           </p:nvPr>
@@ -9591,7 +9810,7 @@
           </a:prstGeom>
         </p:spPr>
         <p:txBody>
-          <a:bodyPr anchorCtr="0" anchor="t" bIns="91425" lIns="91425" spcFirstLastPara="1" rIns="91425" wrap="square" tIns="91425">
+          <a:bodyPr spcFirstLastPara="1" wrap="square" lIns="91425" tIns="91425" rIns="91425" bIns="91425" anchor="t" anchorCtr="0">
             <a:normAutofit/>
           </a:bodyPr>
           <a:lstStyle>
@@ -9758,15 +9977,19 @@
               </a:defRPr>
             </a:lvl9pPr>
           </a:lstStyle>
-          <a:p/>
+          <a:p>
+            <a:endParaRPr/>
+          </a:p>
         </p:txBody>
       </p:sp>
       <p:sp>
         <p:nvSpPr>
           <p:cNvPr id="24" name="Google Shape;24;p4"/>
-          <p:cNvSpPr txBox="1"/>
+          <p:cNvSpPr txBox="1">
+            <a:spLocks noGrp="1"/>
+          </p:cNvSpPr>
           <p:nvPr>
-            <p:ph idx="1" type="body"/>
+            <p:ph type="body" idx="1"/>
           </p:nvPr>
         </p:nvSpPr>
         <p:spPr>
@@ -9779,11 +10002,11 @@
           </a:prstGeom>
         </p:spPr>
         <p:txBody>
-          <a:bodyPr anchorCtr="0" anchor="t" bIns="91425" lIns="91425" spcFirstLastPara="1" rIns="91425" wrap="square" tIns="91425">
+          <a:bodyPr spcFirstLastPara="1" wrap="square" lIns="91425" tIns="91425" rIns="91425" bIns="91425" anchor="t" anchorCtr="0">
             <a:normAutofit/>
           </a:bodyPr>
           <a:lstStyle>
-            <a:lvl1pPr indent="-311150" lvl="0" marL="457200">
+            <a:lvl1pPr marL="457200" lvl="0" indent="-311150">
               <a:spcBef>
                 <a:spcPts val="0"/>
               </a:spcBef>
@@ -9794,7 +10017,7 @@
               <a:buChar char="●"/>
               <a:defRPr/>
             </a:lvl1pPr>
-            <a:lvl2pPr indent="-298450" lvl="1" marL="914400">
+            <a:lvl2pPr marL="914400" lvl="1" indent="-298450">
               <a:spcBef>
                 <a:spcPts val="0"/>
               </a:spcBef>
@@ -9805,7 +10028,7 @@
               <a:buChar char="○"/>
               <a:defRPr/>
             </a:lvl2pPr>
-            <a:lvl3pPr indent="-298450" lvl="2" marL="1371600">
+            <a:lvl3pPr marL="1371600" lvl="2" indent="-298450">
               <a:spcBef>
                 <a:spcPts val="0"/>
               </a:spcBef>
@@ -9816,7 +10039,7 @@
               <a:buChar char="■"/>
               <a:defRPr/>
             </a:lvl3pPr>
-            <a:lvl4pPr indent="-298450" lvl="3" marL="1828800">
+            <a:lvl4pPr marL="1828800" lvl="3" indent="-298450">
               <a:spcBef>
                 <a:spcPts val="0"/>
               </a:spcBef>
@@ -9827,7 +10050,7 @@
               <a:buChar char="●"/>
               <a:defRPr/>
             </a:lvl4pPr>
-            <a:lvl5pPr indent="-298450" lvl="4" marL="2286000">
+            <a:lvl5pPr marL="2286000" lvl="4" indent="-298450">
               <a:spcBef>
                 <a:spcPts val="0"/>
               </a:spcBef>
@@ -9838,7 +10061,7 @@
               <a:buChar char="○"/>
               <a:defRPr/>
             </a:lvl5pPr>
-            <a:lvl6pPr indent="-298450" lvl="5" marL="2743200">
+            <a:lvl6pPr marL="2743200" lvl="5" indent="-298450">
               <a:spcBef>
                 <a:spcPts val="0"/>
               </a:spcBef>
@@ -9849,7 +10072,7 @@
               <a:buChar char="■"/>
               <a:defRPr/>
             </a:lvl6pPr>
-            <a:lvl7pPr indent="-298450" lvl="6" marL="3200400">
+            <a:lvl7pPr marL="3200400" lvl="6" indent="-298450">
               <a:spcBef>
                 <a:spcPts val="0"/>
               </a:spcBef>
@@ -9860,7 +10083,7 @@
               <a:buChar char="●"/>
               <a:defRPr/>
             </a:lvl7pPr>
-            <a:lvl8pPr indent="-298450" lvl="7" marL="3657600">
+            <a:lvl8pPr marL="3657600" lvl="7" indent="-298450">
               <a:spcBef>
                 <a:spcPts val="0"/>
               </a:spcBef>
@@ -9871,7 +10094,7 @@
               <a:buChar char="○"/>
               <a:defRPr/>
             </a:lvl8pPr>
-            <a:lvl9pPr indent="-298450" lvl="8" marL="4114800">
+            <a:lvl9pPr marL="4114800" lvl="8" indent="-298450">
               <a:spcBef>
                 <a:spcPts val="0"/>
               </a:spcBef>
@@ -9883,15 +10106,19 @@
               <a:defRPr/>
             </a:lvl9pPr>
           </a:lstStyle>
-          <a:p/>
+          <a:p>
+            <a:endParaRPr/>
+          </a:p>
         </p:txBody>
       </p:sp>
       <p:sp>
         <p:nvSpPr>
           <p:cNvPr id="25" name="Google Shape;25;p4"/>
-          <p:cNvSpPr txBox="1"/>
+          <p:cNvSpPr txBox="1">
+            <a:spLocks noGrp="1"/>
+          </p:cNvSpPr>
           <p:nvPr>
-            <p:ph idx="12" type="sldNum"/>
+            <p:ph type="sldNum" idx="12"/>
           </p:nvPr>
         </p:nvSpPr>
         <p:spPr>
@@ -9904,7 +10131,7 @@
           </a:prstGeom>
         </p:spPr>
         <p:txBody>
-          <a:bodyPr anchorCtr="0" anchor="ctr" bIns="91425" lIns="91425" spcFirstLastPara="1" rIns="91425" wrap="square" tIns="91425">
+          <a:bodyPr spcFirstLastPara="1" wrap="square" lIns="91425" tIns="91425" rIns="91425" bIns="91425" anchor="ctr" anchorCtr="0">
             <a:normAutofit/>
           </a:bodyPr>
           <a:lstStyle>
@@ -9946,7 +10173,7 @@
             </a:lvl9pPr>
           </a:lstStyle>
           <a:p>
-            <a:pPr indent="0" lvl="0" marL="0" rtl="0" algn="r">
+            <a:pPr marL="0" lvl="0" indent="0" algn="r" rtl="0">
               <a:spcBef>
                 <a:spcPts val="0"/>
               </a:spcBef>
@@ -9972,11 +10199,11 @@
 </file>
 
 <file path=ppt/slideLayouts/slideLayout4.xml><?xml version="1.0" encoding="utf-8"?>
-<p:sldLayout xmlns:a="http://schemas.openxmlformats.org/drawingml/2006/main" xmlns:r="http://schemas.openxmlformats.org/officeDocument/2006/relationships" xmlns:mc="http://schemas.openxmlformats.org/markup-compatibility/2006" xmlns:mv="urn:schemas-microsoft-com:mac:vml" xmlns:p="http://schemas.openxmlformats.org/presentationml/2006/main" xmlns:c="http://schemas.openxmlformats.org/drawingml/2006/chart" xmlns:dgm="http://schemas.openxmlformats.org/drawingml/2006/diagram" xmlns:o="urn:schemas-microsoft-com:office:office" xmlns:v="urn:schemas-microsoft-com:vml" xmlns:pvml="urn:schemas-microsoft-com:office:powerpoint" xmlns:com="http://schemas.openxmlformats.org/drawingml/2006/compatibility" xmlns:p14="http://schemas.microsoft.com/office/powerpoint/2010/main" xmlns:p15="http://schemas.microsoft.com/office/powerpoint/2012/main" xmlns:ahyp="http://schemas.microsoft.com/office/drawing/2018/hyperlinkcolor" matchingName="Title and two columns" type="twoColTx">
+<p:sldLayout xmlns:a="http://schemas.openxmlformats.org/drawingml/2006/main" xmlns:r="http://schemas.openxmlformats.org/officeDocument/2006/relationships" xmlns:p="http://schemas.openxmlformats.org/presentationml/2006/main" matchingName="Title and two columns" type="twoColTx">
   <p:cSld name="TITLE_AND_TWO_COLUMNS">
     <p:spTree>
       <p:nvGrpSpPr>
-        <p:cNvPr id="26" name="Shape 26"/>
+        <p:cNvPr id="1" name="Shape 26"/>
         <p:cNvGrpSpPr/>
         <p:nvPr/>
       </p:nvGrpSpPr>
@@ -10010,12 +10237,12 @@
           </a:ln>
         </p:spPr>
         <p:txBody>
-          <a:bodyPr anchorCtr="0" anchor="ctr" bIns="91425" lIns="91425" spcFirstLastPara="1" rIns="91425" wrap="square" tIns="91425">
+          <a:bodyPr spcFirstLastPara="1" wrap="square" lIns="91425" tIns="91425" rIns="91425" bIns="91425" anchor="ctr" anchorCtr="0">
             <a:noAutofit/>
           </a:bodyPr>
           <a:lstStyle/>
           <a:p>
-            <a:pPr indent="0" lvl="0" marL="0" rtl="0" algn="l">
+            <a:pPr marL="0" lvl="0" indent="0" algn="l" rtl="0">
               <a:spcBef>
                 <a:spcPts val="0"/>
               </a:spcBef>
@@ -10024,9 +10251,6 @@
               </a:spcAft>
               <a:buNone/>
             </a:pPr>
-            <a:r>
-              <a:t/>
-            </a:r>
             <a:endParaRPr/>
           </a:p>
         </p:txBody>
@@ -10034,7 +10258,9 @@
       <p:sp>
         <p:nvSpPr>
           <p:cNvPr id="28" name="Google Shape;28;p5"/>
-          <p:cNvSpPr txBox="1"/>
+          <p:cNvSpPr txBox="1">
+            <a:spLocks noGrp="1"/>
+          </p:cNvSpPr>
           <p:nvPr>
             <p:ph type="title"/>
           </p:nvPr>
@@ -10049,7 +10275,7 @@
           </a:prstGeom>
         </p:spPr>
         <p:txBody>
-          <a:bodyPr anchorCtr="0" anchor="t" bIns="91425" lIns="91425" spcFirstLastPara="1" rIns="91425" wrap="square" tIns="91425">
+          <a:bodyPr spcFirstLastPara="1" wrap="square" lIns="91425" tIns="91425" rIns="91425" bIns="91425" anchor="t" anchorCtr="0">
             <a:normAutofit/>
           </a:bodyPr>
           <a:lstStyle>
@@ -10216,15 +10442,19 @@
               </a:defRPr>
             </a:lvl9pPr>
           </a:lstStyle>
-          <a:p/>
+          <a:p>
+            <a:endParaRPr/>
+          </a:p>
         </p:txBody>
       </p:sp>
       <p:sp>
         <p:nvSpPr>
           <p:cNvPr id="29" name="Google Shape;29;p5"/>
-          <p:cNvSpPr txBox="1"/>
+          <p:cNvSpPr txBox="1">
+            <a:spLocks noGrp="1"/>
+          </p:cNvSpPr>
           <p:nvPr>
-            <p:ph idx="1" type="body"/>
+            <p:ph type="body" idx="1"/>
           </p:nvPr>
         </p:nvSpPr>
         <p:spPr>
@@ -10237,11 +10467,11 @@
           </a:prstGeom>
         </p:spPr>
         <p:txBody>
-          <a:bodyPr anchorCtr="0" anchor="t" bIns="91425" lIns="91425" spcFirstLastPara="1" rIns="91425" wrap="square" tIns="91425">
+          <a:bodyPr spcFirstLastPara="1" wrap="square" lIns="91425" tIns="91425" rIns="91425" bIns="91425" anchor="t" anchorCtr="0">
             <a:normAutofit/>
           </a:bodyPr>
           <a:lstStyle>
-            <a:lvl1pPr indent="-311150" lvl="0" marL="457200">
+            <a:lvl1pPr marL="457200" lvl="0" indent="-311150">
               <a:spcBef>
                 <a:spcPts val="0"/>
               </a:spcBef>
@@ -10252,7 +10482,7 @@
               <a:buChar char="●"/>
               <a:defRPr/>
             </a:lvl1pPr>
-            <a:lvl2pPr indent="-298450" lvl="1" marL="914400">
+            <a:lvl2pPr marL="914400" lvl="1" indent="-298450">
               <a:spcBef>
                 <a:spcPts val="0"/>
               </a:spcBef>
@@ -10263,7 +10493,7 @@
               <a:buChar char="○"/>
               <a:defRPr/>
             </a:lvl2pPr>
-            <a:lvl3pPr indent="-298450" lvl="2" marL="1371600">
+            <a:lvl3pPr marL="1371600" lvl="2" indent="-298450">
               <a:spcBef>
                 <a:spcPts val="0"/>
               </a:spcBef>
@@ -10274,7 +10504,7 @@
               <a:buChar char="■"/>
               <a:defRPr/>
             </a:lvl3pPr>
-            <a:lvl4pPr indent="-298450" lvl="3" marL="1828800">
+            <a:lvl4pPr marL="1828800" lvl="3" indent="-298450">
               <a:spcBef>
                 <a:spcPts val="0"/>
               </a:spcBef>
@@ -10285,7 +10515,7 @@
               <a:buChar char="●"/>
               <a:defRPr/>
             </a:lvl4pPr>
-            <a:lvl5pPr indent="-298450" lvl="4" marL="2286000">
+            <a:lvl5pPr marL="2286000" lvl="4" indent="-298450">
               <a:spcBef>
                 <a:spcPts val="0"/>
               </a:spcBef>
@@ -10296,7 +10526,7 @@
               <a:buChar char="○"/>
               <a:defRPr/>
             </a:lvl5pPr>
-            <a:lvl6pPr indent="-298450" lvl="5" marL="2743200">
+            <a:lvl6pPr marL="2743200" lvl="5" indent="-298450">
               <a:spcBef>
                 <a:spcPts val="0"/>
               </a:spcBef>
@@ -10307,7 +10537,7 @@
               <a:buChar char="■"/>
               <a:defRPr/>
             </a:lvl6pPr>
-            <a:lvl7pPr indent="-298450" lvl="6" marL="3200400">
+            <a:lvl7pPr marL="3200400" lvl="6" indent="-298450">
               <a:spcBef>
                 <a:spcPts val="0"/>
               </a:spcBef>
@@ -10318,7 +10548,7 @@
               <a:buChar char="●"/>
               <a:defRPr/>
             </a:lvl7pPr>
-            <a:lvl8pPr indent="-298450" lvl="7" marL="3657600">
+            <a:lvl8pPr marL="3657600" lvl="7" indent="-298450">
               <a:spcBef>
                 <a:spcPts val="0"/>
               </a:spcBef>
@@ -10329,7 +10559,7 @@
               <a:buChar char="○"/>
               <a:defRPr/>
             </a:lvl8pPr>
-            <a:lvl9pPr indent="-298450" lvl="8" marL="4114800">
+            <a:lvl9pPr marL="4114800" lvl="8" indent="-298450">
               <a:spcBef>
                 <a:spcPts val="0"/>
               </a:spcBef>
@@ -10341,15 +10571,19 @@
               <a:defRPr/>
             </a:lvl9pPr>
           </a:lstStyle>
-          <a:p/>
+          <a:p>
+            <a:endParaRPr/>
+          </a:p>
         </p:txBody>
       </p:sp>
       <p:sp>
         <p:nvSpPr>
           <p:cNvPr id="30" name="Google Shape;30;p5"/>
-          <p:cNvSpPr txBox="1"/>
+          <p:cNvSpPr txBox="1">
+            <a:spLocks noGrp="1"/>
+          </p:cNvSpPr>
           <p:nvPr>
-            <p:ph idx="2" type="body"/>
+            <p:ph type="body" idx="2"/>
           </p:nvPr>
         </p:nvSpPr>
         <p:spPr>
@@ -10362,11 +10596,11 @@
           </a:prstGeom>
         </p:spPr>
         <p:txBody>
-          <a:bodyPr anchorCtr="0" anchor="t" bIns="91425" lIns="91425" spcFirstLastPara="1" rIns="91425" wrap="square" tIns="91425">
+          <a:bodyPr spcFirstLastPara="1" wrap="square" lIns="91425" tIns="91425" rIns="91425" bIns="91425" anchor="t" anchorCtr="0">
             <a:normAutofit/>
           </a:bodyPr>
           <a:lstStyle>
-            <a:lvl1pPr indent="-311150" lvl="0" marL="457200">
+            <a:lvl1pPr marL="457200" lvl="0" indent="-311150">
               <a:spcBef>
                 <a:spcPts val="0"/>
               </a:spcBef>
@@ -10377,7 +10611,7 @@
               <a:buChar char="●"/>
               <a:defRPr/>
             </a:lvl1pPr>
-            <a:lvl2pPr indent="-298450" lvl="1" marL="914400">
+            <a:lvl2pPr marL="914400" lvl="1" indent="-298450">
               <a:spcBef>
                 <a:spcPts val="0"/>
               </a:spcBef>
@@ -10388,7 +10622,7 @@
               <a:buChar char="○"/>
               <a:defRPr/>
             </a:lvl2pPr>
-            <a:lvl3pPr indent="-298450" lvl="2" marL="1371600">
+            <a:lvl3pPr marL="1371600" lvl="2" indent="-298450">
               <a:spcBef>
                 <a:spcPts val="0"/>
               </a:spcBef>
@@ -10399,7 +10633,7 @@
               <a:buChar char="■"/>
               <a:defRPr/>
             </a:lvl3pPr>
-            <a:lvl4pPr indent="-298450" lvl="3" marL="1828800">
+            <a:lvl4pPr marL="1828800" lvl="3" indent="-298450">
               <a:spcBef>
                 <a:spcPts val="0"/>
               </a:spcBef>
@@ -10410,7 +10644,7 @@
               <a:buChar char="●"/>
               <a:defRPr/>
             </a:lvl4pPr>
-            <a:lvl5pPr indent="-298450" lvl="4" marL="2286000">
+            <a:lvl5pPr marL="2286000" lvl="4" indent="-298450">
               <a:spcBef>
                 <a:spcPts val="0"/>
               </a:spcBef>
@@ -10421,7 +10655,7 @@
               <a:buChar char="○"/>
               <a:defRPr/>
             </a:lvl5pPr>
-            <a:lvl6pPr indent="-298450" lvl="5" marL="2743200">
+            <a:lvl6pPr marL="2743200" lvl="5" indent="-298450">
               <a:spcBef>
                 <a:spcPts val="0"/>
               </a:spcBef>
@@ -10432,7 +10666,7 @@
               <a:buChar char="■"/>
               <a:defRPr/>
             </a:lvl6pPr>
-            <a:lvl7pPr indent="-298450" lvl="6" marL="3200400">
+            <a:lvl7pPr marL="3200400" lvl="6" indent="-298450">
               <a:spcBef>
                 <a:spcPts val="0"/>
               </a:spcBef>
@@ -10443,7 +10677,7 @@
               <a:buChar char="●"/>
               <a:defRPr/>
             </a:lvl7pPr>
-            <a:lvl8pPr indent="-298450" lvl="7" marL="3657600">
+            <a:lvl8pPr marL="3657600" lvl="7" indent="-298450">
               <a:spcBef>
                 <a:spcPts val="0"/>
               </a:spcBef>
@@ -10454,7 +10688,7 @@
               <a:buChar char="○"/>
               <a:defRPr/>
             </a:lvl8pPr>
-            <a:lvl9pPr indent="-298450" lvl="8" marL="4114800">
+            <a:lvl9pPr marL="4114800" lvl="8" indent="-298450">
               <a:spcBef>
                 <a:spcPts val="0"/>
               </a:spcBef>
@@ -10466,15 +10700,19 @@
               <a:defRPr/>
             </a:lvl9pPr>
           </a:lstStyle>
-          <a:p/>
+          <a:p>
+            <a:endParaRPr/>
+          </a:p>
         </p:txBody>
       </p:sp>
       <p:sp>
         <p:nvSpPr>
           <p:cNvPr id="31" name="Google Shape;31;p5"/>
-          <p:cNvSpPr txBox="1"/>
+          <p:cNvSpPr txBox="1">
+            <a:spLocks noGrp="1"/>
+          </p:cNvSpPr>
           <p:nvPr>
-            <p:ph idx="12" type="sldNum"/>
+            <p:ph type="sldNum" idx="12"/>
           </p:nvPr>
         </p:nvSpPr>
         <p:spPr>
@@ -10487,7 +10725,7 @@
           </a:prstGeom>
         </p:spPr>
         <p:txBody>
-          <a:bodyPr anchorCtr="0" anchor="ctr" bIns="91425" lIns="91425" spcFirstLastPara="1" rIns="91425" wrap="square" tIns="91425">
+          <a:bodyPr spcFirstLastPara="1" wrap="square" lIns="91425" tIns="91425" rIns="91425" bIns="91425" anchor="ctr" anchorCtr="0">
             <a:normAutofit/>
           </a:bodyPr>
           <a:lstStyle>
@@ -10529,7 +10767,7 @@
             </a:lvl9pPr>
           </a:lstStyle>
           <a:p>
-            <a:pPr indent="0" lvl="0" marL="0" rtl="0" algn="r">
+            <a:pPr marL="0" lvl="0" indent="0" algn="r" rtl="0">
               <a:spcBef>
                 <a:spcPts val="0"/>
               </a:spcBef>
@@ -10555,11 +10793,11 @@
 </file>
 
 <file path=ppt/slideLayouts/slideLayout5.xml><?xml version="1.0" encoding="utf-8"?>
-<p:sldLayout xmlns:a="http://schemas.openxmlformats.org/drawingml/2006/main" xmlns:r="http://schemas.openxmlformats.org/officeDocument/2006/relationships" xmlns:mc="http://schemas.openxmlformats.org/markup-compatibility/2006" xmlns:mv="urn:schemas-microsoft-com:mac:vml" xmlns:p="http://schemas.openxmlformats.org/presentationml/2006/main" xmlns:c="http://schemas.openxmlformats.org/drawingml/2006/chart" xmlns:dgm="http://schemas.openxmlformats.org/drawingml/2006/diagram" xmlns:o="urn:schemas-microsoft-com:office:office" xmlns:v="urn:schemas-microsoft-com:vml" xmlns:pvml="urn:schemas-microsoft-com:office:powerpoint" xmlns:com="http://schemas.openxmlformats.org/drawingml/2006/compatibility" xmlns:p14="http://schemas.microsoft.com/office/powerpoint/2010/main" xmlns:p15="http://schemas.microsoft.com/office/powerpoint/2012/main" xmlns:ahyp="http://schemas.microsoft.com/office/drawing/2018/hyperlinkcolor" matchingName="Title only" type="titleOnly">
+<p:sldLayout xmlns:a="http://schemas.openxmlformats.org/drawingml/2006/main" xmlns:r="http://schemas.openxmlformats.org/officeDocument/2006/relationships" xmlns:p="http://schemas.openxmlformats.org/presentationml/2006/main" matchingName="Title only" type="titleOnly">
   <p:cSld name="TITLE_ONLY">
     <p:spTree>
       <p:nvGrpSpPr>
-        <p:cNvPr id="32" name="Shape 32"/>
+        <p:cNvPr id="1" name="Shape 32"/>
         <p:cNvGrpSpPr/>
         <p:nvPr/>
       </p:nvGrpSpPr>
@@ -10593,12 +10831,12 @@
           </a:ln>
         </p:spPr>
         <p:txBody>
-          <a:bodyPr anchorCtr="0" anchor="ctr" bIns="91425" lIns="91425" spcFirstLastPara="1" rIns="91425" wrap="square" tIns="91425">
+          <a:bodyPr spcFirstLastPara="1" wrap="square" lIns="91425" tIns="91425" rIns="91425" bIns="91425" anchor="ctr" anchorCtr="0">
             <a:noAutofit/>
           </a:bodyPr>
           <a:lstStyle/>
           <a:p>
-            <a:pPr indent="0" lvl="0" marL="0" rtl="0" algn="l">
+            <a:pPr marL="0" lvl="0" indent="0" algn="l" rtl="0">
               <a:spcBef>
                 <a:spcPts val="0"/>
               </a:spcBef>
@@ -10607,9 +10845,6 @@
               </a:spcAft>
               <a:buNone/>
             </a:pPr>
-            <a:r>
-              <a:t/>
-            </a:r>
             <a:endParaRPr/>
           </a:p>
         </p:txBody>
@@ -10617,7 +10852,9 @@
       <p:sp>
         <p:nvSpPr>
           <p:cNvPr id="34" name="Google Shape;34;p6"/>
-          <p:cNvSpPr txBox="1"/>
+          <p:cNvSpPr txBox="1">
+            <a:spLocks noGrp="1"/>
+          </p:cNvSpPr>
           <p:nvPr>
             <p:ph type="title"/>
           </p:nvPr>
@@ -10632,7 +10869,7 @@
           </a:prstGeom>
         </p:spPr>
         <p:txBody>
-          <a:bodyPr anchorCtr="0" anchor="t" bIns="91425" lIns="91425" spcFirstLastPara="1" rIns="91425" wrap="square" tIns="91425">
+          <a:bodyPr spcFirstLastPara="1" wrap="square" lIns="91425" tIns="91425" rIns="91425" bIns="91425" anchor="t" anchorCtr="0">
             <a:normAutofit/>
           </a:bodyPr>
           <a:lstStyle>
@@ -10799,15 +11036,19 @@
               </a:defRPr>
             </a:lvl9pPr>
           </a:lstStyle>
-          <a:p/>
+          <a:p>
+            <a:endParaRPr/>
+          </a:p>
         </p:txBody>
       </p:sp>
       <p:sp>
         <p:nvSpPr>
           <p:cNvPr id="35" name="Google Shape;35;p6"/>
-          <p:cNvSpPr txBox="1"/>
+          <p:cNvSpPr txBox="1">
+            <a:spLocks noGrp="1"/>
+          </p:cNvSpPr>
           <p:nvPr>
-            <p:ph idx="12" type="sldNum"/>
+            <p:ph type="sldNum" idx="12"/>
           </p:nvPr>
         </p:nvSpPr>
         <p:spPr>
@@ -10820,7 +11061,7 @@
           </a:prstGeom>
         </p:spPr>
         <p:txBody>
-          <a:bodyPr anchorCtr="0" anchor="ctr" bIns="91425" lIns="91425" spcFirstLastPara="1" rIns="91425" wrap="square" tIns="91425">
+          <a:bodyPr spcFirstLastPara="1" wrap="square" lIns="91425" tIns="91425" rIns="91425" bIns="91425" anchor="ctr" anchorCtr="0">
             <a:normAutofit/>
           </a:bodyPr>
           <a:lstStyle>
@@ -10862,7 +11103,7 @@
             </a:lvl9pPr>
           </a:lstStyle>
           <a:p>
-            <a:pPr indent="0" lvl="0" marL="0" rtl="0" algn="r">
+            <a:pPr marL="0" lvl="0" indent="0" algn="r" rtl="0">
               <a:spcBef>
                 <a:spcPts val="0"/>
               </a:spcBef>
@@ -10888,11 +11129,11 @@
 </file>
 
 <file path=ppt/slideLayouts/slideLayout6.xml><?xml version="1.0" encoding="utf-8"?>
-<p:sldLayout xmlns:a="http://schemas.openxmlformats.org/drawingml/2006/main" xmlns:r="http://schemas.openxmlformats.org/officeDocument/2006/relationships" xmlns:mc="http://schemas.openxmlformats.org/markup-compatibility/2006" xmlns:mv="urn:schemas-microsoft-com:mac:vml" xmlns:p="http://schemas.openxmlformats.org/presentationml/2006/main" xmlns:c="http://schemas.openxmlformats.org/drawingml/2006/chart" xmlns:dgm="http://schemas.openxmlformats.org/drawingml/2006/diagram" xmlns:o="urn:schemas-microsoft-com:office:office" xmlns:v="urn:schemas-microsoft-com:vml" xmlns:pvml="urn:schemas-microsoft-com:office:powerpoint" xmlns:com="http://schemas.openxmlformats.org/drawingml/2006/compatibility" xmlns:p14="http://schemas.microsoft.com/office/powerpoint/2010/main" xmlns:p15="http://schemas.microsoft.com/office/powerpoint/2012/main" xmlns:ahyp="http://schemas.microsoft.com/office/drawing/2018/hyperlinkcolor" matchingName="One column text">
+<p:sldLayout xmlns:a="http://schemas.openxmlformats.org/drawingml/2006/main" xmlns:r="http://schemas.openxmlformats.org/officeDocument/2006/relationships" xmlns:p="http://schemas.openxmlformats.org/presentationml/2006/main" matchingName="One column text">
   <p:cSld name="ONE_COLUMN_TEXT">
     <p:spTree>
       <p:nvGrpSpPr>
-        <p:cNvPr id="36" name="Shape 36"/>
+        <p:cNvPr id="1" name="Shape 36"/>
         <p:cNvGrpSpPr/>
         <p:nvPr/>
       </p:nvGrpSpPr>
@@ -10926,12 +11167,12 @@
           </a:ln>
         </p:spPr>
         <p:txBody>
-          <a:bodyPr anchorCtr="0" anchor="ctr" bIns="91425" lIns="91425" spcFirstLastPara="1" rIns="91425" wrap="square" tIns="91425">
+          <a:bodyPr spcFirstLastPara="1" wrap="square" lIns="91425" tIns="91425" rIns="91425" bIns="91425" anchor="ctr" anchorCtr="0">
             <a:noAutofit/>
           </a:bodyPr>
           <a:lstStyle/>
           <a:p>
-            <a:pPr indent="0" lvl="0" marL="0" rtl="0" algn="l">
+            <a:pPr marL="0" lvl="0" indent="0" algn="l" rtl="0">
               <a:spcBef>
                 <a:spcPts val="0"/>
               </a:spcBef>
@@ -10940,9 +11181,6 @@
               </a:spcAft>
               <a:buNone/>
             </a:pPr>
-            <a:r>
-              <a:t/>
-            </a:r>
             <a:endParaRPr/>
           </a:p>
         </p:txBody>
@@ -10950,7 +11188,9 @@
       <p:sp>
         <p:nvSpPr>
           <p:cNvPr id="38" name="Google Shape;38;p7"/>
-          <p:cNvSpPr txBox="1"/>
+          <p:cNvSpPr txBox="1">
+            <a:spLocks noGrp="1"/>
+          </p:cNvSpPr>
           <p:nvPr>
             <p:ph type="title"/>
           </p:nvPr>
@@ -10965,7 +11205,7 @@
           </a:prstGeom>
         </p:spPr>
         <p:txBody>
-          <a:bodyPr anchorCtr="0" anchor="t" bIns="91425" lIns="91425" spcFirstLastPara="1" rIns="91425" wrap="square" tIns="91425">
+          <a:bodyPr spcFirstLastPara="1" wrap="square" lIns="91425" tIns="91425" rIns="91425" bIns="91425" anchor="t" anchorCtr="0">
             <a:normAutofit/>
           </a:bodyPr>
           <a:lstStyle>
@@ -11132,15 +11372,19 @@
               </a:defRPr>
             </a:lvl9pPr>
           </a:lstStyle>
-          <a:p/>
+          <a:p>
+            <a:endParaRPr/>
+          </a:p>
         </p:txBody>
       </p:sp>
       <p:sp>
         <p:nvSpPr>
           <p:cNvPr id="39" name="Google Shape;39;p7"/>
-          <p:cNvSpPr txBox="1"/>
+          <p:cNvSpPr txBox="1">
+            <a:spLocks noGrp="1"/>
+          </p:cNvSpPr>
           <p:nvPr>
-            <p:ph idx="1" type="body"/>
+            <p:ph type="body" idx="1"/>
           </p:nvPr>
         </p:nvSpPr>
         <p:spPr>
@@ -11153,11 +11397,11 @@
           </a:prstGeom>
         </p:spPr>
         <p:txBody>
-          <a:bodyPr anchorCtr="0" anchor="t" bIns="91425" lIns="91425" spcFirstLastPara="1" rIns="91425" wrap="square" tIns="91425">
+          <a:bodyPr spcFirstLastPara="1" wrap="square" lIns="91425" tIns="91425" rIns="91425" bIns="91425" anchor="t" anchorCtr="0">
             <a:normAutofit/>
           </a:bodyPr>
           <a:lstStyle>
-            <a:lvl1pPr indent="-311150" lvl="0" marL="457200">
+            <a:lvl1pPr marL="457200" lvl="0" indent="-311150">
               <a:spcBef>
                 <a:spcPts val="0"/>
               </a:spcBef>
@@ -11175,7 +11419,7 @@
                 </a:solidFill>
               </a:defRPr>
             </a:lvl1pPr>
-            <a:lvl2pPr indent="-298450" lvl="1" marL="914400">
+            <a:lvl2pPr marL="914400" lvl="1" indent="-298450">
               <a:spcBef>
                 <a:spcPts val="0"/>
               </a:spcBef>
@@ -11193,7 +11437,7 @@
                 </a:solidFill>
               </a:defRPr>
             </a:lvl2pPr>
-            <a:lvl3pPr indent="-298450" lvl="2" marL="1371600">
+            <a:lvl3pPr marL="1371600" lvl="2" indent="-298450">
               <a:spcBef>
                 <a:spcPts val="0"/>
               </a:spcBef>
@@ -11211,7 +11455,7 @@
                 </a:solidFill>
               </a:defRPr>
             </a:lvl3pPr>
-            <a:lvl4pPr indent="-298450" lvl="3" marL="1828800">
+            <a:lvl4pPr marL="1828800" lvl="3" indent="-298450">
               <a:spcBef>
                 <a:spcPts val="0"/>
               </a:spcBef>
@@ -11229,7 +11473,7 @@
                 </a:solidFill>
               </a:defRPr>
             </a:lvl4pPr>
-            <a:lvl5pPr indent="-298450" lvl="4" marL="2286000">
+            <a:lvl5pPr marL="2286000" lvl="4" indent="-298450">
               <a:spcBef>
                 <a:spcPts val="0"/>
               </a:spcBef>
@@ -11247,7 +11491,7 @@
                 </a:solidFill>
               </a:defRPr>
             </a:lvl5pPr>
-            <a:lvl6pPr indent="-298450" lvl="5" marL="2743200">
+            <a:lvl6pPr marL="2743200" lvl="5" indent="-298450">
               <a:spcBef>
                 <a:spcPts val="0"/>
               </a:spcBef>
@@ -11265,7 +11509,7 @@
                 </a:solidFill>
               </a:defRPr>
             </a:lvl6pPr>
-            <a:lvl7pPr indent="-298450" lvl="6" marL="3200400">
+            <a:lvl7pPr marL="3200400" lvl="6" indent="-298450">
               <a:spcBef>
                 <a:spcPts val="0"/>
               </a:spcBef>
@@ -11283,7 +11527,7 @@
                 </a:solidFill>
               </a:defRPr>
             </a:lvl7pPr>
-            <a:lvl8pPr indent="-298450" lvl="7" marL="3657600">
+            <a:lvl8pPr marL="3657600" lvl="7" indent="-298450">
               <a:spcBef>
                 <a:spcPts val="0"/>
               </a:spcBef>
@@ -11301,7 +11545,7 @@
                 </a:solidFill>
               </a:defRPr>
             </a:lvl8pPr>
-            <a:lvl9pPr indent="-298450" lvl="8" marL="4114800">
+            <a:lvl9pPr marL="4114800" lvl="8" indent="-298450">
               <a:spcBef>
                 <a:spcPts val="0"/>
               </a:spcBef>
@@ -11320,15 +11564,19 @@
               </a:defRPr>
             </a:lvl9pPr>
           </a:lstStyle>
-          <a:p/>
+          <a:p>
+            <a:endParaRPr/>
+          </a:p>
         </p:txBody>
       </p:sp>
       <p:sp>
         <p:nvSpPr>
           <p:cNvPr id="40" name="Google Shape;40;p7"/>
-          <p:cNvSpPr txBox="1"/>
+          <p:cNvSpPr txBox="1">
+            <a:spLocks noGrp="1"/>
+          </p:cNvSpPr>
           <p:nvPr>
-            <p:ph idx="12" type="sldNum"/>
+            <p:ph type="sldNum" idx="12"/>
           </p:nvPr>
         </p:nvSpPr>
         <p:spPr>
@@ -11341,7 +11589,7 @@
           </a:prstGeom>
         </p:spPr>
         <p:txBody>
-          <a:bodyPr anchorCtr="0" anchor="ctr" bIns="91425" lIns="91425" spcFirstLastPara="1" rIns="91425" wrap="square" tIns="91425">
+          <a:bodyPr spcFirstLastPara="1" wrap="square" lIns="91425" tIns="91425" rIns="91425" bIns="91425" anchor="ctr" anchorCtr="0">
             <a:normAutofit/>
           </a:bodyPr>
           <a:lstStyle>
@@ -11383,7 +11631,7 @@
             </a:lvl9pPr>
           </a:lstStyle>
           <a:p>
-            <a:pPr indent="0" lvl="0" marL="0" rtl="0" algn="r">
+            <a:pPr marL="0" lvl="0" indent="0" algn="r" rtl="0">
               <a:spcBef>
                 <a:spcPts val="0"/>
               </a:spcBef>
@@ -11409,18 +11657,19 @@
 </file>
 
 <file path=ppt/slideLayouts/slideLayout7.xml><?xml version="1.0" encoding="utf-8"?>
-<p:sldLayout xmlns:a="http://schemas.openxmlformats.org/drawingml/2006/main" xmlns:r="http://schemas.openxmlformats.org/officeDocument/2006/relationships" xmlns:mc="http://schemas.openxmlformats.org/markup-compatibility/2006" xmlns:mv="urn:schemas-microsoft-com:mac:vml" xmlns:p="http://schemas.openxmlformats.org/presentationml/2006/main" xmlns:c="http://schemas.openxmlformats.org/drawingml/2006/chart" xmlns:dgm="http://schemas.openxmlformats.org/drawingml/2006/diagram" xmlns:o="urn:schemas-microsoft-com:office:office" xmlns:v="urn:schemas-microsoft-com:vml" xmlns:pvml="urn:schemas-microsoft-com:office:powerpoint" xmlns:com="http://schemas.openxmlformats.org/drawingml/2006/compatibility" xmlns:p14="http://schemas.microsoft.com/office/powerpoint/2010/main" xmlns:p15="http://schemas.microsoft.com/office/powerpoint/2012/main" xmlns:ahyp="http://schemas.microsoft.com/office/drawing/2018/hyperlinkcolor" matchingName="Main point">
+<p:sldLayout xmlns:a="http://schemas.openxmlformats.org/drawingml/2006/main" xmlns:r="http://schemas.openxmlformats.org/officeDocument/2006/relationships" xmlns:p="http://schemas.openxmlformats.org/presentationml/2006/main" matchingName="Main point">
   <p:cSld name="MAIN_POINT">
     <p:bg>
       <p:bgPr>
         <a:solidFill>
           <a:schemeClr val="accent3"/>
         </a:solidFill>
+        <a:effectLst/>
       </p:bgPr>
     </p:bg>
     <p:spTree>
       <p:nvGrpSpPr>
-        <p:cNvPr id="41" name="Shape 41"/>
+        <p:cNvPr id="1" name="Shape 41"/>
         <p:cNvGrpSpPr/>
         <p:nvPr/>
       </p:nvGrpSpPr>
@@ -11435,7 +11684,9 @@
       <p:sp>
         <p:nvSpPr>
           <p:cNvPr id="42" name="Google Shape;42;p8"/>
-          <p:cNvSpPr txBox="1"/>
+          <p:cNvSpPr txBox="1">
+            <a:spLocks noGrp="1"/>
+          </p:cNvSpPr>
           <p:nvPr>
             <p:ph type="title"/>
           </p:nvPr>
@@ -11450,7 +11701,7 @@
           </a:prstGeom>
         </p:spPr>
         <p:txBody>
-          <a:bodyPr anchorCtr="0" anchor="ctr" bIns="91425" lIns="91425" spcFirstLastPara="1" rIns="91425" wrap="square" tIns="91425">
+          <a:bodyPr spcFirstLastPara="1" wrap="square" lIns="91425" tIns="91425" rIns="91425" bIns="91425" anchor="ctr" anchorCtr="0">
             <a:normAutofit/>
           </a:bodyPr>
           <a:lstStyle>
@@ -11554,15 +11805,19 @@
               <a:defRPr sz="3600"/>
             </a:lvl9pPr>
           </a:lstStyle>
-          <a:p/>
+          <a:p>
+            <a:endParaRPr/>
+          </a:p>
         </p:txBody>
       </p:sp>
       <p:sp>
         <p:nvSpPr>
           <p:cNvPr id="43" name="Google Shape;43;p8"/>
-          <p:cNvSpPr txBox="1"/>
+          <p:cNvSpPr txBox="1">
+            <a:spLocks noGrp="1"/>
+          </p:cNvSpPr>
           <p:nvPr>
-            <p:ph idx="12" type="sldNum"/>
+            <p:ph type="sldNum" idx="12"/>
           </p:nvPr>
         </p:nvSpPr>
         <p:spPr>
@@ -11575,7 +11830,7 @@
           </a:prstGeom>
         </p:spPr>
         <p:txBody>
-          <a:bodyPr anchorCtr="0" anchor="ctr" bIns="91425" lIns="91425" spcFirstLastPara="1" rIns="91425" wrap="square" tIns="91425">
+          <a:bodyPr spcFirstLastPara="1" wrap="square" lIns="91425" tIns="91425" rIns="91425" bIns="91425" anchor="ctr" anchorCtr="0">
             <a:normAutofit/>
           </a:bodyPr>
           <a:lstStyle>
@@ -11653,7 +11908,7 @@
             </a:lvl9pPr>
           </a:lstStyle>
           <a:p>
-            <a:pPr indent="0" lvl="0" marL="0" rtl="0" algn="r">
+            <a:pPr marL="0" lvl="0" indent="0" algn="r" rtl="0">
               <a:spcBef>
                 <a:spcPts val="0"/>
               </a:spcBef>
@@ -11679,11 +11934,11 @@
 </file>
 
 <file path=ppt/slideLayouts/slideLayout8.xml><?xml version="1.0" encoding="utf-8"?>
-<p:sldLayout xmlns:a="http://schemas.openxmlformats.org/drawingml/2006/main" xmlns:r="http://schemas.openxmlformats.org/officeDocument/2006/relationships" xmlns:mc="http://schemas.openxmlformats.org/markup-compatibility/2006" xmlns:mv="urn:schemas-microsoft-com:mac:vml" xmlns:p="http://schemas.openxmlformats.org/presentationml/2006/main" xmlns:c="http://schemas.openxmlformats.org/drawingml/2006/chart" xmlns:dgm="http://schemas.openxmlformats.org/drawingml/2006/diagram" xmlns:o="urn:schemas-microsoft-com:office:office" xmlns:v="urn:schemas-microsoft-com:vml" xmlns:pvml="urn:schemas-microsoft-com:office:powerpoint" xmlns:com="http://schemas.openxmlformats.org/drawingml/2006/compatibility" xmlns:p14="http://schemas.microsoft.com/office/powerpoint/2010/main" xmlns:p15="http://schemas.microsoft.com/office/powerpoint/2012/main" xmlns:ahyp="http://schemas.microsoft.com/office/drawing/2018/hyperlinkcolor" matchingName="Section title and description">
+<p:sldLayout xmlns:a="http://schemas.openxmlformats.org/drawingml/2006/main" xmlns:r="http://schemas.openxmlformats.org/officeDocument/2006/relationships" xmlns:p="http://schemas.openxmlformats.org/presentationml/2006/main" matchingName="Section title and description">
   <p:cSld name="SECTION_TITLE_AND_DESCRIPTION">
     <p:spTree>
       <p:nvGrpSpPr>
-        <p:cNvPr id="44" name="Shape 44"/>
+        <p:cNvPr id="1" name="Shape 44"/>
         <p:cNvGrpSpPr/>
         <p:nvPr/>
       </p:nvGrpSpPr>
@@ -11717,12 +11972,12 @@
           </a:ln>
         </p:spPr>
         <p:txBody>
-          <a:bodyPr anchorCtr="0" anchor="ctr" bIns="91425" lIns="91425" spcFirstLastPara="1" rIns="91425" wrap="square" tIns="91425">
+          <a:bodyPr spcFirstLastPara="1" wrap="square" lIns="91425" tIns="91425" rIns="91425" bIns="91425" anchor="ctr" anchorCtr="0">
             <a:noAutofit/>
           </a:bodyPr>
           <a:lstStyle/>
           <a:p>
-            <a:pPr indent="0" lvl="0" marL="0" rtl="0" algn="l">
+            <a:pPr marL="0" lvl="0" indent="0" algn="l" rtl="0">
               <a:spcBef>
                 <a:spcPts val="0"/>
               </a:spcBef>
@@ -11731,9 +11986,6 @@
               </a:spcAft>
               <a:buNone/>
             </a:pPr>
-            <a:r>
-              <a:t/>
-            </a:r>
             <a:endParaRPr/>
           </a:p>
         </p:txBody>
@@ -11741,7 +11993,9 @@
       <p:sp>
         <p:nvSpPr>
           <p:cNvPr id="46" name="Google Shape;46;p9"/>
-          <p:cNvSpPr txBox="1"/>
+          <p:cNvSpPr txBox="1">
+            <a:spLocks noGrp="1"/>
+          </p:cNvSpPr>
           <p:nvPr>
             <p:ph type="title"/>
           </p:nvPr>
@@ -11756,7 +12010,7 @@
           </a:prstGeom>
         </p:spPr>
         <p:txBody>
-          <a:bodyPr anchorCtr="0" anchor="t" bIns="91425" lIns="91425" spcFirstLastPara="1" rIns="91425" wrap="square" tIns="91425">
+          <a:bodyPr spcFirstLastPara="1" wrap="square" lIns="91425" tIns="91425" rIns="91425" bIns="91425" anchor="t" anchorCtr="0">
             <a:normAutofit/>
           </a:bodyPr>
           <a:lstStyle>
@@ -11923,15 +12177,19 @@
               </a:defRPr>
             </a:lvl9pPr>
           </a:lstStyle>
-          <a:p/>
+          <a:p>
+            <a:endParaRPr/>
+          </a:p>
         </p:txBody>
       </p:sp>
       <p:sp>
         <p:nvSpPr>
           <p:cNvPr id="47" name="Google Shape;47;p9"/>
-          <p:cNvSpPr txBox="1"/>
+          <p:cNvSpPr txBox="1">
+            <a:spLocks noGrp="1"/>
+          </p:cNvSpPr>
           <p:nvPr>
-            <p:ph idx="1" type="subTitle"/>
+            <p:ph type="subTitle" idx="1"/>
           </p:nvPr>
         </p:nvSpPr>
         <p:spPr>
@@ -11944,7 +12202,7 @@
           </a:prstGeom>
         </p:spPr>
         <p:txBody>
-          <a:bodyPr anchorCtr="0" anchor="t" bIns="91425" lIns="91425" spcFirstLastPara="1" rIns="91425" wrap="square" tIns="91425">
+          <a:bodyPr spcFirstLastPara="1" wrap="square" lIns="91425" tIns="91425" rIns="91425" bIns="91425" anchor="t" anchorCtr="0">
             <a:normAutofit/>
           </a:bodyPr>
           <a:lstStyle>
@@ -12138,15 +12396,19 @@
               </a:defRPr>
             </a:lvl9pPr>
           </a:lstStyle>
-          <a:p/>
+          <a:p>
+            <a:endParaRPr/>
+          </a:p>
         </p:txBody>
       </p:sp>
       <p:sp>
         <p:nvSpPr>
           <p:cNvPr id="48" name="Google Shape;48;p9"/>
-          <p:cNvSpPr txBox="1"/>
+          <p:cNvSpPr txBox="1">
+            <a:spLocks noGrp="1"/>
+          </p:cNvSpPr>
           <p:nvPr>
-            <p:ph idx="2" type="body"/>
+            <p:ph type="body" idx="2"/>
           </p:nvPr>
         </p:nvSpPr>
         <p:spPr>
@@ -12159,11 +12421,11 @@
           </a:prstGeom>
         </p:spPr>
         <p:txBody>
-          <a:bodyPr anchorCtr="0" anchor="t" bIns="91425" lIns="91425" spcFirstLastPara="1" rIns="91425" wrap="square" tIns="91425">
+          <a:bodyPr spcFirstLastPara="1" wrap="square" lIns="91425" tIns="91425" rIns="91425" bIns="91425" anchor="t" anchorCtr="0">
             <a:normAutofit/>
           </a:bodyPr>
           <a:lstStyle>
-            <a:lvl1pPr indent="-311150" lvl="0" marL="457200">
+            <a:lvl1pPr marL="457200" lvl="0" indent="-311150">
               <a:spcBef>
                 <a:spcPts val="0"/>
               </a:spcBef>
@@ -12174,7 +12436,7 @@
               <a:buChar char="●"/>
               <a:defRPr/>
             </a:lvl1pPr>
-            <a:lvl2pPr indent="-298450" lvl="1" marL="914400">
+            <a:lvl2pPr marL="914400" lvl="1" indent="-298450">
               <a:spcBef>
                 <a:spcPts val="0"/>
               </a:spcBef>
@@ -12185,7 +12447,7 @@
               <a:buChar char="○"/>
               <a:defRPr/>
             </a:lvl2pPr>
-            <a:lvl3pPr indent="-298450" lvl="2" marL="1371600">
+            <a:lvl3pPr marL="1371600" lvl="2" indent="-298450">
               <a:spcBef>
                 <a:spcPts val="0"/>
               </a:spcBef>
@@ -12196,7 +12458,7 @@
               <a:buChar char="■"/>
               <a:defRPr/>
             </a:lvl3pPr>
-            <a:lvl4pPr indent="-298450" lvl="3" marL="1828800">
+            <a:lvl4pPr marL="1828800" lvl="3" indent="-298450">
               <a:spcBef>
                 <a:spcPts val="0"/>
               </a:spcBef>
@@ -12207,7 +12469,7 @@
               <a:buChar char="●"/>
               <a:defRPr/>
             </a:lvl4pPr>
-            <a:lvl5pPr indent="-298450" lvl="4" marL="2286000">
+            <a:lvl5pPr marL="2286000" lvl="4" indent="-298450">
               <a:spcBef>
                 <a:spcPts val="0"/>
               </a:spcBef>
@@ -12218,7 +12480,7 @@
               <a:buChar char="○"/>
               <a:defRPr/>
             </a:lvl5pPr>
-            <a:lvl6pPr indent="-298450" lvl="5" marL="2743200">
+            <a:lvl6pPr marL="2743200" lvl="5" indent="-298450">
               <a:spcBef>
                 <a:spcPts val="0"/>
               </a:spcBef>
@@ -12229,7 +12491,7 @@
               <a:buChar char="■"/>
               <a:defRPr/>
             </a:lvl6pPr>
-            <a:lvl7pPr indent="-298450" lvl="6" marL="3200400">
+            <a:lvl7pPr marL="3200400" lvl="6" indent="-298450">
               <a:spcBef>
                 <a:spcPts val="0"/>
               </a:spcBef>
@@ -12240,7 +12502,7 @@
               <a:buChar char="●"/>
               <a:defRPr/>
             </a:lvl7pPr>
-            <a:lvl8pPr indent="-298450" lvl="7" marL="3657600">
+            <a:lvl8pPr marL="3657600" lvl="7" indent="-298450">
               <a:spcBef>
                 <a:spcPts val="0"/>
               </a:spcBef>
@@ -12251,7 +12513,7 @@
               <a:buChar char="○"/>
               <a:defRPr/>
             </a:lvl8pPr>
-            <a:lvl9pPr indent="-298450" lvl="8" marL="4114800">
+            <a:lvl9pPr marL="4114800" lvl="8" indent="-298450">
               <a:spcBef>
                 <a:spcPts val="0"/>
               </a:spcBef>
@@ -12263,15 +12525,19 @@
               <a:defRPr/>
             </a:lvl9pPr>
           </a:lstStyle>
-          <a:p/>
+          <a:p>
+            <a:endParaRPr/>
+          </a:p>
         </p:txBody>
       </p:sp>
       <p:sp>
         <p:nvSpPr>
           <p:cNvPr id="49" name="Google Shape;49;p9"/>
-          <p:cNvSpPr txBox="1"/>
+          <p:cNvSpPr txBox="1">
+            <a:spLocks noGrp="1"/>
+          </p:cNvSpPr>
           <p:nvPr>
-            <p:ph idx="12" type="sldNum"/>
+            <p:ph type="sldNum" idx="12"/>
           </p:nvPr>
         </p:nvSpPr>
         <p:spPr>
@@ -12284,7 +12550,7 @@
           </a:prstGeom>
         </p:spPr>
         <p:txBody>
-          <a:bodyPr anchorCtr="0" anchor="ctr" bIns="91425" lIns="91425" spcFirstLastPara="1" rIns="91425" wrap="square" tIns="91425">
+          <a:bodyPr spcFirstLastPara="1" wrap="square" lIns="91425" tIns="91425" rIns="91425" bIns="91425" anchor="ctr" anchorCtr="0">
             <a:normAutofit/>
           </a:bodyPr>
           <a:lstStyle>
@@ -12326,7 +12592,7 @@
             </a:lvl9pPr>
           </a:lstStyle>
           <a:p>
-            <a:pPr indent="0" lvl="0" marL="0" rtl="0" algn="r">
+            <a:pPr marL="0" lvl="0" indent="0" algn="r" rtl="0">
               <a:spcBef>
                 <a:spcPts val="0"/>
               </a:spcBef>
@@ -12352,11 +12618,11 @@
 </file>
 
 <file path=ppt/slideLayouts/slideLayout9.xml><?xml version="1.0" encoding="utf-8"?>
-<p:sldLayout xmlns:a="http://schemas.openxmlformats.org/drawingml/2006/main" xmlns:r="http://schemas.openxmlformats.org/officeDocument/2006/relationships" xmlns:mc="http://schemas.openxmlformats.org/markup-compatibility/2006" xmlns:mv="urn:schemas-microsoft-com:mac:vml" xmlns:p="http://schemas.openxmlformats.org/presentationml/2006/main" xmlns:c="http://schemas.openxmlformats.org/drawingml/2006/chart" xmlns:dgm="http://schemas.openxmlformats.org/drawingml/2006/diagram" xmlns:o="urn:schemas-microsoft-com:office:office" xmlns:v="urn:schemas-microsoft-com:vml" xmlns:pvml="urn:schemas-microsoft-com:office:powerpoint" xmlns:com="http://schemas.openxmlformats.org/drawingml/2006/compatibility" xmlns:p14="http://schemas.microsoft.com/office/powerpoint/2010/main" xmlns:p15="http://schemas.microsoft.com/office/powerpoint/2012/main" xmlns:ahyp="http://schemas.microsoft.com/office/drawing/2018/hyperlinkcolor" matchingName="Caption">
+<p:sldLayout xmlns:a="http://schemas.openxmlformats.org/drawingml/2006/main" xmlns:r="http://schemas.openxmlformats.org/officeDocument/2006/relationships" xmlns:p="http://schemas.openxmlformats.org/presentationml/2006/main" matchingName="Caption">
   <p:cSld name="CAPTION_ONLY">
     <p:spTree>
       <p:nvGrpSpPr>
-        <p:cNvPr id="50" name="Shape 50"/>
+        <p:cNvPr id="1" name="Shape 50"/>
         <p:cNvGrpSpPr/>
         <p:nvPr/>
       </p:nvGrpSpPr>
@@ -12390,12 +12656,12 @@
           </a:ln>
         </p:spPr>
         <p:txBody>
-          <a:bodyPr anchorCtr="0" anchor="ctr" bIns="91425" lIns="91425" spcFirstLastPara="1" rIns="91425" wrap="square" tIns="91425">
+          <a:bodyPr spcFirstLastPara="1" wrap="square" lIns="91425" tIns="91425" rIns="91425" bIns="91425" anchor="ctr" anchorCtr="0">
             <a:noAutofit/>
           </a:bodyPr>
           <a:lstStyle/>
           <a:p>
-            <a:pPr indent="0" lvl="0" marL="0" rtl="0" algn="l">
+            <a:pPr marL="0" lvl="0" indent="0" algn="l" rtl="0">
               <a:spcBef>
                 <a:spcPts val="0"/>
               </a:spcBef>
@@ -12404,9 +12670,6 @@
               </a:spcAft>
               <a:buNone/>
             </a:pPr>
-            <a:r>
-              <a:t/>
-            </a:r>
             <a:endParaRPr/>
           </a:p>
         </p:txBody>
@@ -12414,9 +12677,11 @@
       <p:sp>
         <p:nvSpPr>
           <p:cNvPr id="52" name="Google Shape;52;p10"/>
-          <p:cNvSpPr txBox="1"/>
+          <p:cNvSpPr txBox="1">
+            <a:spLocks noGrp="1"/>
+          </p:cNvSpPr>
           <p:nvPr>
-            <p:ph idx="1" type="body"/>
+            <p:ph type="body" idx="1"/>
           </p:nvPr>
         </p:nvSpPr>
         <p:spPr>
@@ -12429,11 +12694,11 @@
           </a:prstGeom>
         </p:spPr>
         <p:txBody>
-          <a:bodyPr anchorCtr="0" anchor="ctr" bIns="91425" lIns="91425" spcFirstLastPara="1" rIns="91425" wrap="square" tIns="91425">
+          <a:bodyPr spcFirstLastPara="1" wrap="square" lIns="91425" tIns="91425" rIns="91425" bIns="91425" anchor="ctr" anchorCtr="0">
             <a:normAutofit/>
           </a:bodyPr>
           <a:lstStyle>
-            <a:lvl1pPr indent="-228600" lvl="0" marL="457200">
+            <a:lvl1pPr marL="457200" lvl="0" indent="-228600">
               <a:lnSpc>
                 <a:spcPct val="100000"/>
               </a:lnSpc>
@@ -12460,15 +12725,19 @@
               </a:defRPr>
             </a:lvl1pPr>
           </a:lstStyle>
-          <a:p/>
+          <a:p>
+            <a:endParaRPr/>
+          </a:p>
         </p:txBody>
       </p:sp>
       <p:sp>
         <p:nvSpPr>
           <p:cNvPr id="53" name="Google Shape;53;p10"/>
-          <p:cNvSpPr txBox="1"/>
+          <p:cNvSpPr txBox="1">
+            <a:spLocks noGrp="1"/>
+          </p:cNvSpPr>
           <p:nvPr>
-            <p:ph idx="12" type="sldNum"/>
+            <p:ph type="sldNum" idx="12"/>
           </p:nvPr>
         </p:nvSpPr>
         <p:spPr>
@@ -12481,7 +12750,7 @@
           </a:prstGeom>
         </p:spPr>
         <p:txBody>
-          <a:bodyPr anchorCtr="0" anchor="ctr" bIns="91425" lIns="91425" spcFirstLastPara="1" rIns="91425" wrap="square" tIns="91425">
+          <a:bodyPr spcFirstLastPara="1" wrap="square" lIns="91425" tIns="91425" rIns="91425" bIns="91425" anchor="ctr" anchorCtr="0">
             <a:normAutofit/>
           </a:bodyPr>
           <a:lstStyle>
@@ -12559,7 +12828,7 @@
             </a:lvl9pPr>
           </a:lstStyle>
           <a:p>
-            <a:pPr indent="0" lvl="0" marL="0" rtl="0" algn="r">
+            <a:pPr marL="0" lvl="0" indent="0" algn="r" rtl="0">
               <a:spcBef>
                 <a:spcPts val="0"/>
               </a:spcBef>
@@ -12585,18 +12854,19 @@
 </file>
 
 <file path=ppt/slideMasters/slideMaster1.xml><?xml version="1.0" encoding="utf-8"?>
-<p:sldMaster xmlns:a="http://schemas.openxmlformats.org/drawingml/2006/main" xmlns:r="http://schemas.openxmlformats.org/officeDocument/2006/relationships" xmlns:mc="http://schemas.openxmlformats.org/markup-compatibility/2006" xmlns:mv="urn:schemas-microsoft-com:mac:vml" xmlns:p="http://schemas.openxmlformats.org/presentationml/2006/main" xmlns:c="http://schemas.openxmlformats.org/drawingml/2006/chart" xmlns:dgm="http://schemas.openxmlformats.org/drawingml/2006/diagram" xmlns:o="urn:schemas-microsoft-com:office:office" xmlns:v="urn:schemas-microsoft-com:vml" xmlns:pvml="urn:schemas-microsoft-com:office:powerpoint" xmlns:com="http://schemas.openxmlformats.org/drawingml/2006/compatibility" xmlns:p14="http://schemas.microsoft.com/office/powerpoint/2010/main" xmlns:p15="http://schemas.microsoft.com/office/powerpoint/2012/main" xmlns:ahyp="http://schemas.microsoft.com/office/drawing/2018/hyperlinkcolor">
+<p:sldMaster xmlns:a="http://schemas.openxmlformats.org/drawingml/2006/main" xmlns:r="http://schemas.openxmlformats.org/officeDocument/2006/relationships" xmlns:p="http://schemas.openxmlformats.org/presentationml/2006/main">
   <p:cSld name="paradigm">
     <p:bg>
       <p:bgPr>
         <a:solidFill>
           <a:schemeClr val="lt1"/>
         </a:solidFill>
+        <a:effectLst/>
       </p:bgPr>
     </p:bg>
     <p:spTree>
       <p:nvGrpSpPr>
-        <p:cNvPr id="5" name="Shape 5"/>
+        <p:cNvPr id="1" name="Shape 5"/>
         <p:cNvGrpSpPr/>
         <p:nvPr/>
       </p:nvGrpSpPr>
@@ -12611,7 +12881,9 @@
       <p:sp>
         <p:nvSpPr>
           <p:cNvPr id="6" name="Google Shape;6;p1"/>
-          <p:cNvSpPr txBox="1"/>
+          <p:cNvSpPr txBox="1">
+            <a:spLocks noGrp="1"/>
+          </p:cNvSpPr>
           <p:nvPr>
             <p:ph type="title"/>
           </p:nvPr>
@@ -12630,7 +12902,7 @@
           </a:ln>
         </p:spPr>
         <p:txBody>
-          <a:bodyPr anchorCtr="0" anchor="t" bIns="91425" lIns="91425" spcFirstLastPara="1" rIns="91425" wrap="square" tIns="91425">
+          <a:bodyPr spcFirstLastPara="1" wrap="square" lIns="91425" tIns="91425" rIns="91425" bIns="91425" anchor="t" anchorCtr="0">
             <a:normAutofit/>
           </a:bodyPr>
           <a:lstStyle>
@@ -12842,15 +13114,19 @@
               </a:defRPr>
             </a:lvl9pPr>
           </a:lstStyle>
-          <a:p/>
+          <a:p>
+            <a:endParaRPr/>
+          </a:p>
         </p:txBody>
       </p:sp>
       <p:sp>
         <p:nvSpPr>
           <p:cNvPr id="7" name="Google Shape;7;p1"/>
-          <p:cNvSpPr txBox="1"/>
+          <p:cNvSpPr txBox="1">
+            <a:spLocks noGrp="1"/>
+          </p:cNvSpPr>
           <p:nvPr>
-            <p:ph idx="1" type="body"/>
+            <p:ph type="body" idx="1"/>
           </p:nvPr>
         </p:nvSpPr>
         <p:spPr>
@@ -12867,11 +13143,11 @@
           </a:ln>
         </p:spPr>
         <p:txBody>
-          <a:bodyPr anchorCtr="0" anchor="t" bIns="91425" lIns="91425" spcFirstLastPara="1" rIns="91425" wrap="square" tIns="91425">
+          <a:bodyPr spcFirstLastPara="1" wrap="square" lIns="91425" tIns="91425" rIns="91425" bIns="91425" anchor="t" anchorCtr="0">
             <a:normAutofit/>
           </a:bodyPr>
           <a:lstStyle>
-            <a:lvl1pPr indent="-311150" lvl="0" marL="457200">
+            <a:lvl1pPr marL="457200" lvl="0" indent="-311150">
               <a:lnSpc>
                 <a:spcPct val="115000"/>
               </a:lnSpc>
@@ -12897,7 +13173,7 @@
                 <a:sym typeface="Roboto"/>
               </a:defRPr>
             </a:lvl1pPr>
-            <a:lvl2pPr indent="-298450" lvl="1" marL="914400">
+            <a:lvl2pPr marL="914400" lvl="1" indent="-298450">
               <a:lnSpc>
                 <a:spcPct val="115000"/>
               </a:lnSpc>
@@ -12923,7 +13199,7 @@
                 <a:sym typeface="Roboto"/>
               </a:defRPr>
             </a:lvl2pPr>
-            <a:lvl3pPr indent="-298450" lvl="2" marL="1371600">
+            <a:lvl3pPr marL="1371600" lvl="2" indent="-298450">
               <a:lnSpc>
                 <a:spcPct val="115000"/>
               </a:lnSpc>
@@ -12949,7 +13225,7 @@
                 <a:sym typeface="Roboto"/>
               </a:defRPr>
             </a:lvl3pPr>
-            <a:lvl4pPr indent="-298450" lvl="3" marL="1828800">
+            <a:lvl4pPr marL="1828800" lvl="3" indent="-298450">
               <a:lnSpc>
                 <a:spcPct val="115000"/>
               </a:lnSpc>
@@ -12975,7 +13251,7 @@
                 <a:sym typeface="Roboto"/>
               </a:defRPr>
             </a:lvl4pPr>
-            <a:lvl5pPr indent="-298450" lvl="4" marL="2286000">
+            <a:lvl5pPr marL="2286000" lvl="4" indent="-298450">
               <a:lnSpc>
                 <a:spcPct val="115000"/>
               </a:lnSpc>
@@ -13001,7 +13277,7 @@
                 <a:sym typeface="Roboto"/>
               </a:defRPr>
             </a:lvl5pPr>
-            <a:lvl6pPr indent="-298450" lvl="5" marL="2743200">
+            <a:lvl6pPr marL="2743200" lvl="5" indent="-298450">
               <a:lnSpc>
                 <a:spcPct val="115000"/>
               </a:lnSpc>
@@ -13027,7 +13303,7 @@
                 <a:sym typeface="Roboto"/>
               </a:defRPr>
             </a:lvl6pPr>
-            <a:lvl7pPr indent="-298450" lvl="6" marL="3200400">
+            <a:lvl7pPr marL="3200400" lvl="6" indent="-298450">
               <a:lnSpc>
                 <a:spcPct val="115000"/>
               </a:lnSpc>
@@ -13053,7 +13329,7 @@
                 <a:sym typeface="Roboto"/>
               </a:defRPr>
             </a:lvl7pPr>
-            <a:lvl8pPr indent="-298450" lvl="7" marL="3657600">
+            <a:lvl8pPr marL="3657600" lvl="7" indent="-298450">
               <a:lnSpc>
                 <a:spcPct val="115000"/>
               </a:lnSpc>
@@ -13079,7 +13355,7 @@
                 <a:sym typeface="Roboto"/>
               </a:defRPr>
             </a:lvl8pPr>
-            <a:lvl9pPr indent="-298450" lvl="8" marL="4114800">
+            <a:lvl9pPr marL="4114800" lvl="8" indent="-298450">
               <a:lnSpc>
                 <a:spcPct val="115000"/>
               </a:lnSpc>
@@ -13106,15 +13382,19 @@
               </a:defRPr>
             </a:lvl9pPr>
           </a:lstStyle>
-          <a:p/>
+          <a:p>
+            <a:endParaRPr/>
+          </a:p>
         </p:txBody>
       </p:sp>
       <p:sp>
         <p:nvSpPr>
           <p:cNvPr id="8" name="Google Shape;8;p1"/>
-          <p:cNvSpPr txBox="1"/>
+          <p:cNvSpPr txBox="1">
+            <a:spLocks noGrp="1"/>
+          </p:cNvSpPr>
           <p:nvPr>
-            <p:ph idx="12" type="sldNum"/>
+            <p:ph type="sldNum" idx="12"/>
           </p:nvPr>
         </p:nvSpPr>
         <p:spPr>
@@ -13131,7 +13411,7 @@
           </a:ln>
         </p:spPr>
         <p:txBody>
-          <a:bodyPr anchorCtr="0" anchor="ctr" bIns="91425" lIns="91425" spcFirstLastPara="1" rIns="91425" wrap="square" tIns="91425">
+          <a:bodyPr spcFirstLastPara="1" wrap="square" lIns="91425" tIns="91425" rIns="91425" bIns="91425" anchor="ctr" anchorCtr="0">
             <a:normAutofit/>
           </a:bodyPr>
           <a:lstStyle>
@@ -13245,7 +13525,7 @@
             </a:lvl9pPr>
           </a:lstStyle>
           <a:p>
-            <a:pPr indent="0" lvl="0" marL="0" rtl="0" algn="r">
+            <a:pPr marL="0" lvl="0" indent="0" algn="r" rtl="0">
               <a:spcBef>
                 <a:spcPts val="0"/>
               </a:spcBef>
@@ -13264,7 +13544,7 @@
       </p:sp>
     </p:spTree>
   </p:cSld>
-  <p:clrMap accent1="accent1" accent2="accent2" accent3="accent3" accent4="accent4" accent5="accent5" accent6="accent6" bg1="lt1" bg2="dk2" tx1="dk1" tx2="lt2" folHlink="folHlink" hlink="hlink"/>
+  <p:clrMap bg1="lt1" tx1="dk1" bg2="dk2" tx2="lt2" accent1="accent1" accent2="accent2" accent3="accent3" accent4="accent4" accent5="accent5" accent6="accent6" hlink="hlink" folHlink="folHlink"/>
   <p:sldLayoutIdLst>
     <p:sldLayoutId id="2147483648" r:id="rId1"/>
     <p:sldLayoutId id="2147483649" r:id="rId2"/>
@@ -13280,10 +13560,10 @@
     <p:sldLayoutId id="2147483659" r:id="rId12"/>
     <p:sldLayoutId id="2147483660" r:id="rId13"/>
   </p:sldLayoutIdLst>
-  <p:hf dt="0" ftr="0" hdr="0" sldNum="0"/>
+  <p:hf sldNum="0" hdr="0" ftr="0" dt="0"/>
   <p:txStyles>
     <p:titleStyle>
-      <a:defPPr lvl="0" marR="0" rtl="0" algn="l">
+      <a:defPPr marR="0" lvl="0" algn="l" rtl="0">
         <a:lnSpc>
           <a:spcPct val="100000"/>
         </a:lnSpc>
@@ -13294,7 +13574,7 @@
           <a:spcPts val="0"/>
         </a:spcAft>
       </a:defPPr>
-      <a:lvl1pPr lvl="0" marR="0" rtl="0" algn="l">
+      <a:lvl1pPr marR="0" lvl="0" algn="l" rtl="0">
         <a:lnSpc>
           <a:spcPct val="100000"/>
         </a:lnSpc>
@@ -13308,7 +13588,7 @@
           <a:srgbClr val="000000"/>
         </a:buClr>
         <a:buFont typeface="Arial"/>
-        <a:defRPr b="0" i="0" sz="1400" u="none" cap="none" strike="noStrike">
+        <a:defRPr sz="1400" b="0" i="0" u="none" strike="noStrike" cap="none">
           <a:solidFill>
             <a:srgbClr val="000000"/>
           </a:solidFill>
@@ -13318,7 +13598,7 @@
           <a:sym typeface="Arial"/>
         </a:defRPr>
       </a:lvl1pPr>
-      <a:lvl2pPr lvl="1" marR="0" rtl="0" algn="l">
+      <a:lvl2pPr marR="0" lvl="1" algn="l" rtl="0">
         <a:lnSpc>
           <a:spcPct val="100000"/>
         </a:lnSpc>
@@ -13332,7 +13612,7 @@
           <a:srgbClr val="000000"/>
         </a:buClr>
         <a:buFont typeface="Arial"/>
-        <a:defRPr b="0" i="0" sz="1400" u="none" cap="none" strike="noStrike">
+        <a:defRPr sz="1400" b="0" i="0" u="none" strike="noStrike" cap="none">
           <a:solidFill>
             <a:srgbClr val="000000"/>
           </a:solidFill>
@@ -13342,7 +13622,7 @@
           <a:sym typeface="Arial"/>
         </a:defRPr>
       </a:lvl2pPr>
-      <a:lvl3pPr lvl="2" marR="0" rtl="0" algn="l">
+      <a:lvl3pPr marR="0" lvl="2" algn="l" rtl="0">
         <a:lnSpc>
           <a:spcPct val="100000"/>
         </a:lnSpc>
@@ -13356,7 +13636,7 @@
           <a:srgbClr val="000000"/>
         </a:buClr>
         <a:buFont typeface="Arial"/>
-        <a:defRPr b="0" i="0" sz="1400" u="none" cap="none" strike="noStrike">
+        <a:defRPr sz="1400" b="0" i="0" u="none" strike="noStrike" cap="none">
           <a:solidFill>
             <a:srgbClr val="000000"/>
           </a:solidFill>
@@ -13366,7 +13646,7 @@
           <a:sym typeface="Arial"/>
         </a:defRPr>
       </a:lvl3pPr>
-      <a:lvl4pPr lvl="3" marR="0" rtl="0" algn="l">
+      <a:lvl4pPr marR="0" lvl="3" algn="l" rtl="0">
         <a:lnSpc>
           <a:spcPct val="100000"/>
         </a:lnSpc>
@@ -13380,7 +13660,7 @@
           <a:srgbClr val="000000"/>
         </a:buClr>
         <a:buFont typeface="Arial"/>
-        <a:defRPr b="0" i="0" sz="1400" u="none" cap="none" strike="noStrike">
+        <a:defRPr sz="1400" b="0" i="0" u="none" strike="noStrike" cap="none">
           <a:solidFill>
             <a:srgbClr val="000000"/>
           </a:solidFill>
@@ -13390,7 +13670,7 @@
           <a:sym typeface="Arial"/>
         </a:defRPr>
       </a:lvl4pPr>
-      <a:lvl5pPr lvl="4" marR="0" rtl="0" algn="l">
+      <a:lvl5pPr marR="0" lvl="4" algn="l" rtl="0">
         <a:lnSpc>
           <a:spcPct val="100000"/>
         </a:lnSpc>
@@ -13404,7 +13684,7 @@
           <a:srgbClr val="000000"/>
         </a:buClr>
         <a:buFont typeface="Arial"/>
-        <a:defRPr b="0" i="0" sz="1400" u="none" cap="none" strike="noStrike">
+        <a:defRPr sz="1400" b="0" i="0" u="none" strike="noStrike" cap="none">
           <a:solidFill>
             <a:srgbClr val="000000"/>
           </a:solidFill>
@@ -13414,7 +13694,7 @@
           <a:sym typeface="Arial"/>
         </a:defRPr>
       </a:lvl5pPr>
-      <a:lvl6pPr lvl="5" marR="0" rtl="0" algn="l">
+      <a:lvl6pPr marR="0" lvl="5" algn="l" rtl="0">
         <a:lnSpc>
           <a:spcPct val="100000"/>
         </a:lnSpc>
@@ -13428,7 +13708,7 @@
           <a:srgbClr val="000000"/>
         </a:buClr>
         <a:buFont typeface="Arial"/>
-        <a:defRPr b="0" i="0" sz="1400" u="none" cap="none" strike="noStrike">
+        <a:defRPr sz="1400" b="0" i="0" u="none" strike="noStrike" cap="none">
           <a:solidFill>
             <a:srgbClr val="000000"/>
           </a:solidFill>
@@ -13438,7 +13718,7 @@
           <a:sym typeface="Arial"/>
         </a:defRPr>
       </a:lvl6pPr>
-      <a:lvl7pPr lvl="6" marR="0" rtl="0" algn="l">
+      <a:lvl7pPr marR="0" lvl="6" algn="l" rtl="0">
         <a:lnSpc>
           <a:spcPct val="100000"/>
         </a:lnSpc>
@@ -13452,7 +13732,7 @@
           <a:srgbClr val="000000"/>
         </a:buClr>
         <a:buFont typeface="Arial"/>
-        <a:defRPr b="0" i="0" sz="1400" u="none" cap="none" strike="noStrike">
+        <a:defRPr sz="1400" b="0" i="0" u="none" strike="noStrike" cap="none">
           <a:solidFill>
             <a:srgbClr val="000000"/>
           </a:solidFill>
@@ -13462,7 +13742,7 @@
           <a:sym typeface="Arial"/>
         </a:defRPr>
       </a:lvl7pPr>
-      <a:lvl8pPr lvl="7" marR="0" rtl="0" algn="l">
+      <a:lvl8pPr marR="0" lvl="7" algn="l" rtl="0">
         <a:lnSpc>
           <a:spcPct val="100000"/>
         </a:lnSpc>
@@ -13476,7 +13756,7 @@
           <a:srgbClr val="000000"/>
         </a:buClr>
         <a:buFont typeface="Arial"/>
-        <a:defRPr b="0" i="0" sz="1400" u="none" cap="none" strike="noStrike">
+        <a:defRPr sz="1400" b="0" i="0" u="none" strike="noStrike" cap="none">
           <a:solidFill>
             <a:srgbClr val="000000"/>
           </a:solidFill>
@@ -13486,7 +13766,7 @@
           <a:sym typeface="Arial"/>
         </a:defRPr>
       </a:lvl8pPr>
-      <a:lvl9pPr lvl="8" marR="0" rtl="0" algn="l">
+      <a:lvl9pPr marR="0" lvl="8" algn="l" rtl="0">
         <a:lnSpc>
           <a:spcPct val="100000"/>
         </a:lnSpc>
@@ -13500,7 +13780,7 @@
           <a:srgbClr val="000000"/>
         </a:buClr>
         <a:buFont typeface="Arial"/>
-        <a:defRPr b="0" i="0" sz="1400" u="none" cap="none" strike="noStrike">
+        <a:defRPr sz="1400" b="0" i="0" u="none" strike="noStrike" cap="none">
           <a:solidFill>
             <a:srgbClr val="000000"/>
           </a:solidFill>
@@ -13512,7 +13792,7 @@
       </a:lvl9pPr>
     </p:titleStyle>
     <p:bodyStyle>
-      <a:defPPr lvl="0" marR="0" rtl="0" algn="l">
+      <a:defPPr marR="0" lvl="0" algn="l" rtl="0">
         <a:lnSpc>
           <a:spcPct val="100000"/>
         </a:lnSpc>
@@ -13523,7 +13803,7 @@
           <a:spcPts val="0"/>
         </a:spcAft>
       </a:defPPr>
-      <a:lvl1pPr lvl="0" marR="0" rtl="0" algn="l">
+      <a:lvl1pPr marR="0" lvl="0" algn="l" rtl="0">
         <a:lnSpc>
           <a:spcPct val="100000"/>
         </a:lnSpc>
@@ -13537,7 +13817,7 @@
           <a:srgbClr val="000000"/>
         </a:buClr>
         <a:buFont typeface="Arial"/>
-        <a:defRPr b="0" i="0" sz="1400" u="none" cap="none" strike="noStrike">
+        <a:defRPr sz="1400" b="0" i="0" u="none" strike="noStrike" cap="none">
           <a:solidFill>
             <a:srgbClr val="000000"/>
           </a:solidFill>
@@ -13547,7 +13827,7 @@
           <a:sym typeface="Arial"/>
         </a:defRPr>
       </a:lvl1pPr>
-      <a:lvl2pPr lvl="1" marR="0" rtl="0" algn="l">
+      <a:lvl2pPr marR="0" lvl="1" algn="l" rtl="0">
         <a:lnSpc>
           <a:spcPct val="100000"/>
         </a:lnSpc>
@@ -13561,7 +13841,7 @@
           <a:srgbClr val="000000"/>
         </a:buClr>
         <a:buFont typeface="Arial"/>
-        <a:defRPr b="0" i="0" sz="1400" u="none" cap="none" strike="noStrike">
+        <a:defRPr sz="1400" b="0" i="0" u="none" strike="noStrike" cap="none">
           <a:solidFill>
             <a:srgbClr val="000000"/>
           </a:solidFill>
@@ -13571,7 +13851,7 @@
           <a:sym typeface="Arial"/>
         </a:defRPr>
       </a:lvl2pPr>
-      <a:lvl3pPr lvl="2" marR="0" rtl="0" algn="l">
+      <a:lvl3pPr marR="0" lvl="2" algn="l" rtl="0">
         <a:lnSpc>
           <a:spcPct val="100000"/>
         </a:lnSpc>
@@ -13585,7 +13865,7 @@
           <a:srgbClr val="000000"/>
         </a:buClr>
         <a:buFont typeface="Arial"/>
-        <a:defRPr b="0" i="0" sz="1400" u="none" cap="none" strike="noStrike">
+        <a:defRPr sz="1400" b="0" i="0" u="none" strike="noStrike" cap="none">
           <a:solidFill>
             <a:srgbClr val="000000"/>
           </a:solidFill>
@@ -13595,7 +13875,7 @@
           <a:sym typeface="Arial"/>
         </a:defRPr>
       </a:lvl3pPr>
-      <a:lvl4pPr lvl="3" marR="0" rtl="0" algn="l">
+      <a:lvl4pPr marR="0" lvl="3" algn="l" rtl="0">
         <a:lnSpc>
           <a:spcPct val="100000"/>
         </a:lnSpc>
@@ -13609,7 +13889,7 @@
           <a:srgbClr val="000000"/>
         </a:buClr>
         <a:buFont typeface="Arial"/>
-        <a:defRPr b="0" i="0" sz="1400" u="none" cap="none" strike="noStrike">
+        <a:defRPr sz="1400" b="0" i="0" u="none" strike="noStrike" cap="none">
           <a:solidFill>
             <a:srgbClr val="000000"/>
           </a:solidFill>
@@ -13619,7 +13899,7 @@
           <a:sym typeface="Arial"/>
         </a:defRPr>
       </a:lvl4pPr>
-      <a:lvl5pPr lvl="4" marR="0" rtl="0" algn="l">
+      <a:lvl5pPr marR="0" lvl="4" algn="l" rtl="0">
         <a:lnSpc>
           <a:spcPct val="100000"/>
         </a:lnSpc>
@@ -13633,7 +13913,7 @@
           <a:srgbClr val="000000"/>
         </a:buClr>
         <a:buFont typeface="Arial"/>
-        <a:defRPr b="0" i="0" sz="1400" u="none" cap="none" strike="noStrike">
+        <a:defRPr sz="1400" b="0" i="0" u="none" strike="noStrike" cap="none">
           <a:solidFill>
             <a:srgbClr val="000000"/>
           </a:solidFill>
@@ -13643,7 +13923,7 @@
           <a:sym typeface="Arial"/>
         </a:defRPr>
       </a:lvl5pPr>
-      <a:lvl6pPr lvl="5" marR="0" rtl="0" algn="l">
+      <a:lvl6pPr marR="0" lvl="5" algn="l" rtl="0">
         <a:lnSpc>
           <a:spcPct val="100000"/>
         </a:lnSpc>
@@ -13657,7 +13937,7 @@
           <a:srgbClr val="000000"/>
         </a:buClr>
         <a:buFont typeface="Arial"/>
-        <a:defRPr b="0" i="0" sz="1400" u="none" cap="none" strike="noStrike">
+        <a:defRPr sz="1400" b="0" i="0" u="none" strike="noStrike" cap="none">
           <a:solidFill>
             <a:srgbClr val="000000"/>
           </a:solidFill>
@@ -13667,7 +13947,7 @@
           <a:sym typeface="Arial"/>
         </a:defRPr>
       </a:lvl6pPr>
-      <a:lvl7pPr lvl="6" marR="0" rtl="0" algn="l">
+      <a:lvl7pPr marR="0" lvl="6" algn="l" rtl="0">
         <a:lnSpc>
           <a:spcPct val="100000"/>
         </a:lnSpc>
@@ -13681,7 +13961,7 @@
           <a:srgbClr val="000000"/>
         </a:buClr>
         <a:buFont typeface="Arial"/>
-        <a:defRPr b="0" i="0" sz="1400" u="none" cap="none" strike="noStrike">
+        <a:defRPr sz="1400" b="0" i="0" u="none" strike="noStrike" cap="none">
           <a:solidFill>
             <a:srgbClr val="000000"/>
           </a:solidFill>
@@ -13691,7 +13971,7 @@
           <a:sym typeface="Arial"/>
         </a:defRPr>
       </a:lvl7pPr>
-      <a:lvl8pPr lvl="7" marR="0" rtl="0" algn="l">
+      <a:lvl8pPr marR="0" lvl="7" algn="l" rtl="0">
         <a:lnSpc>
           <a:spcPct val="100000"/>
         </a:lnSpc>
@@ -13705,7 +13985,7 @@
           <a:srgbClr val="000000"/>
         </a:buClr>
         <a:buFont typeface="Arial"/>
-        <a:defRPr b="0" i="0" sz="1400" u="none" cap="none" strike="noStrike">
+        <a:defRPr sz="1400" b="0" i="0" u="none" strike="noStrike" cap="none">
           <a:solidFill>
             <a:srgbClr val="000000"/>
           </a:solidFill>
@@ -13715,7 +13995,7 @@
           <a:sym typeface="Arial"/>
         </a:defRPr>
       </a:lvl8pPr>
-      <a:lvl9pPr lvl="8" marR="0" rtl="0" algn="l">
+      <a:lvl9pPr marR="0" lvl="8" algn="l" rtl="0">
         <a:lnSpc>
           <a:spcPct val="100000"/>
         </a:lnSpc>
@@ -13729,7 +14009,7 @@
           <a:srgbClr val="000000"/>
         </a:buClr>
         <a:buFont typeface="Arial"/>
-        <a:defRPr b="0" i="0" sz="1400" u="none" cap="none" strike="noStrike">
+        <a:defRPr sz="1400" b="0" i="0" u="none" strike="noStrike" cap="none">
           <a:solidFill>
             <a:srgbClr val="000000"/>
           </a:solidFill>
@@ -13741,7 +14021,7 @@
       </a:lvl9pPr>
     </p:bodyStyle>
     <p:otherStyle>
-      <a:defPPr lvl="0" marR="0" rtl="0" algn="l">
+      <a:defPPr marR="0" lvl="0" algn="l" rtl="0">
         <a:lnSpc>
           <a:spcPct val="100000"/>
         </a:lnSpc>
@@ -13752,7 +14032,7 @@
           <a:spcPts val="0"/>
         </a:spcAft>
       </a:defPPr>
-      <a:lvl1pPr lvl="0" marR="0" rtl="0" algn="l">
+      <a:lvl1pPr marR="0" lvl="0" algn="l" rtl="0">
         <a:lnSpc>
           <a:spcPct val="100000"/>
         </a:lnSpc>
@@ -13766,7 +14046,7 @@
           <a:srgbClr val="000000"/>
         </a:buClr>
         <a:buFont typeface="Arial"/>
-        <a:defRPr b="0" i="0" sz="1400" u="none" cap="none" strike="noStrike">
+        <a:defRPr sz="1400" b="0" i="0" u="none" strike="noStrike" cap="none">
           <a:solidFill>
             <a:srgbClr val="000000"/>
           </a:solidFill>
@@ -13776,7 +14056,7 @@
           <a:sym typeface="Arial"/>
         </a:defRPr>
       </a:lvl1pPr>
-      <a:lvl2pPr lvl="1" marR="0" rtl="0" algn="l">
+      <a:lvl2pPr marR="0" lvl="1" algn="l" rtl="0">
         <a:lnSpc>
           <a:spcPct val="100000"/>
         </a:lnSpc>
@@ -13790,7 +14070,7 @@
           <a:srgbClr val="000000"/>
         </a:buClr>
         <a:buFont typeface="Arial"/>
-        <a:defRPr b="0" i="0" sz="1400" u="none" cap="none" strike="noStrike">
+        <a:defRPr sz="1400" b="0" i="0" u="none" strike="noStrike" cap="none">
           <a:solidFill>
             <a:srgbClr val="000000"/>
           </a:solidFill>
@@ -13800,7 +14080,7 @@
           <a:sym typeface="Arial"/>
         </a:defRPr>
       </a:lvl2pPr>
-      <a:lvl3pPr lvl="2" marR="0" rtl="0" algn="l">
+      <a:lvl3pPr marR="0" lvl="2" algn="l" rtl="0">
         <a:lnSpc>
           <a:spcPct val="100000"/>
         </a:lnSpc>
@@ -13814,7 +14094,7 @@
           <a:srgbClr val="000000"/>
         </a:buClr>
         <a:buFont typeface="Arial"/>
-        <a:defRPr b="0" i="0" sz="1400" u="none" cap="none" strike="noStrike">
+        <a:defRPr sz="1400" b="0" i="0" u="none" strike="noStrike" cap="none">
           <a:solidFill>
             <a:srgbClr val="000000"/>
           </a:solidFill>
@@ -13824,7 +14104,7 @@
           <a:sym typeface="Arial"/>
         </a:defRPr>
       </a:lvl3pPr>
-      <a:lvl4pPr lvl="3" marR="0" rtl="0" algn="l">
+      <a:lvl4pPr marR="0" lvl="3" algn="l" rtl="0">
         <a:lnSpc>
           <a:spcPct val="100000"/>
         </a:lnSpc>
@@ -13838,7 +14118,7 @@
           <a:srgbClr val="000000"/>
         </a:buClr>
         <a:buFont typeface="Arial"/>
-        <a:defRPr b="0" i="0" sz="1400" u="none" cap="none" strike="noStrike">
+        <a:defRPr sz="1400" b="0" i="0" u="none" strike="noStrike" cap="none">
           <a:solidFill>
             <a:srgbClr val="000000"/>
           </a:solidFill>
@@ -13848,7 +14128,7 @@
           <a:sym typeface="Arial"/>
         </a:defRPr>
       </a:lvl4pPr>
-      <a:lvl5pPr lvl="4" marR="0" rtl="0" algn="l">
+      <a:lvl5pPr marR="0" lvl="4" algn="l" rtl="0">
         <a:lnSpc>
           <a:spcPct val="100000"/>
         </a:lnSpc>
@@ -13862,7 +14142,7 @@
           <a:srgbClr val="000000"/>
         </a:buClr>
         <a:buFont typeface="Arial"/>
-        <a:defRPr b="0" i="0" sz="1400" u="none" cap="none" strike="noStrike">
+        <a:defRPr sz="1400" b="0" i="0" u="none" strike="noStrike" cap="none">
           <a:solidFill>
             <a:srgbClr val="000000"/>
           </a:solidFill>
@@ -13872,7 +14152,7 @@
           <a:sym typeface="Arial"/>
         </a:defRPr>
       </a:lvl5pPr>
-      <a:lvl6pPr lvl="5" marR="0" rtl="0" algn="l">
+      <a:lvl6pPr marR="0" lvl="5" algn="l" rtl="0">
         <a:lnSpc>
           <a:spcPct val="100000"/>
         </a:lnSpc>
@@ -13886,7 +14166,7 @@
           <a:srgbClr val="000000"/>
         </a:buClr>
         <a:buFont typeface="Arial"/>
-        <a:defRPr b="0" i="0" sz="1400" u="none" cap="none" strike="noStrike">
+        <a:defRPr sz="1400" b="0" i="0" u="none" strike="noStrike" cap="none">
           <a:solidFill>
             <a:srgbClr val="000000"/>
           </a:solidFill>
@@ -13896,7 +14176,7 @@
           <a:sym typeface="Arial"/>
         </a:defRPr>
       </a:lvl6pPr>
-      <a:lvl7pPr lvl="6" marR="0" rtl="0" algn="l">
+      <a:lvl7pPr marR="0" lvl="6" algn="l" rtl="0">
         <a:lnSpc>
           <a:spcPct val="100000"/>
         </a:lnSpc>
@@ -13910,7 +14190,7 @@
           <a:srgbClr val="000000"/>
         </a:buClr>
         <a:buFont typeface="Arial"/>
-        <a:defRPr b="0" i="0" sz="1400" u="none" cap="none" strike="noStrike">
+        <a:defRPr sz="1400" b="0" i="0" u="none" strike="noStrike" cap="none">
           <a:solidFill>
             <a:srgbClr val="000000"/>
           </a:solidFill>
@@ -13920,7 +14200,7 @@
           <a:sym typeface="Arial"/>
         </a:defRPr>
       </a:lvl7pPr>
-      <a:lvl8pPr lvl="7" marR="0" rtl="0" algn="l">
+      <a:lvl8pPr marR="0" lvl="7" algn="l" rtl="0">
         <a:lnSpc>
           <a:spcPct val="100000"/>
         </a:lnSpc>
@@ -13934,7 +14214,7 @@
           <a:srgbClr val="000000"/>
         </a:buClr>
         <a:buFont typeface="Arial"/>
-        <a:defRPr b="0" i="0" sz="1400" u="none" cap="none" strike="noStrike">
+        <a:defRPr sz="1400" b="0" i="0" u="none" strike="noStrike" cap="none">
           <a:solidFill>
             <a:srgbClr val="000000"/>
           </a:solidFill>
@@ -13944,7 +14224,7 @@
           <a:sym typeface="Arial"/>
         </a:defRPr>
       </a:lvl8pPr>
-      <a:lvl9pPr lvl="8" marR="0" rtl="0" algn="l">
+      <a:lvl9pPr marR="0" lvl="8" algn="l" rtl="0">
         <a:lnSpc>
           <a:spcPct val="100000"/>
         </a:lnSpc>
@@ -13958,7 +14238,7 @@
           <a:srgbClr val="000000"/>
         </a:buClr>
         <a:buFont typeface="Arial"/>
-        <a:defRPr b="0" i="0" sz="1400" u="none" cap="none" strike="noStrike">
+        <a:defRPr sz="1400" b="0" i="0" u="none" strike="noStrike" cap="none">
           <a:solidFill>
             <a:srgbClr val="000000"/>
           </a:solidFill>
@@ -13974,11 +14254,11 @@
 </file>
 
 <file path=ppt/slides/slide1.xml><?xml version="1.0" encoding="utf-8"?>
-<p:sld xmlns:a="http://schemas.openxmlformats.org/drawingml/2006/main" xmlns:r="http://schemas.openxmlformats.org/officeDocument/2006/relationships" xmlns:mc="http://schemas.openxmlformats.org/markup-compatibility/2006" xmlns:mv="urn:schemas-microsoft-com:mac:vml" xmlns:p="http://schemas.openxmlformats.org/presentationml/2006/main" xmlns:c="http://schemas.openxmlformats.org/drawingml/2006/chart" xmlns:dgm="http://schemas.openxmlformats.org/drawingml/2006/diagram" xmlns:o="urn:schemas-microsoft-com:office:office" xmlns:v="urn:schemas-microsoft-com:vml" xmlns:pvml="urn:schemas-microsoft-com:office:powerpoint" xmlns:com="http://schemas.openxmlformats.org/drawingml/2006/compatibility" xmlns:p14="http://schemas.microsoft.com/office/powerpoint/2010/main" xmlns:p15="http://schemas.microsoft.com/office/powerpoint/2012/main" xmlns:ahyp="http://schemas.microsoft.com/office/drawing/2018/hyperlinkcolor">
+<p:sld xmlns:a="http://schemas.openxmlformats.org/drawingml/2006/main" xmlns:r="http://schemas.openxmlformats.org/officeDocument/2006/relationships" xmlns:p="http://schemas.openxmlformats.org/presentationml/2006/main">
   <p:cSld>
     <p:spTree>
       <p:nvGrpSpPr>
-        <p:cNvPr id="106" name="Shape 106"/>
+        <p:cNvPr id="1" name="Shape 106"/>
         <p:cNvGrpSpPr/>
         <p:nvPr/>
       </p:nvGrpSpPr>
@@ -13993,7 +14273,9 @@
       <p:sp>
         <p:nvSpPr>
           <p:cNvPr id="107" name="Google Shape;107;p15"/>
-          <p:cNvSpPr txBox="1"/>
+          <p:cNvSpPr txBox="1">
+            <a:spLocks noGrp="1"/>
+          </p:cNvSpPr>
           <p:nvPr>
             <p:ph type="title"/>
           </p:nvPr>
@@ -14008,12 +14290,12 @@
           </a:prstGeom>
         </p:spPr>
         <p:txBody>
-          <a:bodyPr anchorCtr="0" anchor="t" bIns="0" lIns="0" spcFirstLastPara="1" rIns="0" wrap="square" tIns="0">
+          <a:bodyPr spcFirstLastPara="1" wrap="square" lIns="0" tIns="0" rIns="0" bIns="0" anchor="t" anchorCtr="0">
             <a:normAutofit/>
           </a:bodyPr>
           <a:lstStyle/>
           <a:p>
-            <a:pPr indent="0" lvl="0" marL="0" rtl="0" algn="l">
+            <a:pPr marL="0" lvl="0" indent="0" algn="l" rtl="0">
               <a:spcBef>
                 <a:spcPts val="0"/>
               </a:spcBef>
@@ -14045,9 +14327,11 @@
       <p:sp>
         <p:nvSpPr>
           <p:cNvPr id="108" name="Google Shape;108;p15"/>
-          <p:cNvSpPr txBox="1"/>
+          <p:cNvSpPr txBox="1">
+            <a:spLocks noGrp="1"/>
+          </p:cNvSpPr>
           <p:nvPr>
-            <p:ph idx="1" type="subTitle"/>
+            <p:ph type="subTitle" idx="1"/>
           </p:nvPr>
         </p:nvSpPr>
         <p:spPr>
@@ -14059,7 +14343,7 @@
             <a:avLst/>
           </a:prstGeom>
           <a:effectLst>
-            <a:outerShdw blurRad="57150" rotWithShape="0" algn="bl" dir="5400000" dist="19050">
+            <a:outerShdw blurRad="57150" dist="19050" dir="5400000" algn="bl" rotWithShape="0">
               <a:srgbClr val="000000">
                 <a:alpha val="50000"/>
               </a:srgbClr>
@@ -14067,12 +14351,12 @@
           </a:effectLst>
         </p:spPr>
         <p:txBody>
-          <a:bodyPr anchorCtr="0" anchor="t" bIns="0" lIns="0" spcFirstLastPara="1" rIns="0" wrap="square" tIns="0">
+          <a:bodyPr spcFirstLastPara="1" wrap="square" lIns="0" tIns="0" rIns="0" bIns="0" anchor="t" anchorCtr="0">
             <a:normAutofit/>
           </a:bodyPr>
           <a:lstStyle/>
           <a:p>
-            <a:pPr indent="0" lvl="0" marL="0" rtl="0" algn="l">
+            <a:pPr marL="0" lvl="0" indent="0" algn="l" rtl="0">
               <a:lnSpc>
                 <a:spcPct val="85000"/>
               </a:lnSpc>
@@ -14107,7 +14391,7 @@
             </a:endParaRPr>
           </a:p>
           <a:p>
-            <a:pPr indent="-311150" lvl="0" marL="457200" rtl="0" algn="l">
+            <a:pPr marL="457200" lvl="0" indent="-311150" algn="l" rtl="0">
               <a:lnSpc>
                 <a:spcPct val="115000"/>
               </a:lnSpc>
@@ -14147,7 +14431,7 @@
             </a:endParaRPr>
           </a:p>
           <a:p>
-            <a:pPr indent="-311150" lvl="0" marL="457200" rtl="0" algn="l">
+            <a:pPr marL="457200" lvl="0" indent="-311150" algn="l" rtl="0">
               <a:lnSpc>
                 <a:spcPct val="115000"/>
               </a:lnSpc>
@@ -14187,7 +14471,7 @@
             </a:endParaRPr>
           </a:p>
           <a:p>
-            <a:pPr indent="-311150" lvl="0" marL="457200" rtl="0" algn="l">
+            <a:pPr marL="457200" lvl="0" indent="-311150" algn="l" rtl="0">
               <a:lnSpc>
                 <a:spcPct val="115000"/>
               </a:lnSpc>
@@ -14214,31 +14498,7 @@
                 <a:cs typeface="Urbanist Medium"/>
                 <a:sym typeface="Urbanist Medium"/>
               </a:rPr>
-              <a:t>Parth Desai (</a:t>
-            </a:r>
-            <a:r>
-              <a:rPr lang="en">
-                <a:solidFill>
-                  <a:schemeClr val="lt1"/>
-                </a:solidFill>
-                <a:latin typeface="Urbanist Medium"/>
-                <a:ea typeface="Urbanist Medium"/>
-                <a:cs typeface="Urbanist Medium"/>
-                <a:sym typeface="Urbanist Medium"/>
-              </a:rPr>
-              <a:t>Business</a:t>
-            </a:r>
-            <a:r>
-              <a:rPr lang="en">
-                <a:solidFill>
-                  <a:schemeClr val="lt1"/>
-                </a:solidFill>
-                <a:latin typeface="Urbanist Medium"/>
-                <a:ea typeface="Urbanist Medium"/>
-                <a:cs typeface="Urbanist Medium"/>
-                <a:sym typeface="Urbanist Medium"/>
-              </a:rPr>
-              <a:t> Analyst)</a:t>
+              <a:t>Parth Desai (Business Analyst)</a:t>
             </a:r>
             <a:endParaRPr>
               <a:solidFill>
@@ -14251,7 +14511,7 @@
             </a:endParaRPr>
           </a:p>
           <a:p>
-            <a:pPr indent="-311150" lvl="0" marL="457200" rtl="0" algn="l">
+            <a:pPr marL="457200" lvl="0" indent="-311150" algn="l" rtl="0">
               <a:lnSpc>
                 <a:spcPct val="115000"/>
               </a:lnSpc>
@@ -14291,7 +14551,7 @@
             </a:endParaRPr>
           </a:p>
           <a:p>
-            <a:pPr indent="-311150" lvl="0" marL="457200" rtl="0" algn="l">
+            <a:pPr marL="457200" lvl="0" indent="-311150" algn="l" rtl="0">
               <a:lnSpc>
                 <a:spcPct val="115000"/>
               </a:lnSpc>
@@ -14341,11 +14601,11 @@
 </file>
 
 <file path=ppt/slides/slide10.xml><?xml version="1.0" encoding="utf-8"?>
-<p:sld xmlns:a="http://schemas.openxmlformats.org/drawingml/2006/main" xmlns:r="http://schemas.openxmlformats.org/officeDocument/2006/relationships" xmlns:mc="http://schemas.openxmlformats.org/markup-compatibility/2006" xmlns:mv="urn:schemas-microsoft-com:mac:vml" xmlns:p="http://schemas.openxmlformats.org/presentationml/2006/main" xmlns:c="http://schemas.openxmlformats.org/drawingml/2006/chart" xmlns:dgm="http://schemas.openxmlformats.org/drawingml/2006/diagram" xmlns:o="urn:schemas-microsoft-com:office:office" xmlns:v="urn:schemas-microsoft-com:vml" xmlns:pvml="urn:schemas-microsoft-com:office:powerpoint" xmlns:com="http://schemas.openxmlformats.org/drawingml/2006/compatibility" xmlns:p14="http://schemas.microsoft.com/office/powerpoint/2010/main" xmlns:p15="http://schemas.microsoft.com/office/powerpoint/2012/main" xmlns:ahyp="http://schemas.microsoft.com/office/drawing/2018/hyperlinkcolor">
+<p:sld xmlns:a="http://schemas.openxmlformats.org/drawingml/2006/main" xmlns:r="http://schemas.openxmlformats.org/officeDocument/2006/relationships" xmlns:p="http://schemas.openxmlformats.org/presentationml/2006/main">
   <p:cSld>
     <p:spTree>
       <p:nvGrpSpPr>
-        <p:cNvPr id="173" name="Shape 173"/>
+        <p:cNvPr id="1" name="Shape 173"/>
         <p:cNvGrpSpPr/>
         <p:nvPr/>
       </p:nvGrpSpPr>
@@ -14377,12 +14637,12 @@
           </a:ln>
         </p:spPr>
         <p:txBody>
-          <a:bodyPr anchorCtr="0" anchor="t" bIns="91425" lIns="91425" spcFirstLastPara="1" rIns="91425" wrap="square" tIns="91425">
+          <a:bodyPr spcFirstLastPara="1" wrap="square" lIns="91425" tIns="91425" rIns="91425" bIns="91425" anchor="t" anchorCtr="0">
             <a:noAutofit/>
           </a:bodyPr>
           <a:lstStyle/>
           <a:p>
-            <a:pPr indent="0" lvl="0" marL="0" rtl="0" algn="ctr">
+            <a:pPr marL="0" lvl="0" indent="0" algn="ctr" rtl="0">
               <a:spcBef>
                 <a:spcPts val="0"/>
               </a:spcBef>
@@ -14392,7 +14652,7 @@
               <a:buNone/>
             </a:pPr>
             <a:r>
-              <a:rPr b="1" lang="en" sz="2300">
+              <a:rPr lang="en" sz="2300" b="1">
                 <a:solidFill>
                   <a:schemeClr val="dk2"/>
                 </a:solidFill>
@@ -14403,7 +14663,7 @@
               </a:rPr>
               <a:t>Test Summary Report (Parth Desai)</a:t>
             </a:r>
-            <a:endParaRPr b="1" sz="2300">
+            <a:endParaRPr sz="2300" b="1">
               <a:solidFill>
                 <a:schemeClr val="dk2"/>
               </a:solidFill>
@@ -14575,12 +14835,12 @@
           </a:ln>
         </p:spPr>
         <p:txBody>
-          <a:bodyPr anchorCtr="0" anchor="t" bIns="91425" lIns="91425" spcFirstLastPara="1" rIns="91425" wrap="square" tIns="91425">
+          <a:bodyPr spcFirstLastPara="1" wrap="square" lIns="91425" tIns="91425" rIns="91425" bIns="91425" anchor="t" anchorCtr="0">
             <a:noAutofit/>
           </a:bodyPr>
           <a:lstStyle/>
           <a:p>
-            <a:pPr indent="0" lvl="0" marL="0" rtl="0" algn="l">
+            <a:pPr marL="0" lvl="0" indent="0" algn="l" rtl="0">
               <a:lnSpc>
                 <a:spcPct val="107916"/>
               </a:lnSpc>
@@ -14593,7 +14853,7 @@
               <a:buNone/>
             </a:pPr>
             <a:r>
-              <a:rPr b="1" i="1" lang="en">
+              <a:rPr lang="en" b="1" i="1">
                 <a:solidFill>
                   <a:srgbClr val="999999"/>
                 </a:solidFill>
@@ -14615,7 +14875,7 @@
             </a:endParaRPr>
           </a:p>
           <a:p>
-            <a:pPr indent="0" lvl="0" marL="0" rtl="0" algn="l">
+            <a:pPr marL="0" lvl="0" indent="0" algn="l" rtl="0">
               <a:lnSpc>
                 <a:spcPct val="107916"/>
               </a:lnSpc>
@@ -14628,7 +14888,7 @@
               <a:buNone/>
             </a:pPr>
             <a:r>
-              <a:rPr b="1" lang="en" sz="1100">
+              <a:rPr lang="en" sz="1100" b="1">
                 <a:latin typeface="Merriweather"/>
                 <a:ea typeface="Merriweather"/>
                 <a:cs typeface="Merriweather"/>
@@ -14636,7 +14896,7 @@
               </a:rPr>
               <a:t>1. Functional Testing</a:t>
             </a:r>
-            <a:endParaRPr b="1" sz="1100">
+            <a:endParaRPr sz="1100" b="1">
               <a:latin typeface="Merriweather"/>
               <a:ea typeface="Merriweather"/>
               <a:cs typeface="Merriweather"/>
@@ -14644,7 +14904,7 @@
             </a:endParaRPr>
           </a:p>
           <a:p>
-            <a:pPr indent="0" lvl="0" marL="0" rtl="0" algn="l">
+            <a:pPr marL="0" lvl="0" indent="0" algn="l" rtl="0">
               <a:lnSpc>
                 <a:spcPct val="107916"/>
               </a:lnSpc>
@@ -14657,7 +14917,7 @@
               <a:buNone/>
             </a:pPr>
             <a:r>
-              <a:rPr b="1" lang="en" sz="1100">
+              <a:rPr lang="en" sz="1100" b="1">
                 <a:latin typeface="Merriweather"/>
                 <a:ea typeface="Merriweather"/>
                 <a:cs typeface="Merriweather"/>
@@ -14665,7 +14925,7 @@
               </a:rPr>
               <a:t>2. Integration Testing</a:t>
             </a:r>
-            <a:endParaRPr b="1" sz="1100">
+            <a:endParaRPr sz="1100" b="1">
               <a:latin typeface="Merriweather"/>
               <a:ea typeface="Merriweather"/>
               <a:cs typeface="Merriweather"/>
@@ -14673,7 +14933,7 @@
             </a:endParaRPr>
           </a:p>
           <a:p>
-            <a:pPr indent="0" lvl="0" marL="0" rtl="0" algn="l">
+            <a:pPr marL="0" lvl="0" indent="0" algn="l" rtl="0">
               <a:lnSpc>
                 <a:spcPct val="107916"/>
               </a:lnSpc>
@@ -14686,7 +14946,7 @@
               <a:buNone/>
             </a:pPr>
             <a:r>
-              <a:rPr b="1" lang="en" sz="1100">
+              <a:rPr lang="en" sz="1100" b="1">
                 <a:latin typeface="Merriweather"/>
                 <a:ea typeface="Merriweather"/>
                 <a:cs typeface="Merriweather"/>
@@ -14694,7 +14954,7 @@
               </a:rPr>
               <a:t>3. Regression Testing</a:t>
             </a:r>
-            <a:endParaRPr b="1" sz="1100">
+            <a:endParaRPr sz="1100" b="1">
               <a:latin typeface="Merriweather"/>
               <a:ea typeface="Merriweather"/>
               <a:cs typeface="Merriweather"/>
@@ -14702,7 +14962,7 @@
             </a:endParaRPr>
           </a:p>
           <a:p>
-            <a:pPr indent="0" lvl="0" marL="0" rtl="0" algn="l">
+            <a:pPr marL="0" lvl="0" indent="0" algn="l" rtl="0">
               <a:lnSpc>
                 <a:spcPct val="107916"/>
               </a:lnSpc>
@@ -14715,7 +14975,7 @@
               <a:buNone/>
             </a:pPr>
             <a:r>
-              <a:rPr b="1" lang="en" sz="1100">
+              <a:rPr lang="en" sz="1100" b="1">
                 <a:latin typeface="Merriweather"/>
                 <a:ea typeface="Merriweather"/>
                 <a:cs typeface="Merriweather"/>
@@ -14723,7 +14983,7 @@
               </a:rPr>
               <a:t>4. Usability Testing</a:t>
             </a:r>
-            <a:endParaRPr b="1" sz="1100">
+            <a:endParaRPr sz="1100" b="1">
               <a:latin typeface="Merriweather"/>
               <a:ea typeface="Merriweather"/>
               <a:cs typeface="Merriweather"/>
@@ -14731,7 +14991,7 @@
             </a:endParaRPr>
           </a:p>
           <a:p>
-            <a:pPr indent="0" lvl="0" marL="0" rtl="0" algn="l">
+            <a:pPr marL="0" lvl="0" indent="0" algn="l" rtl="0">
               <a:lnSpc>
                 <a:spcPct val="107916"/>
               </a:lnSpc>
@@ -14744,7 +15004,7 @@
               <a:buNone/>
             </a:pPr>
             <a:r>
-              <a:rPr b="1" lang="en" sz="1100">
+              <a:rPr lang="en" sz="1100" b="1">
                 <a:latin typeface="Merriweather"/>
                 <a:ea typeface="Merriweather"/>
                 <a:cs typeface="Merriweather"/>
@@ -14773,11 +15033,11 @@
 </file>
 
 <file path=ppt/slides/slide11.xml><?xml version="1.0" encoding="utf-8"?>
-<p:sld xmlns:a="http://schemas.openxmlformats.org/drawingml/2006/main" xmlns:r="http://schemas.openxmlformats.org/officeDocument/2006/relationships" xmlns:mc="http://schemas.openxmlformats.org/markup-compatibility/2006" xmlns:mv="urn:schemas-microsoft-com:mac:vml" xmlns:p="http://schemas.openxmlformats.org/presentationml/2006/main" xmlns:c="http://schemas.openxmlformats.org/drawingml/2006/chart" xmlns:dgm="http://schemas.openxmlformats.org/drawingml/2006/diagram" xmlns:o="urn:schemas-microsoft-com:office:office" xmlns:v="urn:schemas-microsoft-com:vml" xmlns:pvml="urn:schemas-microsoft-com:office:powerpoint" xmlns:com="http://schemas.openxmlformats.org/drawingml/2006/compatibility" xmlns:p14="http://schemas.microsoft.com/office/powerpoint/2010/main" xmlns:p15="http://schemas.microsoft.com/office/powerpoint/2012/main" xmlns:ahyp="http://schemas.microsoft.com/office/drawing/2018/hyperlinkcolor">
+<p:sld xmlns:a="http://schemas.openxmlformats.org/drawingml/2006/main" xmlns:r="http://schemas.openxmlformats.org/officeDocument/2006/relationships" xmlns:p="http://schemas.openxmlformats.org/presentationml/2006/main">
   <p:cSld>
     <p:spTree>
       <p:nvGrpSpPr>
-        <p:cNvPr id="184" name="Shape 184"/>
+        <p:cNvPr id="1" name="Shape 184"/>
         <p:cNvGrpSpPr/>
         <p:nvPr/>
       </p:nvGrpSpPr>
@@ -14809,12 +15069,12 @@
           </a:ln>
         </p:spPr>
         <p:txBody>
-          <a:bodyPr anchorCtr="0" anchor="t" bIns="91425" lIns="91425" spcFirstLastPara="1" rIns="91425" wrap="square" tIns="91425">
+          <a:bodyPr spcFirstLastPara="1" wrap="square" lIns="91425" tIns="91425" rIns="91425" bIns="91425" anchor="t" anchorCtr="0">
             <a:noAutofit/>
           </a:bodyPr>
           <a:lstStyle/>
           <a:p>
-            <a:pPr indent="0" lvl="0" marL="0" rtl="0" algn="ctr">
+            <a:pPr marL="0" lvl="0" indent="0" algn="ctr" rtl="0">
               <a:spcBef>
                 <a:spcPts val="0"/>
               </a:spcBef>
@@ -14824,7 +15084,7 @@
               <a:buNone/>
             </a:pPr>
             <a:r>
-              <a:rPr b="1" lang="en" sz="2300">
+              <a:rPr lang="en" sz="2300" b="1">
                 <a:solidFill>
                   <a:schemeClr val="dk2"/>
                 </a:solidFill>
@@ -14833,21 +15093,9 @@
                 <a:cs typeface="Merriweather"/>
                 <a:sym typeface="Merriweather"/>
               </a:rPr>
-              <a:t>Application Recorded Demo </a:t>
+              <a:t>Application Recorded Demo (Parth Desai)</a:t>
             </a:r>
-            <a:r>
-              <a:rPr b="1" lang="en" sz="2300">
-                <a:solidFill>
-                  <a:schemeClr val="dk2"/>
-                </a:solidFill>
-                <a:latin typeface="Merriweather"/>
-                <a:ea typeface="Merriweather"/>
-                <a:cs typeface="Merriweather"/>
-                <a:sym typeface="Merriweather"/>
-              </a:rPr>
-              <a:t>(Parth Desai)</a:t>
-            </a:r>
-            <a:endParaRPr b="1" sz="2300">
+            <a:endParaRPr sz="2300" b="1">
               <a:solidFill>
                 <a:schemeClr val="dk2"/>
               </a:solidFill>
@@ -14861,32 +15109,32 @@
       </p:sp>
       <p:pic>
         <p:nvPicPr>
-          <p:cNvPr id="186" name="Google Shape;186;p25" title="Recorded_Demo_XERO_Team-3.mp4">
-            <a:hlinkClick r:id="rId3"/>
+          <p:cNvPr id="3" name="Picture 2" descr="A computer screen shot of a message&#10;&#10;AI-generated content may be incorrect.">
+            <a:extLst>
+              <a:ext uri="{FF2B5EF4-FFF2-40B4-BE49-F238E27FC236}">
+                <a16:creationId xmlns:a16="http://schemas.microsoft.com/office/drawing/2014/main" id="{864A6816-9164-CD38-6FA1-106748CFB5E4}"/>
+              </a:ext>
+            </a:extLst>
           </p:cNvPr>
-          <p:cNvPicPr preferRelativeResize="0"/>
+          <p:cNvPicPr>
+            <a:picLocks noChangeAspect="1"/>
+          </p:cNvPicPr>
           <p:nvPr/>
         </p:nvPicPr>
         <p:blipFill>
-          <a:blip r:embed="rId4">
-            <a:alphaModFix/>
-          </a:blip>
+          <a:blip r:embed="rId3"/>
           <a:stretch>
             <a:fillRect/>
           </a:stretch>
         </p:blipFill>
         <p:spPr>
           <a:xfrm>
-            <a:off x="367925" y="910700"/>
-            <a:ext cx="8299325" cy="3429000"/>
+            <a:off x="1181911" y="867916"/>
+            <a:ext cx="6469934" cy="3621743"/>
           </a:xfrm>
           <a:prstGeom prst="rect">
             <a:avLst/>
           </a:prstGeom>
-          <a:noFill/>
-          <a:ln>
-            <a:noFill/>
-          </a:ln>
         </p:spPr>
       </p:pic>
     </p:spTree>
@@ -14894,98 +15142,15 @@
   <p:clrMapOvr>
     <a:masterClrMapping/>
   </p:clrMapOvr>
-  <p:timing>
-    <p:tnLst>
-      <p:par>
-        <p:cTn dur="indefinite" nodeType="tmRoot" restart="never">
-          <p:childTnLst>
-            <p:seq concurrent="1" nextAc="seek">
-              <p:cTn dur="indefinite" id="2" nodeType="mainSeq">
-                <p:childTnLst>
-                  <p:par>
-                    <p:cTn fill="hold">
-                      <p:stCondLst>
-                        <p:cond delay="indefinite"/>
-                      </p:stCondLst>
-                      <p:childTnLst>
-                        <p:par>
-                          <p:cTn fill="hold">
-                            <p:stCondLst>
-                              <p:cond delay="0"/>
-                            </p:stCondLst>
-                            <p:childTnLst>
-                              <p:par>
-                                <p:cTn fill="hold" nodeType="clickEffect" presetClass="entr" presetID="10" presetSubtype="0">
-                                  <p:stCondLst>
-                                    <p:cond delay="0"/>
-                                  </p:stCondLst>
-                                  <p:childTnLst>
-                                    <p:set>
-                                      <p:cBhvr>
-                                        <p:cTn dur="1" fill="hold">
-                                          <p:stCondLst>
-                                            <p:cond delay="0"/>
-                                          </p:stCondLst>
-                                        </p:cTn>
-                                        <p:tgtEl>
-                                          <p:spTgt spid="186"/>
-                                        </p:tgtEl>
-                                        <p:attrNameLst>
-                                          <p:attrName>style.visibility</p:attrName>
-                                        </p:attrNameLst>
-                                      </p:cBhvr>
-                                      <p:to>
-                                        <p:strVal val="visible"/>
-                                      </p:to>
-                                    </p:set>
-                                    <p:animEffect filter="fade" transition="in">
-                                      <p:cBhvr>
-                                        <p:cTn dur="1000"/>
-                                        <p:tgtEl>
-                                          <p:spTgt spid="186"/>
-                                        </p:tgtEl>
-                                      </p:cBhvr>
-                                    </p:animEffect>
-                                  </p:childTnLst>
-                                </p:cTn>
-                              </p:par>
-                            </p:childTnLst>
-                          </p:cTn>
-                        </p:par>
-                      </p:childTnLst>
-                    </p:cTn>
-                  </p:par>
-                </p:childTnLst>
-              </p:cTn>
-              <p:prevCondLst>
-                <p:cond evt="onPrev">
-                  <p:tgtEl>
-                    <p:sldTgt/>
-                  </p:tgtEl>
-                </p:cond>
-              </p:prevCondLst>
-              <p:nextCondLst>
-                <p:cond evt="onNext">
-                  <p:tgtEl>
-                    <p:sldTgt/>
-                  </p:tgtEl>
-                </p:cond>
-              </p:nextCondLst>
-            </p:seq>
-          </p:childTnLst>
-        </p:cTn>
-      </p:par>
-    </p:tnLst>
-  </p:timing>
 </p:sld>
 </file>
 
 <file path=ppt/slides/slide12.xml><?xml version="1.0" encoding="utf-8"?>
-<p:sld xmlns:a="http://schemas.openxmlformats.org/drawingml/2006/main" xmlns:r="http://schemas.openxmlformats.org/officeDocument/2006/relationships" xmlns:mc="http://schemas.openxmlformats.org/markup-compatibility/2006" xmlns:mv="urn:schemas-microsoft-com:mac:vml" xmlns:p="http://schemas.openxmlformats.org/presentationml/2006/main" xmlns:c="http://schemas.openxmlformats.org/drawingml/2006/chart" xmlns:dgm="http://schemas.openxmlformats.org/drawingml/2006/diagram" xmlns:o="urn:schemas-microsoft-com:office:office" xmlns:v="urn:schemas-microsoft-com:vml" xmlns:pvml="urn:schemas-microsoft-com:office:powerpoint" xmlns:com="http://schemas.openxmlformats.org/drawingml/2006/compatibility" xmlns:p14="http://schemas.microsoft.com/office/powerpoint/2010/main" xmlns:p15="http://schemas.microsoft.com/office/powerpoint/2012/main" xmlns:ahyp="http://schemas.microsoft.com/office/drawing/2018/hyperlinkcolor">
+<p:sld xmlns:a="http://schemas.openxmlformats.org/drawingml/2006/main" xmlns:r="http://schemas.openxmlformats.org/officeDocument/2006/relationships" xmlns:p="http://schemas.openxmlformats.org/presentationml/2006/main">
   <p:cSld>
     <p:spTree>
       <p:nvGrpSpPr>
-        <p:cNvPr id="190" name="Shape 190"/>
+        <p:cNvPr id="1" name="Shape 190"/>
         <p:cNvGrpSpPr/>
         <p:nvPr/>
       </p:nvGrpSpPr>
@@ -15017,12 +15182,12 @@
           </a:ln>
         </p:spPr>
         <p:txBody>
-          <a:bodyPr anchorCtr="0" anchor="t" bIns="91425" lIns="91425" spcFirstLastPara="1" rIns="91425" wrap="square" tIns="91425">
+          <a:bodyPr spcFirstLastPara="1" wrap="square" lIns="91425" tIns="91425" rIns="91425" bIns="91425" anchor="t" anchorCtr="0">
             <a:noAutofit/>
           </a:bodyPr>
           <a:lstStyle/>
           <a:p>
-            <a:pPr indent="0" lvl="0" marL="0" rtl="0" algn="ctr">
+            <a:pPr marL="0" lvl="0" indent="0" algn="ctr" rtl="0">
               <a:spcBef>
                 <a:spcPts val="0"/>
               </a:spcBef>
@@ -15032,7 +15197,7 @@
               <a:buNone/>
             </a:pPr>
             <a:r>
-              <a:rPr b="1" lang="en" sz="2300">
+              <a:rPr lang="en" sz="2300" b="1">
                 <a:solidFill>
                   <a:schemeClr val="dk2"/>
                 </a:solidFill>
@@ -15041,21 +15206,9 @@
                 <a:cs typeface="Merriweather"/>
                 <a:sym typeface="Merriweather"/>
               </a:rPr>
-              <a:t>Github Repo Link </a:t>
+              <a:t>Github Repo Link (Deepesh Katudia)</a:t>
             </a:r>
-            <a:r>
-              <a:rPr b="1" lang="en" sz="2300">
-                <a:solidFill>
-                  <a:schemeClr val="dk2"/>
-                </a:solidFill>
-                <a:latin typeface="Merriweather"/>
-                <a:ea typeface="Merriweather"/>
-                <a:cs typeface="Merriweather"/>
-                <a:sym typeface="Merriweather"/>
-              </a:rPr>
-              <a:t>(Deepesh Katudia)</a:t>
-            </a:r>
-            <a:endParaRPr b="1" sz="2300">
+            <a:endParaRPr sz="2300" b="1">
               <a:solidFill>
                 <a:schemeClr val="dk2"/>
               </a:solidFill>
@@ -15115,12 +15268,12 @@
           </a:ln>
         </p:spPr>
         <p:txBody>
-          <a:bodyPr anchorCtr="0" anchor="t" bIns="91425" lIns="91425" spcFirstLastPara="1" rIns="91425" wrap="square" tIns="91425">
+          <a:bodyPr spcFirstLastPara="1" wrap="square" lIns="91425" tIns="91425" rIns="91425" bIns="91425" anchor="t" anchorCtr="0">
             <a:noAutofit/>
           </a:bodyPr>
           <a:lstStyle/>
           <a:p>
-            <a:pPr indent="0" lvl="0" marL="0" rtl="0" algn="l">
+            <a:pPr marL="0" lvl="0" indent="0" algn="l" rtl="0">
               <a:spcBef>
                 <a:spcPts val="0"/>
               </a:spcBef>
@@ -15174,12 +15327,12 @@
           </a:ln>
         </p:spPr>
         <p:txBody>
-          <a:bodyPr anchorCtr="0" anchor="t" bIns="91425" lIns="91425" spcFirstLastPara="1" rIns="91425" wrap="square" tIns="91425">
+          <a:bodyPr spcFirstLastPara="1" wrap="square" lIns="91425" tIns="91425" rIns="91425" bIns="91425" anchor="t" anchorCtr="0">
             <a:noAutofit/>
           </a:bodyPr>
           <a:lstStyle/>
           <a:p>
-            <a:pPr indent="0" lvl="0" marL="0" rtl="0" algn="l">
+            <a:pPr marL="0" lvl="0" indent="0" algn="l" rtl="0">
               <a:spcBef>
                 <a:spcPts val="0"/>
               </a:spcBef>
@@ -15277,11 +15430,11 @@
 </file>
 
 <file path=ppt/slides/slide13.xml><?xml version="1.0" encoding="utf-8"?>
-<p:sld xmlns:a="http://schemas.openxmlformats.org/drawingml/2006/main" xmlns:r="http://schemas.openxmlformats.org/officeDocument/2006/relationships" xmlns:mc="http://schemas.openxmlformats.org/markup-compatibility/2006" xmlns:mv="urn:schemas-microsoft-com:mac:vml" xmlns:p="http://schemas.openxmlformats.org/presentationml/2006/main" xmlns:c="http://schemas.openxmlformats.org/drawingml/2006/chart" xmlns:dgm="http://schemas.openxmlformats.org/drawingml/2006/diagram" xmlns:o="urn:schemas-microsoft-com:office:office" xmlns:v="urn:schemas-microsoft-com:vml" xmlns:pvml="urn:schemas-microsoft-com:office:powerpoint" xmlns:com="http://schemas.openxmlformats.org/drawingml/2006/compatibility" xmlns:p14="http://schemas.microsoft.com/office/powerpoint/2010/main" xmlns:p15="http://schemas.microsoft.com/office/powerpoint/2012/main" xmlns:ahyp="http://schemas.microsoft.com/office/drawing/2018/hyperlinkcolor">
+<p:sld xmlns:a="http://schemas.openxmlformats.org/drawingml/2006/main" xmlns:r="http://schemas.openxmlformats.org/officeDocument/2006/relationships" xmlns:p="http://schemas.openxmlformats.org/presentationml/2006/main">
   <p:cSld>
     <p:spTree>
       <p:nvGrpSpPr>
-        <p:cNvPr id="200" name="Shape 200"/>
+        <p:cNvPr id="1" name="Shape 200"/>
         <p:cNvGrpSpPr/>
         <p:nvPr/>
       </p:nvGrpSpPr>
@@ -15313,12 +15466,12 @@
           </a:ln>
         </p:spPr>
         <p:txBody>
-          <a:bodyPr anchorCtr="0" anchor="t" bIns="91425" lIns="91425" spcFirstLastPara="1" rIns="91425" wrap="square" tIns="91425">
+          <a:bodyPr spcFirstLastPara="1" wrap="square" lIns="91425" tIns="91425" rIns="91425" bIns="91425" anchor="t" anchorCtr="0">
             <a:noAutofit/>
           </a:bodyPr>
           <a:lstStyle/>
           <a:p>
-            <a:pPr indent="0" lvl="0" marL="0" rtl="0" algn="ctr">
+            <a:pPr marL="0" lvl="0" indent="0" algn="ctr" rtl="0">
               <a:spcBef>
                 <a:spcPts val="0"/>
               </a:spcBef>
@@ -15328,7 +15481,7 @@
               <a:buNone/>
             </a:pPr>
             <a:r>
-              <a:rPr b="1" lang="en" sz="2300">
+              <a:rPr lang="en" sz="2300" b="1">
                 <a:solidFill>
                   <a:schemeClr val="dk2"/>
                 </a:solidFill>
@@ -15339,7 +15492,7 @@
               </a:rPr>
               <a:t>Github Folder Structure (Deepesh Katudia)</a:t>
             </a:r>
-            <a:endParaRPr b="1" sz="2300">
+            <a:endParaRPr sz="2300" b="1">
               <a:solidFill>
                 <a:schemeClr val="dk2"/>
               </a:solidFill>
@@ -15500,11 +15653,11 @@
 </file>
 
 <file path=ppt/slides/slide14.xml><?xml version="1.0" encoding="utf-8"?>
-<p:sld xmlns:a="http://schemas.openxmlformats.org/drawingml/2006/main" xmlns:r="http://schemas.openxmlformats.org/officeDocument/2006/relationships" xmlns:mc="http://schemas.openxmlformats.org/markup-compatibility/2006" xmlns:mv="urn:schemas-microsoft-com:mac:vml" xmlns:p="http://schemas.openxmlformats.org/presentationml/2006/main" xmlns:c="http://schemas.openxmlformats.org/drawingml/2006/chart" xmlns:dgm="http://schemas.openxmlformats.org/drawingml/2006/diagram" xmlns:o="urn:schemas-microsoft-com:office:office" xmlns:v="urn:schemas-microsoft-com:vml" xmlns:pvml="urn:schemas-microsoft-com:office:powerpoint" xmlns:com="http://schemas.openxmlformats.org/drawingml/2006/compatibility" xmlns:p14="http://schemas.microsoft.com/office/powerpoint/2010/main" xmlns:p15="http://schemas.microsoft.com/office/powerpoint/2012/main" xmlns:ahyp="http://schemas.microsoft.com/office/drawing/2018/hyperlinkcolor">
+<p:sld xmlns:a="http://schemas.openxmlformats.org/drawingml/2006/main" xmlns:r="http://schemas.openxmlformats.org/officeDocument/2006/relationships" xmlns:p="http://schemas.openxmlformats.org/presentationml/2006/main">
   <p:cSld>
     <p:spTree>
       <p:nvGrpSpPr>
-        <p:cNvPr id="210" name="Shape 210"/>
+        <p:cNvPr id="1" name="Shape 210"/>
         <p:cNvGrpSpPr/>
         <p:nvPr/>
       </p:nvGrpSpPr>
@@ -15519,7 +15672,9 @@
       <p:sp>
         <p:nvSpPr>
           <p:cNvPr id="211" name="Google Shape;211;p28"/>
-          <p:cNvSpPr txBox="1"/>
+          <p:cNvSpPr txBox="1">
+            <a:spLocks noGrp="1"/>
+          </p:cNvSpPr>
           <p:nvPr>
             <p:ph type="title"/>
           </p:nvPr>
@@ -15534,12 +15689,12 @@
           </a:prstGeom>
         </p:spPr>
         <p:txBody>
-          <a:bodyPr anchorCtr="0" anchor="t" bIns="0" lIns="0" spcFirstLastPara="1" rIns="0" wrap="square" tIns="0">
+          <a:bodyPr spcFirstLastPara="1" wrap="square" lIns="0" tIns="0" rIns="0" bIns="0" anchor="t" anchorCtr="0">
             <a:normAutofit/>
           </a:bodyPr>
           <a:lstStyle/>
           <a:p>
-            <a:pPr indent="0" lvl="0" marL="0" rtl="0" algn="l">
+            <a:pPr marL="0" lvl="0" indent="0" algn="l" rtl="0">
               <a:spcBef>
                 <a:spcPts val="0"/>
               </a:spcBef>
@@ -15573,11 +15728,11 @@
 </file>
 
 <file path=ppt/slides/slide2.xml><?xml version="1.0" encoding="utf-8"?>
-<p:sld xmlns:a="http://schemas.openxmlformats.org/drawingml/2006/main" xmlns:r="http://schemas.openxmlformats.org/officeDocument/2006/relationships" xmlns:mc="http://schemas.openxmlformats.org/markup-compatibility/2006" xmlns:mv="urn:schemas-microsoft-com:mac:vml" xmlns:p="http://schemas.openxmlformats.org/presentationml/2006/main" xmlns:c="http://schemas.openxmlformats.org/drawingml/2006/chart" xmlns:dgm="http://schemas.openxmlformats.org/drawingml/2006/diagram" xmlns:o="urn:schemas-microsoft-com:office:office" xmlns:v="urn:schemas-microsoft-com:vml" xmlns:pvml="urn:schemas-microsoft-com:office:powerpoint" xmlns:com="http://schemas.openxmlformats.org/drawingml/2006/compatibility" xmlns:p14="http://schemas.microsoft.com/office/powerpoint/2010/main" xmlns:p15="http://schemas.microsoft.com/office/powerpoint/2012/main" xmlns:ahyp="http://schemas.microsoft.com/office/drawing/2018/hyperlinkcolor">
+<p:sld xmlns:a="http://schemas.openxmlformats.org/drawingml/2006/main" xmlns:r="http://schemas.openxmlformats.org/officeDocument/2006/relationships" xmlns:p="http://schemas.openxmlformats.org/presentationml/2006/main">
   <p:cSld>
     <p:spTree>
       <p:nvGrpSpPr>
-        <p:cNvPr id="112" name="Shape 112"/>
+        <p:cNvPr id="1" name="Shape 112"/>
         <p:cNvGrpSpPr/>
         <p:nvPr/>
       </p:nvGrpSpPr>
@@ -15609,12 +15764,12 @@
           </a:ln>
         </p:spPr>
         <p:txBody>
-          <a:bodyPr anchorCtr="0" anchor="t" bIns="91425" lIns="91425" spcFirstLastPara="1" rIns="91425" wrap="square" tIns="91425">
+          <a:bodyPr spcFirstLastPara="1" wrap="square" lIns="91425" tIns="91425" rIns="91425" bIns="91425" anchor="t" anchorCtr="0">
             <a:noAutofit/>
           </a:bodyPr>
           <a:lstStyle/>
           <a:p>
-            <a:pPr indent="0" lvl="0" marL="0" rtl="0" algn="ctr">
+            <a:pPr marL="0" lvl="0" indent="0" algn="ctr" rtl="0">
               <a:spcBef>
                 <a:spcPts val="0"/>
               </a:spcBef>
@@ -15624,7 +15779,7 @@
               <a:buNone/>
             </a:pPr>
             <a:r>
-              <a:rPr b="1" lang="en" sz="2300">
+              <a:rPr lang="en" sz="2300" b="1">
                 <a:solidFill>
                   <a:schemeClr val="dk2"/>
                 </a:solidFill>
@@ -15635,7 +15790,7 @@
               </a:rPr>
               <a:t>Functional Decomposition Diagram (Swatej Mella)</a:t>
             </a:r>
-            <a:endParaRPr b="1" sz="2300">
+            <a:endParaRPr sz="2300" b="1">
               <a:solidFill>
                 <a:schemeClr val="dk2"/>
               </a:solidFill>
@@ -15684,11 +15839,11 @@
 </file>
 
 <file path=ppt/slides/slide3.xml><?xml version="1.0" encoding="utf-8"?>
-<p:sld xmlns:a="http://schemas.openxmlformats.org/drawingml/2006/main" xmlns:r="http://schemas.openxmlformats.org/officeDocument/2006/relationships" xmlns:mc="http://schemas.openxmlformats.org/markup-compatibility/2006" xmlns:mv="urn:schemas-microsoft-com:mac:vml" xmlns:p="http://schemas.openxmlformats.org/presentationml/2006/main" xmlns:c="http://schemas.openxmlformats.org/drawingml/2006/chart" xmlns:dgm="http://schemas.openxmlformats.org/drawingml/2006/diagram" xmlns:o="urn:schemas-microsoft-com:office:office" xmlns:v="urn:schemas-microsoft-com:vml" xmlns:pvml="urn:schemas-microsoft-com:office:powerpoint" xmlns:com="http://schemas.openxmlformats.org/drawingml/2006/compatibility" xmlns:p14="http://schemas.microsoft.com/office/powerpoint/2010/main" xmlns:p15="http://schemas.microsoft.com/office/powerpoint/2012/main" xmlns:ahyp="http://schemas.microsoft.com/office/drawing/2018/hyperlinkcolor">
+<p:sld xmlns:a="http://schemas.openxmlformats.org/drawingml/2006/main" xmlns:r="http://schemas.openxmlformats.org/officeDocument/2006/relationships" xmlns:p="http://schemas.openxmlformats.org/presentationml/2006/main">
   <p:cSld>
     <p:spTree>
       <p:nvGrpSpPr>
-        <p:cNvPr id="118" name="Shape 118"/>
+        <p:cNvPr id="1" name="Shape 118"/>
         <p:cNvGrpSpPr/>
         <p:nvPr/>
       </p:nvGrpSpPr>
@@ -15720,12 +15875,12 @@
           </a:ln>
         </p:spPr>
         <p:txBody>
-          <a:bodyPr anchorCtr="0" anchor="t" bIns="91425" lIns="91425" spcFirstLastPara="1" rIns="91425" wrap="square" tIns="91425">
+          <a:bodyPr spcFirstLastPara="1" wrap="square" lIns="91425" tIns="91425" rIns="91425" bIns="91425" anchor="t" anchorCtr="0">
             <a:noAutofit/>
           </a:bodyPr>
           <a:lstStyle/>
           <a:p>
-            <a:pPr indent="0" lvl="0" marL="0" rtl="0" algn="ctr">
+            <a:pPr marL="0" lvl="0" indent="0" algn="ctr" rtl="0">
               <a:spcBef>
                 <a:spcPts val="0"/>
               </a:spcBef>
@@ -15735,7 +15890,7 @@
               <a:buNone/>
             </a:pPr>
             <a:r>
-              <a:rPr b="1" lang="en" sz="2300">
+              <a:rPr lang="en" sz="2300" b="1">
                 <a:solidFill>
                   <a:schemeClr val="dk2"/>
                 </a:solidFill>
@@ -15744,21 +15899,9 @@
                 <a:cs typeface="Merriweather"/>
                 <a:sym typeface="Merriweather"/>
               </a:rPr>
-              <a:t>Requirements Composition Table </a:t>
+              <a:t>Requirements Composition Table (Kiran Rathod)</a:t>
             </a:r>
-            <a:r>
-              <a:rPr b="1" lang="en" sz="2300">
-                <a:solidFill>
-                  <a:schemeClr val="dk2"/>
-                </a:solidFill>
-                <a:latin typeface="Merriweather"/>
-                <a:ea typeface="Merriweather"/>
-                <a:cs typeface="Merriweather"/>
-                <a:sym typeface="Merriweather"/>
-              </a:rPr>
-              <a:t>(Kiran Rathod)</a:t>
-            </a:r>
-            <a:endParaRPr b="1" sz="2300">
+            <a:endParaRPr sz="2300" b="1">
               <a:solidFill>
                 <a:schemeClr val="dk2"/>
               </a:solidFill>
@@ -15807,11 +15950,11 @@
 </file>
 
 <file path=ppt/slides/slide4.xml><?xml version="1.0" encoding="utf-8"?>
-<p:sld xmlns:a="http://schemas.openxmlformats.org/drawingml/2006/main" xmlns:r="http://schemas.openxmlformats.org/officeDocument/2006/relationships" xmlns:mc="http://schemas.openxmlformats.org/markup-compatibility/2006" xmlns:mv="urn:schemas-microsoft-com:mac:vml" xmlns:p="http://schemas.openxmlformats.org/presentationml/2006/main" xmlns:c="http://schemas.openxmlformats.org/drawingml/2006/chart" xmlns:dgm="http://schemas.openxmlformats.org/drawingml/2006/diagram" xmlns:o="urn:schemas-microsoft-com:office:office" xmlns:v="urn:schemas-microsoft-com:vml" xmlns:pvml="urn:schemas-microsoft-com:office:powerpoint" xmlns:com="http://schemas.openxmlformats.org/drawingml/2006/compatibility" xmlns:p14="http://schemas.microsoft.com/office/powerpoint/2010/main" xmlns:p15="http://schemas.microsoft.com/office/powerpoint/2012/main" xmlns:ahyp="http://schemas.microsoft.com/office/drawing/2018/hyperlinkcolor">
+<p:sld xmlns:a="http://schemas.openxmlformats.org/drawingml/2006/main" xmlns:r="http://schemas.openxmlformats.org/officeDocument/2006/relationships" xmlns:p="http://schemas.openxmlformats.org/presentationml/2006/main">
   <p:cSld>
     <p:spTree>
       <p:nvGrpSpPr>
-        <p:cNvPr id="124" name="Shape 124"/>
+        <p:cNvPr id="1" name="Shape 124"/>
         <p:cNvGrpSpPr/>
         <p:nvPr/>
       </p:nvGrpSpPr>
@@ -15843,12 +15986,12 @@
           </a:ln>
         </p:spPr>
         <p:txBody>
-          <a:bodyPr anchorCtr="0" anchor="t" bIns="91425" lIns="91425" spcFirstLastPara="1" rIns="91425" wrap="square" tIns="91425">
+          <a:bodyPr spcFirstLastPara="1" wrap="square" lIns="91425" tIns="91425" rIns="91425" bIns="91425" anchor="t" anchorCtr="0">
             <a:noAutofit/>
           </a:bodyPr>
           <a:lstStyle/>
           <a:p>
-            <a:pPr indent="0" lvl="0" marL="0" rtl="0" algn="ctr">
+            <a:pPr marL="0" lvl="0" indent="0" algn="ctr" rtl="0">
               <a:spcBef>
                 <a:spcPts val="0"/>
               </a:spcBef>
@@ -15858,7 +16001,7 @@
               <a:buNone/>
             </a:pPr>
             <a:r>
-              <a:rPr b="1" lang="en" sz="2300">
+              <a:rPr lang="en" sz="2300" b="1">
                 <a:solidFill>
                   <a:schemeClr val="dk2"/>
                 </a:solidFill>
@@ -15867,21 +16010,9 @@
                 <a:cs typeface="Merriweather"/>
                 <a:sym typeface="Merriweather"/>
               </a:rPr>
-              <a:t>Testing RoadMap </a:t>
+              <a:t>Testing RoadMap (Kiran Rathod)</a:t>
             </a:r>
-            <a:r>
-              <a:rPr b="1" lang="en" sz="2300">
-                <a:solidFill>
-                  <a:schemeClr val="dk2"/>
-                </a:solidFill>
-                <a:latin typeface="Merriweather"/>
-                <a:ea typeface="Merriweather"/>
-                <a:cs typeface="Merriweather"/>
-                <a:sym typeface="Merriweather"/>
-              </a:rPr>
-              <a:t>(Kiran Rathod)</a:t>
-            </a:r>
-            <a:endParaRPr b="1" sz="2300">
+            <a:endParaRPr sz="2300" b="1">
               <a:solidFill>
                 <a:schemeClr val="dk2"/>
               </a:solidFill>
@@ -15930,11 +16061,11 @@
 </file>
 
 <file path=ppt/slides/slide5.xml><?xml version="1.0" encoding="utf-8"?>
-<p:sld xmlns:a="http://schemas.openxmlformats.org/drawingml/2006/main" xmlns:r="http://schemas.openxmlformats.org/officeDocument/2006/relationships" xmlns:mc="http://schemas.openxmlformats.org/markup-compatibility/2006" xmlns:mv="urn:schemas-microsoft-com:mac:vml" xmlns:p="http://schemas.openxmlformats.org/presentationml/2006/main" xmlns:c="http://schemas.openxmlformats.org/drawingml/2006/chart" xmlns:dgm="http://schemas.openxmlformats.org/drawingml/2006/diagram" xmlns:o="urn:schemas-microsoft-com:office:office" xmlns:v="urn:schemas-microsoft-com:vml" xmlns:pvml="urn:schemas-microsoft-com:office:powerpoint" xmlns:com="http://schemas.openxmlformats.org/drawingml/2006/compatibility" xmlns:p14="http://schemas.microsoft.com/office/powerpoint/2010/main" xmlns:p15="http://schemas.microsoft.com/office/powerpoint/2012/main" xmlns:ahyp="http://schemas.microsoft.com/office/drawing/2018/hyperlinkcolor">
+<p:sld xmlns:a="http://schemas.openxmlformats.org/drawingml/2006/main" xmlns:r="http://schemas.openxmlformats.org/officeDocument/2006/relationships" xmlns:p="http://schemas.openxmlformats.org/presentationml/2006/main">
   <p:cSld>
     <p:spTree>
       <p:nvGrpSpPr>
-        <p:cNvPr id="130" name="Shape 130"/>
+        <p:cNvPr id="1" name="Shape 130"/>
         <p:cNvGrpSpPr/>
         <p:nvPr/>
       </p:nvGrpSpPr>
@@ -15966,12 +16097,12 @@
           </a:ln>
         </p:spPr>
         <p:txBody>
-          <a:bodyPr anchorCtr="0" anchor="t" bIns="91425" lIns="91425" spcFirstLastPara="1" rIns="91425" wrap="square" tIns="91425">
+          <a:bodyPr spcFirstLastPara="1" wrap="square" lIns="91425" tIns="91425" rIns="91425" bIns="91425" anchor="t" anchorCtr="0">
             <a:noAutofit/>
           </a:bodyPr>
           <a:lstStyle/>
           <a:p>
-            <a:pPr indent="0" lvl="0" marL="0" rtl="0" algn="ctr">
+            <a:pPr marL="0" lvl="0" indent="0" algn="ctr" rtl="0">
               <a:spcBef>
                 <a:spcPts val="0"/>
               </a:spcBef>
@@ -15981,7 +16112,7 @@
               <a:buNone/>
             </a:pPr>
             <a:r>
-              <a:rPr b="1" lang="en" sz="2300">
+              <a:rPr lang="en" sz="2300" b="1">
                 <a:solidFill>
                   <a:schemeClr val="dk2"/>
                 </a:solidFill>
@@ -15990,21 +16121,9 @@
                 <a:cs typeface="Merriweather"/>
                 <a:sym typeface="Merriweather"/>
               </a:rPr>
-              <a:t>Test Plan </a:t>
+              <a:t>Test Plan (Ayush Gehlot)</a:t>
             </a:r>
-            <a:r>
-              <a:rPr b="1" lang="en" sz="2300">
-                <a:solidFill>
-                  <a:schemeClr val="dk2"/>
-                </a:solidFill>
-                <a:latin typeface="Merriweather"/>
-                <a:ea typeface="Merriweather"/>
-                <a:cs typeface="Merriweather"/>
-                <a:sym typeface="Merriweather"/>
-              </a:rPr>
-              <a:t>(Ayush Gehlot)</a:t>
-            </a:r>
-            <a:endParaRPr b="1" sz="2300">
+            <a:endParaRPr sz="2300" b="1">
               <a:solidFill>
                 <a:schemeClr val="dk2"/>
               </a:solidFill>
@@ -16054,7 +16173,7 @@
           <a:blip r:embed="rId4">
             <a:alphaModFix/>
           </a:blip>
-          <a:srcRect b="-4536" l="0" r="-999" t="0"/>
+          <a:srcRect r="-999" b="-4536"/>
           <a:stretch/>
         </p:blipFill>
         <p:spPr>
@@ -16109,7 +16228,7 @@
           <a:blip r:embed="rId6">
             <a:alphaModFix/>
           </a:blip>
-          <a:srcRect b="0" l="0" r="0" t="3474"/>
+          <a:srcRect t="3474"/>
           <a:stretch/>
         </p:blipFill>
         <p:spPr>
@@ -16135,11 +16254,11 @@
 </file>
 
 <file path=ppt/slides/slide6.xml><?xml version="1.0" encoding="utf-8"?>
-<p:sld xmlns:a="http://schemas.openxmlformats.org/drawingml/2006/main" xmlns:r="http://schemas.openxmlformats.org/officeDocument/2006/relationships" xmlns:mc="http://schemas.openxmlformats.org/markup-compatibility/2006" xmlns:mv="urn:schemas-microsoft-com:mac:vml" xmlns:p="http://schemas.openxmlformats.org/presentationml/2006/main" xmlns:c="http://schemas.openxmlformats.org/drawingml/2006/chart" xmlns:dgm="http://schemas.openxmlformats.org/drawingml/2006/diagram" xmlns:o="urn:schemas-microsoft-com:office:office" xmlns:v="urn:schemas-microsoft-com:vml" xmlns:pvml="urn:schemas-microsoft-com:office:powerpoint" xmlns:com="http://schemas.openxmlformats.org/drawingml/2006/compatibility" xmlns:p14="http://schemas.microsoft.com/office/powerpoint/2010/main" xmlns:p15="http://schemas.microsoft.com/office/powerpoint/2012/main" xmlns:ahyp="http://schemas.microsoft.com/office/drawing/2018/hyperlinkcolor">
+<p:sld xmlns:a="http://schemas.openxmlformats.org/drawingml/2006/main" xmlns:r="http://schemas.openxmlformats.org/officeDocument/2006/relationships" xmlns:p="http://schemas.openxmlformats.org/presentationml/2006/main">
   <p:cSld>
     <p:spTree>
       <p:nvGrpSpPr>
-        <p:cNvPr id="139" name="Shape 139"/>
+        <p:cNvPr id="1" name="Shape 139"/>
         <p:cNvGrpSpPr/>
         <p:nvPr/>
       </p:nvGrpSpPr>
@@ -16171,12 +16290,12 @@
           </a:ln>
         </p:spPr>
         <p:txBody>
-          <a:bodyPr anchorCtr="0" anchor="t" bIns="91425" lIns="91425" spcFirstLastPara="1" rIns="91425" wrap="square" tIns="91425">
+          <a:bodyPr spcFirstLastPara="1" wrap="square" lIns="91425" tIns="91425" rIns="91425" bIns="91425" anchor="t" anchorCtr="0">
             <a:noAutofit/>
           </a:bodyPr>
           <a:lstStyle/>
           <a:p>
-            <a:pPr indent="0" lvl="0" marL="0" rtl="0" algn="ctr">
+            <a:pPr marL="0" lvl="0" indent="0" algn="ctr" rtl="0">
               <a:spcBef>
                 <a:spcPts val="0"/>
               </a:spcBef>
@@ -16186,7 +16305,7 @@
               <a:buNone/>
             </a:pPr>
             <a:r>
-              <a:rPr b="1" lang="en" sz="2300">
+              <a:rPr lang="en" sz="2300" b="1">
                 <a:solidFill>
                   <a:schemeClr val="dk2"/>
                 </a:solidFill>
@@ -16197,7 +16316,7 @@
               </a:rPr>
               <a:t>Test Plan (Ayush Gehlot)</a:t>
             </a:r>
-            <a:endParaRPr b="1" sz="2300">
+            <a:endParaRPr sz="2300" b="1">
               <a:solidFill>
                 <a:schemeClr val="dk2"/>
               </a:solidFill>
@@ -16442,11 +16561,11 @@
 </file>
 
 <file path=ppt/slides/slide7.xml><?xml version="1.0" encoding="utf-8"?>
-<p:sld xmlns:a="http://schemas.openxmlformats.org/drawingml/2006/main" xmlns:r="http://schemas.openxmlformats.org/officeDocument/2006/relationships" xmlns:mc="http://schemas.openxmlformats.org/markup-compatibility/2006" xmlns:mv="urn:schemas-microsoft-com:mac:vml" xmlns:p="http://schemas.openxmlformats.org/presentationml/2006/main" xmlns:c="http://schemas.openxmlformats.org/drawingml/2006/chart" xmlns:dgm="http://schemas.openxmlformats.org/drawingml/2006/diagram" xmlns:o="urn:schemas-microsoft-com:office:office" xmlns:v="urn:schemas-microsoft-com:vml" xmlns:pvml="urn:schemas-microsoft-com:office:powerpoint" xmlns:com="http://schemas.openxmlformats.org/drawingml/2006/compatibility" xmlns:p14="http://schemas.microsoft.com/office/powerpoint/2010/main" xmlns:p15="http://schemas.microsoft.com/office/powerpoint/2012/main" xmlns:ahyp="http://schemas.microsoft.com/office/drawing/2018/hyperlinkcolor">
+<p:sld xmlns:a="http://schemas.openxmlformats.org/drawingml/2006/main" xmlns:r="http://schemas.openxmlformats.org/officeDocument/2006/relationships" xmlns:p="http://schemas.openxmlformats.org/presentationml/2006/main">
   <p:cSld>
     <p:spTree>
       <p:nvGrpSpPr>
-        <p:cNvPr id="152" name="Shape 152"/>
+        <p:cNvPr id="1" name="Shape 152"/>
         <p:cNvGrpSpPr/>
         <p:nvPr/>
       </p:nvGrpSpPr>
@@ -16478,12 +16597,12 @@
           </a:ln>
         </p:spPr>
         <p:txBody>
-          <a:bodyPr anchorCtr="0" anchor="t" bIns="91425" lIns="91425" spcFirstLastPara="1" rIns="91425" wrap="square" tIns="91425">
+          <a:bodyPr spcFirstLastPara="1" wrap="square" lIns="91425" tIns="91425" rIns="91425" bIns="91425" anchor="t" anchorCtr="0">
             <a:noAutofit/>
           </a:bodyPr>
           <a:lstStyle/>
           <a:p>
-            <a:pPr indent="0" lvl="0" marL="0" rtl="0" algn="ctr">
+            <a:pPr marL="0" lvl="0" indent="0" algn="ctr" rtl="0">
               <a:spcBef>
                 <a:spcPts val="0"/>
               </a:spcBef>
@@ -16493,7 +16612,7 @@
               <a:buNone/>
             </a:pPr>
             <a:r>
-              <a:rPr b="1" lang="en" sz="2300">
+              <a:rPr lang="en" sz="2300" b="1">
                 <a:solidFill>
                   <a:schemeClr val="dk2"/>
                 </a:solidFill>
@@ -16504,7 +16623,7 @@
               </a:rPr>
               <a:t>Test Design Specification (Deepesh Katudia)</a:t>
             </a:r>
-            <a:endParaRPr b="1" sz="2300">
+            <a:endParaRPr sz="2300" b="1">
               <a:solidFill>
                 <a:schemeClr val="dk2"/>
               </a:solidFill>
@@ -16581,11 +16700,11 @@
 </file>
 
 <file path=ppt/slides/slide8.xml><?xml version="1.0" encoding="utf-8"?>
-<p:sld xmlns:a="http://schemas.openxmlformats.org/drawingml/2006/main" xmlns:r="http://schemas.openxmlformats.org/officeDocument/2006/relationships" xmlns:mc="http://schemas.openxmlformats.org/markup-compatibility/2006" xmlns:mv="urn:schemas-microsoft-com:mac:vml" xmlns:p="http://schemas.openxmlformats.org/presentationml/2006/main" xmlns:c="http://schemas.openxmlformats.org/drawingml/2006/chart" xmlns:dgm="http://schemas.openxmlformats.org/drawingml/2006/diagram" xmlns:o="urn:schemas-microsoft-com:office:office" xmlns:v="urn:schemas-microsoft-com:vml" xmlns:pvml="urn:schemas-microsoft-com:office:powerpoint" xmlns:com="http://schemas.openxmlformats.org/drawingml/2006/compatibility" xmlns:p14="http://schemas.microsoft.com/office/powerpoint/2010/main" xmlns:p15="http://schemas.microsoft.com/office/powerpoint/2012/main" xmlns:ahyp="http://schemas.microsoft.com/office/drawing/2018/hyperlinkcolor">
+<p:sld xmlns:a="http://schemas.openxmlformats.org/drawingml/2006/main" xmlns:r="http://schemas.openxmlformats.org/officeDocument/2006/relationships" xmlns:p="http://schemas.openxmlformats.org/presentationml/2006/main">
   <p:cSld>
     <p:spTree>
       <p:nvGrpSpPr>
-        <p:cNvPr id="159" name="Shape 159"/>
+        <p:cNvPr id="1" name="Shape 159"/>
         <p:cNvGrpSpPr/>
         <p:nvPr/>
       </p:nvGrpSpPr>
@@ -16617,12 +16736,12 @@
           </a:ln>
         </p:spPr>
         <p:txBody>
-          <a:bodyPr anchorCtr="0" anchor="t" bIns="91425" lIns="91425" spcFirstLastPara="1" rIns="91425" wrap="square" tIns="91425">
+          <a:bodyPr spcFirstLastPara="1" wrap="square" lIns="91425" tIns="91425" rIns="91425" bIns="91425" anchor="t" anchorCtr="0">
             <a:noAutofit/>
           </a:bodyPr>
           <a:lstStyle/>
           <a:p>
-            <a:pPr indent="0" lvl="0" marL="0" rtl="0" algn="ctr">
+            <a:pPr marL="0" lvl="0" indent="0" algn="ctr" rtl="0">
               <a:spcBef>
                 <a:spcPts val="0"/>
               </a:spcBef>
@@ -16632,7 +16751,7 @@
               <a:buNone/>
             </a:pPr>
             <a:r>
-              <a:rPr b="1" lang="en" sz="2300">
+              <a:rPr lang="en" sz="2300" b="1">
                 <a:solidFill>
                   <a:schemeClr val="dk2"/>
                 </a:solidFill>
@@ -16643,7 +16762,7 @@
               </a:rPr>
               <a:t>Test Case Specification (Deepesh Katudia)</a:t>
             </a:r>
-            <a:endParaRPr b="1" sz="2300">
+            <a:endParaRPr sz="2300" b="1">
               <a:solidFill>
                 <a:schemeClr val="dk2"/>
               </a:solidFill>
@@ -16720,11 +16839,11 @@
 </file>
 
 <file path=ppt/slides/slide9.xml><?xml version="1.0" encoding="utf-8"?>
-<p:sld xmlns:a="http://schemas.openxmlformats.org/drawingml/2006/main" xmlns:r="http://schemas.openxmlformats.org/officeDocument/2006/relationships" xmlns:mc="http://schemas.openxmlformats.org/markup-compatibility/2006" xmlns:mv="urn:schemas-microsoft-com:mac:vml" xmlns:p="http://schemas.openxmlformats.org/presentationml/2006/main" xmlns:c="http://schemas.openxmlformats.org/drawingml/2006/chart" xmlns:dgm="http://schemas.openxmlformats.org/drawingml/2006/diagram" xmlns:o="urn:schemas-microsoft-com:office:office" xmlns:v="urn:schemas-microsoft-com:vml" xmlns:pvml="urn:schemas-microsoft-com:office:powerpoint" xmlns:com="http://schemas.openxmlformats.org/drawingml/2006/compatibility" xmlns:p14="http://schemas.microsoft.com/office/powerpoint/2010/main" xmlns:p15="http://schemas.microsoft.com/office/powerpoint/2012/main" xmlns:ahyp="http://schemas.microsoft.com/office/drawing/2018/hyperlinkcolor">
+<p:sld xmlns:a="http://schemas.openxmlformats.org/drawingml/2006/main" xmlns:r="http://schemas.openxmlformats.org/officeDocument/2006/relationships" xmlns:p="http://schemas.openxmlformats.org/presentationml/2006/main">
   <p:cSld>
     <p:spTree>
       <p:nvGrpSpPr>
-        <p:cNvPr id="166" name="Shape 166"/>
+        <p:cNvPr id="1" name="Shape 166"/>
         <p:cNvGrpSpPr/>
         <p:nvPr/>
       </p:nvGrpSpPr>
@@ -16756,12 +16875,12 @@
           </a:ln>
         </p:spPr>
         <p:txBody>
-          <a:bodyPr anchorCtr="0" anchor="t" bIns="91425" lIns="91425" spcFirstLastPara="1" rIns="91425" wrap="square" tIns="91425">
+          <a:bodyPr spcFirstLastPara="1" wrap="square" lIns="91425" tIns="91425" rIns="91425" bIns="91425" anchor="t" anchorCtr="0">
             <a:noAutofit/>
           </a:bodyPr>
           <a:lstStyle/>
           <a:p>
-            <a:pPr indent="0" lvl="0" marL="0" rtl="0" algn="ctr">
+            <a:pPr marL="0" lvl="0" indent="0" algn="ctr" rtl="0">
               <a:spcBef>
                 <a:spcPts val="0"/>
               </a:spcBef>
@@ -16771,7 +16890,7 @@
               <a:buNone/>
             </a:pPr>
             <a:r>
-              <a:rPr b="1" lang="en" sz="2300">
+              <a:rPr lang="en" sz="2300" b="1">
                 <a:solidFill>
                   <a:schemeClr val="dk2"/>
                 </a:solidFill>
@@ -16780,21 +16899,9 @@
                 <a:cs typeface="Merriweather"/>
                 <a:sym typeface="Merriweather"/>
               </a:rPr>
-              <a:t>Test Summary Report </a:t>
+              <a:t>Test Summary Report (Parth Desai)</a:t>
             </a:r>
-            <a:r>
-              <a:rPr b="1" lang="en" sz="2300">
-                <a:solidFill>
-                  <a:schemeClr val="dk2"/>
-                </a:solidFill>
-                <a:latin typeface="Merriweather"/>
-                <a:ea typeface="Merriweather"/>
-                <a:cs typeface="Merriweather"/>
-                <a:sym typeface="Merriweather"/>
-              </a:rPr>
-              <a:t>(Parth Desai)</a:t>
-            </a:r>
-            <a:endParaRPr b="1" sz="2300">
+            <a:endParaRPr sz="2300" b="1">
               <a:solidFill>
                 <a:schemeClr val="dk2"/>
               </a:solidFill>
@@ -16871,7 +16978,288 @@
 </file>
 
 <file path=ppt/theme/theme1.xml><?xml version="1.0" encoding="utf-8"?>
-<a:theme xmlns:a="http://schemas.openxmlformats.org/drawingml/2006/main" xmlns:r="http://schemas.openxmlformats.org/officeDocument/2006/relationships">
+<a:theme xmlns:a="http://schemas.openxmlformats.org/drawingml/2006/main" name="Paradigm">
+  <a:themeElements>
+    <a:clrScheme name="Paradigm">
+      <a:dk1>
+        <a:srgbClr val="31394D"/>
+      </a:dk1>
+      <a:lt1>
+        <a:srgbClr val="FFFFFF"/>
+      </a:lt1>
+      <a:dk2>
+        <a:srgbClr val="666666"/>
+      </a:dk2>
+      <a:lt2>
+        <a:srgbClr val="626B73"/>
+      </a:lt2>
+      <a:accent1>
+        <a:srgbClr val="002F4A"/>
+      </a:accent1>
+      <a:accent2>
+        <a:srgbClr val="D9C4B1"/>
+      </a:accent2>
+      <a:accent3>
+        <a:srgbClr val="EDE3DA"/>
+      </a:accent3>
+      <a:accent4>
+        <a:srgbClr val="B85741"/>
+      </a:accent4>
+      <a:accent5>
+        <a:srgbClr val="009384"/>
+      </a:accent5>
+      <a:accent6>
+        <a:srgbClr val="D0F6FF"/>
+      </a:accent6>
+      <a:hlink>
+        <a:srgbClr val="009384"/>
+      </a:hlink>
+      <a:folHlink>
+        <a:srgbClr val="009384"/>
+      </a:folHlink>
+    </a:clrScheme>
+    <a:fontScheme name="Office">
+      <a:majorFont>
+        <a:latin typeface="Arial"/>
+        <a:ea typeface=""/>
+        <a:cs typeface=""/>
+        <a:font script="Jpan" typeface="ＭＳ Ｐゴシック"/>
+        <a:font script="Hang" typeface="맑은 고딕"/>
+        <a:font script="Hans" typeface="宋体"/>
+        <a:font script="Hant" typeface="新細明體"/>
+        <a:font script="Arab" typeface="Times New Roman"/>
+        <a:font script="Hebr" typeface="Times New Roman"/>
+        <a:font script="Thai" typeface="Angsana New"/>
+        <a:font script="Ethi" typeface="Nyala"/>
+        <a:font script="Beng" typeface="Vrinda"/>
+        <a:font script="Gujr" typeface="Shruti"/>
+        <a:font script="Khmr" typeface="MoolBoran"/>
+        <a:font script="Knda" typeface="Tunga"/>
+        <a:font script="Guru" typeface="Raavi"/>
+        <a:font script="Cans" typeface="Euphemia"/>
+        <a:font script="Cher" typeface="Plantagenet Cherokee"/>
+        <a:font script="Yiii" typeface="Microsoft Yi Baiti"/>
+        <a:font script="Tibt" typeface="Microsoft Himalaya"/>
+        <a:font script="Thaa" typeface="MV Boli"/>
+        <a:font script="Deva" typeface="Mangal"/>
+        <a:font script="Telu" typeface="Gautami"/>
+        <a:font script="Taml" typeface="Latha"/>
+        <a:font script="Syrc" typeface="Estrangelo Edessa"/>
+        <a:font script="Orya" typeface="Kalinga"/>
+        <a:font script="Mlym" typeface="Kartika"/>
+        <a:font script="Laoo" typeface="DokChampa"/>
+        <a:font script="Sinh" typeface="Iskoola Pota"/>
+        <a:font script="Mong" typeface="Mongolian Baiti"/>
+        <a:font script="Viet" typeface="Times New Roman"/>
+        <a:font script="Uigh" typeface="Microsoft Uighur"/>
+        <a:font script="Geor" typeface="Sylfaen"/>
+      </a:majorFont>
+      <a:minorFont>
+        <a:latin typeface="Arial"/>
+        <a:ea typeface=""/>
+        <a:cs typeface=""/>
+        <a:font script="Jpan" typeface="ＭＳ Ｐゴシック"/>
+        <a:font script="Hang" typeface="맑은 고딕"/>
+        <a:font script="Hans" typeface="宋体"/>
+        <a:font script="Hant" typeface="新細明體"/>
+        <a:font script="Arab" typeface="Arial"/>
+        <a:font script="Hebr" typeface="Arial"/>
+        <a:font script="Thai" typeface="Cordia New"/>
+        <a:font script="Ethi" typeface="Nyala"/>
+        <a:font script="Beng" typeface="Vrinda"/>
+        <a:font script="Gujr" typeface="Shruti"/>
+        <a:font script="Khmr" typeface="DaunPenh"/>
+        <a:font script="Knda" typeface="Tunga"/>
+        <a:font script="Guru" typeface="Raavi"/>
+        <a:font script="Cans" typeface="Euphemia"/>
+        <a:font script="Cher" typeface="Plantagenet Cherokee"/>
+        <a:font script="Yiii" typeface="Microsoft Yi Baiti"/>
+        <a:font script="Tibt" typeface="Microsoft Himalaya"/>
+        <a:font script="Thaa" typeface="MV Boli"/>
+        <a:font script="Deva" typeface="Mangal"/>
+        <a:font script="Telu" typeface="Gautami"/>
+        <a:font script="Taml" typeface="Latha"/>
+        <a:font script="Syrc" typeface="Estrangelo Edessa"/>
+        <a:font script="Orya" typeface="Kalinga"/>
+        <a:font script="Mlym" typeface="Kartika"/>
+        <a:font script="Laoo" typeface="DokChampa"/>
+        <a:font script="Sinh" typeface="Iskoola Pota"/>
+        <a:font script="Mong" typeface="Mongolian Baiti"/>
+        <a:font script="Viet" typeface="Arial"/>
+        <a:font script="Uigh" typeface="Microsoft Uighur"/>
+        <a:font script="Geor" typeface="Sylfaen"/>
+      </a:minorFont>
+    </a:fontScheme>
+    <a:fmtScheme name="Office">
+      <a:fillStyleLst>
+        <a:solidFill>
+          <a:schemeClr val="phClr"/>
+        </a:solidFill>
+        <a:gradFill rotWithShape="1">
+          <a:gsLst>
+            <a:gs pos="0">
+              <a:schemeClr val="phClr">
+                <a:tint val="50000"/>
+                <a:satMod val="300000"/>
+              </a:schemeClr>
+            </a:gs>
+            <a:gs pos="35000">
+              <a:schemeClr val="phClr">
+                <a:tint val="37000"/>
+                <a:satMod val="300000"/>
+              </a:schemeClr>
+            </a:gs>
+            <a:gs pos="100000">
+              <a:schemeClr val="phClr">
+                <a:tint val="15000"/>
+                <a:satMod val="350000"/>
+              </a:schemeClr>
+            </a:gs>
+          </a:gsLst>
+          <a:lin ang="16200000" scaled="1"/>
+        </a:gradFill>
+        <a:gradFill rotWithShape="1">
+          <a:gsLst>
+            <a:gs pos="0">
+              <a:schemeClr val="phClr">
+                <a:tint val="100000"/>
+                <a:shade val="100000"/>
+                <a:satMod val="130000"/>
+              </a:schemeClr>
+            </a:gs>
+            <a:gs pos="100000">
+              <a:schemeClr val="phClr">
+                <a:tint val="50000"/>
+                <a:shade val="100000"/>
+                <a:satMod val="350000"/>
+              </a:schemeClr>
+            </a:gs>
+          </a:gsLst>
+          <a:lin ang="16200000" scaled="0"/>
+        </a:gradFill>
+      </a:fillStyleLst>
+      <a:lnStyleLst>
+        <a:ln w="9525" cap="flat" cmpd="sng" algn="ctr">
+          <a:solidFill>
+            <a:schemeClr val="phClr">
+              <a:shade val="95000"/>
+              <a:satMod val="105000"/>
+            </a:schemeClr>
+          </a:solidFill>
+          <a:prstDash val="solid"/>
+        </a:ln>
+        <a:ln w="25400" cap="flat" cmpd="sng" algn="ctr">
+          <a:solidFill>
+            <a:schemeClr val="phClr"/>
+          </a:solidFill>
+          <a:prstDash val="solid"/>
+        </a:ln>
+        <a:ln w="38100" cap="flat" cmpd="sng" algn="ctr">
+          <a:solidFill>
+            <a:schemeClr val="phClr"/>
+          </a:solidFill>
+          <a:prstDash val="solid"/>
+        </a:ln>
+      </a:lnStyleLst>
+      <a:effectStyleLst>
+        <a:effectStyle>
+          <a:effectLst>
+            <a:outerShdw blurRad="40000" dist="20000" dir="5400000" rotWithShape="0">
+              <a:srgbClr val="000000">
+                <a:alpha val="38000"/>
+              </a:srgbClr>
+            </a:outerShdw>
+          </a:effectLst>
+        </a:effectStyle>
+        <a:effectStyle>
+          <a:effectLst>
+            <a:outerShdw blurRad="40000" dist="23000" dir="5400000" rotWithShape="0">
+              <a:srgbClr val="000000">
+                <a:alpha val="35000"/>
+              </a:srgbClr>
+            </a:outerShdw>
+          </a:effectLst>
+        </a:effectStyle>
+        <a:effectStyle>
+          <a:effectLst>
+            <a:outerShdw blurRad="40000" dist="23000" dir="5400000" rotWithShape="0">
+              <a:srgbClr val="000000">
+                <a:alpha val="35000"/>
+              </a:srgbClr>
+            </a:outerShdw>
+          </a:effectLst>
+          <a:scene3d>
+            <a:camera prst="orthographicFront">
+              <a:rot lat="0" lon="0" rev="0"/>
+            </a:camera>
+            <a:lightRig rig="threePt" dir="t">
+              <a:rot lat="0" lon="0" rev="1200000"/>
+            </a:lightRig>
+          </a:scene3d>
+          <a:sp3d>
+            <a:bevelT w="63500" h="25400"/>
+          </a:sp3d>
+        </a:effectStyle>
+      </a:effectStyleLst>
+      <a:bgFillStyleLst>
+        <a:solidFill>
+          <a:schemeClr val="phClr"/>
+        </a:solidFill>
+        <a:gradFill rotWithShape="1">
+          <a:gsLst>
+            <a:gs pos="0">
+              <a:schemeClr val="phClr">
+                <a:tint val="40000"/>
+                <a:satMod val="350000"/>
+              </a:schemeClr>
+            </a:gs>
+            <a:gs pos="40000">
+              <a:schemeClr val="phClr">
+                <a:tint val="45000"/>
+                <a:shade val="99000"/>
+                <a:satMod val="350000"/>
+              </a:schemeClr>
+            </a:gs>
+            <a:gs pos="100000">
+              <a:schemeClr val="phClr">
+                <a:shade val="20000"/>
+                <a:satMod val="255000"/>
+              </a:schemeClr>
+            </a:gs>
+          </a:gsLst>
+          <a:path path="circle">
+            <a:fillToRect l="50000" t="-80000" r="50000" b="180000"/>
+          </a:path>
+        </a:gradFill>
+        <a:gradFill rotWithShape="1">
+          <a:gsLst>
+            <a:gs pos="0">
+              <a:schemeClr val="phClr">
+                <a:tint val="80000"/>
+                <a:satMod val="300000"/>
+              </a:schemeClr>
+            </a:gs>
+            <a:gs pos="100000">
+              <a:schemeClr val="phClr">
+                <a:shade val="30000"/>
+                <a:satMod val="200000"/>
+              </a:schemeClr>
+            </a:gs>
+          </a:gsLst>
+          <a:path path="circle">
+            <a:fillToRect l="50000" t="50000" r="50000" b="50000"/>
+          </a:path>
+        </a:gradFill>
+      </a:bgFillStyleLst>
+    </a:fmtScheme>
+  </a:themeElements>
+  <a:objectDefaults/>
+  <a:extraClrSchemeLst/>
+</a:theme>
+</file>
+
+<file path=ppt/theme/theme2.xml><?xml version="1.0" encoding="utf-8"?>
+<a:theme xmlns:a="http://schemas.openxmlformats.org/drawingml/2006/main">
   <a:themeElements>
     <a:clrScheme name="Default">
       <a:dk1>
@@ -17146,284 +17534,7 @@
       </a:bgFillStyleLst>
     </a:fmtScheme>
   </a:themeElements>
-</a:theme>
-</file>
-
-<file path=ppt/theme/theme2.xml><?xml version="1.0" encoding="utf-8"?>
-<a:theme xmlns:a="http://schemas.openxmlformats.org/drawingml/2006/main" xmlns:r="http://schemas.openxmlformats.org/officeDocument/2006/relationships" name="Paradigm">
-  <a:themeElements>
-    <a:clrScheme name="Paradigm">
-      <a:dk1>
-        <a:srgbClr val="31394D"/>
-      </a:dk1>
-      <a:lt1>
-        <a:srgbClr val="FFFFFF"/>
-      </a:lt1>
-      <a:dk2>
-        <a:srgbClr val="666666"/>
-      </a:dk2>
-      <a:lt2>
-        <a:srgbClr val="626B73"/>
-      </a:lt2>
-      <a:accent1>
-        <a:srgbClr val="002F4A"/>
-      </a:accent1>
-      <a:accent2>
-        <a:srgbClr val="D9C4B1"/>
-      </a:accent2>
-      <a:accent3>
-        <a:srgbClr val="EDE3DA"/>
-      </a:accent3>
-      <a:accent4>
-        <a:srgbClr val="B85741"/>
-      </a:accent4>
-      <a:accent5>
-        <a:srgbClr val="009384"/>
-      </a:accent5>
-      <a:accent6>
-        <a:srgbClr val="D0F6FF"/>
-      </a:accent6>
-      <a:hlink>
-        <a:srgbClr val="009384"/>
-      </a:hlink>
-      <a:folHlink>
-        <a:srgbClr val="009384"/>
-      </a:folHlink>
-    </a:clrScheme>
-    <a:fontScheme name="Office">
-      <a:majorFont>
-        <a:latin typeface="Arial"/>
-        <a:ea typeface=""/>
-        <a:cs typeface=""/>
-        <a:font script="Jpan" typeface="ＭＳ Ｐゴシック"/>
-        <a:font script="Hang" typeface="맑은 고딕"/>
-        <a:font script="Hans" typeface="宋体"/>
-        <a:font script="Hant" typeface="新細明體"/>
-        <a:font script="Arab" typeface="Times New Roman"/>
-        <a:font script="Hebr" typeface="Times New Roman"/>
-        <a:font script="Thai" typeface="Angsana New"/>
-        <a:font script="Ethi" typeface="Nyala"/>
-        <a:font script="Beng" typeface="Vrinda"/>
-        <a:font script="Gujr" typeface="Shruti"/>
-        <a:font script="Khmr" typeface="MoolBoran"/>
-        <a:font script="Knda" typeface="Tunga"/>
-        <a:font script="Guru" typeface="Raavi"/>
-        <a:font script="Cans" typeface="Euphemia"/>
-        <a:font script="Cher" typeface="Plantagenet Cherokee"/>
-        <a:font script="Yiii" typeface="Microsoft Yi Baiti"/>
-        <a:font script="Tibt" typeface="Microsoft Himalaya"/>
-        <a:font script="Thaa" typeface="MV Boli"/>
-        <a:font script="Deva" typeface="Mangal"/>
-        <a:font script="Telu" typeface="Gautami"/>
-        <a:font script="Taml" typeface="Latha"/>
-        <a:font script="Syrc" typeface="Estrangelo Edessa"/>
-        <a:font script="Orya" typeface="Kalinga"/>
-        <a:font script="Mlym" typeface="Kartika"/>
-        <a:font script="Laoo" typeface="DokChampa"/>
-        <a:font script="Sinh" typeface="Iskoola Pota"/>
-        <a:font script="Mong" typeface="Mongolian Baiti"/>
-        <a:font script="Viet" typeface="Times New Roman"/>
-        <a:font script="Uigh" typeface="Microsoft Uighur"/>
-        <a:font script="Geor" typeface="Sylfaen"/>
-      </a:majorFont>
-      <a:minorFont>
-        <a:latin typeface="Arial"/>
-        <a:ea typeface=""/>
-        <a:cs typeface=""/>
-        <a:font script="Jpan" typeface="ＭＳ Ｐゴシック"/>
-        <a:font script="Hang" typeface="맑은 고딕"/>
-        <a:font script="Hans" typeface="宋体"/>
-        <a:font script="Hant" typeface="新細明體"/>
-        <a:font script="Arab" typeface="Arial"/>
-        <a:font script="Hebr" typeface="Arial"/>
-        <a:font script="Thai" typeface="Cordia New"/>
-        <a:font script="Ethi" typeface="Nyala"/>
-        <a:font script="Beng" typeface="Vrinda"/>
-        <a:font script="Gujr" typeface="Shruti"/>
-        <a:font script="Khmr" typeface="DaunPenh"/>
-        <a:font script="Knda" typeface="Tunga"/>
-        <a:font script="Guru" typeface="Raavi"/>
-        <a:font script="Cans" typeface="Euphemia"/>
-        <a:font script="Cher" typeface="Plantagenet Cherokee"/>
-        <a:font script="Yiii" typeface="Microsoft Yi Baiti"/>
-        <a:font script="Tibt" typeface="Microsoft Himalaya"/>
-        <a:font script="Thaa" typeface="MV Boli"/>
-        <a:font script="Deva" typeface="Mangal"/>
-        <a:font script="Telu" typeface="Gautami"/>
-        <a:font script="Taml" typeface="Latha"/>
-        <a:font script="Syrc" typeface="Estrangelo Edessa"/>
-        <a:font script="Orya" typeface="Kalinga"/>
-        <a:font script="Mlym" typeface="Kartika"/>
-        <a:font script="Laoo" typeface="DokChampa"/>
-        <a:font script="Sinh" typeface="Iskoola Pota"/>
-        <a:font script="Mong" typeface="Mongolian Baiti"/>
-        <a:font script="Viet" typeface="Arial"/>
-        <a:font script="Uigh" typeface="Microsoft Uighur"/>
-        <a:font script="Geor" typeface="Sylfaen"/>
-      </a:minorFont>
-    </a:fontScheme>
-    <a:fmtScheme name="Office">
-      <a:fillStyleLst>
-        <a:solidFill>
-          <a:schemeClr val="phClr"/>
-        </a:solidFill>
-        <a:gradFill rotWithShape="1">
-          <a:gsLst>
-            <a:gs pos="0">
-              <a:schemeClr val="phClr">
-                <a:tint val="50000"/>
-                <a:satMod val="300000"/>
-              </a:schemeClr>
-            </a:gs>
-            <a:gs pos="35000">
-              <a:schemeClr val="phClr">
-                <a:tint val="37000"/>
-                <a:satMod val="300000"/>
-              </a:schemeClr>
-            </a:gs>
-            <a:gs pos="100000">
-              <a:schemeClr val="phClr">
-                <a:tint val="15000"/>
-                <a:satMod val="350000"/>
-              </a:schemeClr>
-            </a:gs>
-          </a:gsLst>
-          <a:lin ang="16200000" scaled="1"/>
-        </a:gradFill>
-        <a:gradFill rotWithShape="1">
-          <a:gsLst>
-            <a:gs pos="0">
-              <a:schemeClr val="phClr">
-                <a:tint val="100000"/>
-                <a:shade val="100000"/>
-                <a:satMod val="130000"/>
-              </a:schemeClr>
-            </a:gs>
-            <a:gs pos="100000">
-              <a:schemeClr val="phClr">
-                <a:tint val="50000"/>
-                <a:shade val="100000"/>
-                <a:satMod val="350000"/>
-              </a:schemeClr>
-            </a:gs>
-          </a:gsLst>
-          <a:lin ang="16200000" scaled="0"/>
-        </a:gradFill>
-      </a:fillStyleLst>
-      <a:lnStyleLst>
-        <a:ln w="9525" cap="flat" cmpd="sng" algn="ctr">
-          <a:solidFill>
-            <a:schemeClr val="phClr">
-              <a:shade val="95000"/>
-              <a:satMod val="105000"/>
-            </a:schemeClr>
-          </a:solidFill>
-          <a:prstDash val="solid"/>
-        </a:ln>
-        <a:ln w="25400" cap="flat" cmpd="sng" algn="ctr">
-          <a:solidFill>
-            <a:schemeClr val="phClr"/>
-          </a:solidFill>
-          <a:prstDash val="solid"/>
-        </a:ln>
-        <a:ln w="38100" cap="flat" cmpd="sng" algn="ctr">
-          <a:solidFill>
-            <a:schemeClr val="phClr"/>
-          </a:solidFill>
-          <a:prstDash val="solid"/>
-        </a:ln>
-      </a:lnStyleLst>
-      <a:effectStyleLst>
-        <a:effectStyle>
-          <a:effectLst>
-            <a:outerShdw blurRad="40000" dist="20000" dir="5400000" rotWithShape="0">
-              <a:srgbClr val="000000">
-                <a:alpha val="38000"/>
-              </a:srgbClr>
-            </a:outerShdw>
-          </a:effectLst>
-        </a:effectStyle>
-        <a:effectStyle>
-          <a:effectLst>
-            <a:outerShdw blurRad="40000" dist="23000" dir="5400000" rotWithShape="0">
-              <a:srgbClr val="000000">
-                <a:alpha val="35000"/>
-              </a:srgbClr>
-            </a:outerShdw>
-          </a:effectLst>
-        </a:effectStyle>
-        <a:effectStyle>
-          <a:effectLst>
-            <a:outerShdw blurRad="40000" dist="23000" dir="5400000" rotWithShape="0">
-              <a:srgbClr val="000000">
-                <a:alpha val="35000"/>
-              </a:srgbClr>
-            </a:outerShdw>
-          </a:effectLst>
-          <a:scene3d>
-            <a:camera prst="orthographicFront">
-              <a:rot lat="0" lon="0" rev="0"/>
-            </a:camera>
-            <a:lightRig rig="threePt" dir="t">
-              <a:rot lat="0" lon="0" rev="1200000"/>
-            </a:lightRig>
-          </a:scene3d>
-          <a:sp3d>
-            <a:bevelT w="63500" h="25400"/>
-          </a:sp3d>
-        </a:effectStyle>
-      </a:effectStyleLst>
-      <a:bgFillStyleLst>
-        <a:solidFill>
-          <a:schemeClr val="phClr"/>
-        </a:solidFill>
-        <a:gradFill rotWithShape="1">
-          <a:gsLst>
-            <a:gs pos="0">
-              <a:schemeClr val="phClr">
-                <a:tint val="40000"/>
-                <a:satMod val="350000"/>
-              </a:schemeClr>
-            </a:gs>
-            <a:gs pos="40000">
-              <a:schemeClr val="phClr">
-                <a:tint val="45000"/>
-                <a:shade val="99000"/>
-                <a:satMod val="350000"/>
-              </a:schemeClr>
-            </a:gs>
-            <a:gs pos="100000">
-              <a:schemeClr val="phClr">
-                <a:shade val="20000"/>
-                <a:satMod val="255000"/>
-              </a:schemeClr>
-            </a:gs>
-          </a:gsLst>
-          <a:path path="circle">
-            <a:fillToRect l="50000" t="-80000" r="50000" b="180000"/>
-          </a:path>
-        </a:gradFill>
-        <a:gradFill rotWithShape="1">
-          <a:gsLst>
-            <a:gs pos="0">
-              <a:schemeClr val="phClr">
-                <a:tint val="80000"/>
-                <a:satMod val="300000"/>
-              </a:schemeClr>
-            </a:gs>
-            <a:gs pos="100000">
-              <a:schemeClr val="phClr">
-                <a:shade val="30000"/>
-                <a:satMod val="200000"/>
-              </a:schemeClr>
-            </a:gs>
-          </a:gsLst>
-          <a:path path="circle">
-            <a:fillToRect l="50000" t="50000" r="50000" b="50000"/>
-          </a:path>
-        </a:gradFill>
-      </a:bgFillStyleLst>
-    </a:fmtScheme>
-  </a:themeElements>
+  <a:objectDefaults/>
+  <a:extraClrSchemeLst/>
 </a:theme>
 </file>